--- a/report/dist/ai-abap-result-deck.pptx
+++ b/report/dist/ai-abap-result-deck.pptx
@@ -23,6 +23,10 @@
     <p:sldId id="271" r:id="rId22"/>
     <p:sldId id="272" r:id="rId23"/>
     <p:sldId id="273" r:id="rId24"/>
+    <p:sldId id="274" r:id="rId25"/>
+    <p:sldId id="275" r:id="rId26"/>
+    <p:sldId id="276" r:id="rId27"/>
+    <p:sldId id="277" r:id="rId28"/>
   </p:sldIdLst>
   <p:sldSz cx="12191695" cy="6858000" type="screen4x3"/>
   <p:notesSz cx="6858000" cy="9144000"/>
@@ -3202,21 +3206,207 @@
                 </a:solidFill>
                 <a:latin typeface="맑은 고딕"/>
               </a:rPr>
-              <a:t>8. 개선 방법 — Gate 3 자동 점검기</a:t>
-            </a:r>
-          </a:p>
-        </p:txBody>
-      </p:sp>
-      <p:sp>
-        <p:nvSpPr>
-          <p:cNvPr id="3" name="TextBox 2"/>
+              <a:t>7. 개선 방법 — 활용 AI 도구</a:t>
+            </a:r>
+          </a:p>
+        </p:txBody>
+      </p:sp>
+      <p:graphicFrame>
+        <p:nvGraphicFramePr>
+          <p:cNvPr id="3" name="Table 2"/>
+          <p:cNvGraphicFramePr>
+            <a:graphicFrameLocks noGrp="1"/>
+          </p:cNvGraphicFramePr>
+          <p:nvPr/>
+        </p:nvGraphicFramePr>
+        <p:xfrm>
+          <a:off x="640080" y="1234440"/>
+          <a:ext cx="10881360" cy="1508760"/>
+        </p:xfrm>
+        <a:graphic>
+          <a:graphicData uri="http://schemas.openxmlformats.org/drawingml/2006/table">
+            <a:tbl>
+              <a:tblPr firstRow="1" bandRow="1">
+                <a:tableStyleId>{5C22544A-7EE6-4342-B048-85BDC9FD1C3A}</a:tableStyleId>
+              </a:tblPr>
+              <a:tblGrid>
+                <a:gridCol w="5440680"/>
+                <a:gridCol w="5440680"/>
+              </a:tblGrid>
+              <a:tr h="301752">
+                <a:tc>
+                  <a:txBody>
+                    <a:bodyPr/>
+                    <a:lstStyle/>
+                    <a:p>
+                      <a:r>
+                        <a:rPr sz="1100" b="1">
+                          <a:latin typeface="맑은 고딕"/>
+                        </a:rPr>
+                        <a:t>도구</a:t>
+                      </a:r>
+                    </a:p>
+                  </a:txBody>
+                  <a:tcPr/>
+                </a:tc>
+                <a:tc>
+                  <a:txBody>
+                    <a:bodyPr/>
+                    <a:lstStyle/>
+                    <a:p>
+                      <a:r>
+                        <a:rPr sz="1100" b="1">
+                          <a:latin typeface="맑은 고딕"/>
+                        </a:rPr>
+                        <a:t>용도</a:t>
+                      </a:r>
+                    </a:p>
+                  </a:txBody>
+                  <a:tcPr/>
+                </a:tc>
+              </a:tr>
+              <a:tr h="301752">
+                <a:tc>
+                  <a:txBody>
+                    <a:bodyPr/>
+                    <a:lstStyle/>
+                    <a:p>
+                      <a:r>
+                        <a:rPr sz="1100" b="1">
+                          <a:latin typeface="맑은 고딕"/>
+                        </a:rPr>
+                        <a:t>Cursor AI</a:t>
+                      </a:r>
+                    </a:p>
+                  </a:txBody>
+                  <a:tcPr/>
+                </a:tc>
+                <a:tc>
+                  <a:txBody>
+                    <a:bodyPr/>
+                    <a:lstStyle/>
+                    <a:p>
+                      <a:r>
+                        <a:rPr sz="1100" b="0">
+                          <a:latin typeface="맑은 고딕"/>
+                        </a:rPr>
+                        <a:t>주 작업 환경. 저장소 규칙 자동 적용, 인터뷰·설계·코드 생성</a:t>
+                      </a:r>
+                    </a:p>
+                  </a:txBody>
+                  <a:tcPr/>
+                </a:tc>
+              </a:tr>
+              <a:tr h="301752">
+                <a:tc>
+                  <a:txBody>
+                    <a:bodyPr/>
+                    <a:lstStyle/>
+                    <a:p>
+                      <a:r>
+                        <a:rPr sz="1100" b="0">
+                          <a:latin typeface="맑은 고딕"/>
+                        </a:rPr>
+                        <a:t>Cursor Cloud Agent</a:t>
+                      </a:r>
+                    </a:p>
+                  </a:txBody>
+                  <a:tcPr/>
+                </a:tc>
+                <a:tc>
+                  <a:txBody>
+                    <a:bodyPr/>
+                    <a:lstStyle/>
+                    <a:p>
+                      <a:r>
+                        <a:rPr sz="1100" b="0">
+                          <a:latin typeface="맑은 고딕"/>
+                        </a:rPr>
+                        <a:t>저장소 구조 최적화·자동화 도구 개발</a:t>
+                      </a:r>
+                    </a:p>
+                  </a:txBody>
+                  <a:tcPr/>
+                </a:tc>
+              </a:tr>
+              <a:tr h="301752">
+                <a:tc>
+                  <a:txBody>
+                    <a:bodyPr/>
+                    <a:lstStyle/>
+                    <a:p>
+                      <a:r>
+                        <a:rPr sz="1100" b="0">
+                          <a:latin typeface="맑은 고딕"/>
+                        </a:rPr>
+                        <a:t>범용 LLM (ChatGPT·Claude)</a:t>
+                      </a:r>
+                    </a:p>
+                  </a:txBody>
+                  <a:tcPr/>
+                </a:tc>
+                <a:tc>
+                  <a:txBody>
+                    <a:bodyPr/>
+                    <a:lstStyle/>
+                    <a:p>
+                      <a:r>
+                        <a:rPr sz="1100" b="0">
+                          <a:latin typeface="맑은 고딕"/>
+                        </a:rPr>
+                        <a:t>대체 수단. 프롬프트 조각 등록으로 동일 규칙 적용</a:t>
+                      </a:r>
+                    </a:p>
+                  </a:txBody>
+                  <a:tcPr/>
+                </a:tc>
+              </a:tr>
+              <a:tr h="301752">
+                <a:tc>
+                  <a:txBody>
+                    <a:bodyPr/>
+                    <a:lstStyle/>
+                    <a:p>
+                      <a:r>
+                        <a:rPr sz="1100" b="0">
+                          <a:latin typeface="맑은 고딕"/>
+                        </a:rPr>
+                        <a:t>Python 3 (표준 라이브러리)</a:t>
+                      </a:r>
+                    </a:p>
+                  </a:txBody>
+                  <a:tcPr/>
+                </a:tc>
+                <a:tc>
+                  <a:txBody>
+                    <a:bodyPr/>
+                    <a:lstStyle/>
+                    <a:p>
+                      <a:r>
+                        <a:rPr sz="1100" b="0">
+                          <a:latin typeface="맑은 고딕"/>
+                        </a:rPr>
+                        <a:t>자동 점검기 구동. 외부 패키지 불필요</a:t>
+                      </a:r>
+                    </a:p>
+                  </a:txBody>
+                  <a:tcPr/>
+                </a:tc>
+              </a:tr>
+            </a:tbl>
+          </a:graphicData>
+        </a:graphic>
+      </p:graphicFrame>
+      <p:sp>
+        <p:nvSpPr>
+          <p:cNvPr id="4" name="TextBox 3"/>
           <p:cNvSpPr txBox="1"/>
           <p:nvPr/>
         </p:nvSpPr>
         <p:spPr>
           <a:xfrm>
-            <a:off x="640080" y="1234440"/>
-            <a:ext cx="10881360" cy="1335024"/>
+            <a:off x="640080" y="2880360"/>
+            <a:ext cx="10881360" cy="658368"/>
           </a:xfrm>
           <a:prstGeom prst="rect">
             <a:avLst/>
@@ -3230,189 +3420,30 @@
           <a:lstStyle/>
           <a:p>
             <a:r>
-              <a:rPr sz="1000">
-                <a:latin typeface="Consolas"/>
-              </a:rPr>
-              <a:t>$ python3 tools/abap_check.py sessions/.../code.abap</a:t>
-            </a:r>
-          </a:p>
-          <a:p>
-            <a:r>
-              <a:rPr sz="1000">
-                <a:latin typeface="Consolas"/>
-              </a:rPr>
-              <a:t>  ERROR  L47  CHK-005  사전 필드 `VBAK-...`를 참조하는데 `TABLES vbak.` 선언이 없습니다.</a:t>
-            </a:r>
-          </a:p>
-          <a:p>
-            <a:r>
-              <a:rPr sz="1000">
-                <a:latin typeface="Consolas"/>
-              </a:rPr>
-              <a:t>                       근거 ERR-006 · 처방: 코드 상단에 `TABLES &lt;테이블&gt;.` 선언을 추가하십시오.</a:t>
-            </a:r>
-          </a:p>
-          <a:p>
-            <a:r>
-              <a:rPr sz="1000">
-                <a:latin typeface="Consolas"/>
-              </a:rPr>
-              <a:t>  ERROR  L92  CHK-004  SELECT 직후 `SY-SUBRC` 체크가 없습니다.</a:t>
-            </a:r>
-          </a:p>
-          <a:p>
-            <a:r>
-              <a:rPr sz="1000">
-                <a:latin typeface="Consolas"/>
-              </a:rPr>
-              <a:t>요약: 파일 1개 · 오류 2건 · 경고 0건</a:t>
-            </a:r>
-          </a:p>
-          <a:p>
-            <a:r>
-              <a:rPr sz="1000">
-                <a:latin typeface="Consolas"/>
-              </a:rPr>
-              <a:t>Gate 3 미통과 — 오류 0건이 될 때까지 코드를 사용자에게 제시하지 마십시오.</a:t>
-            </a:r>
-          </a:p>
-        </p:txBody>
-      </p:sp>
-      <p:sp>
-        <p:nvSpPr>
-          <p:cNvPr id="4" name="TextBox 3"/>
-          <p:cNvSpPr txBox="1"/>
-          <p:nvPr/>
-        </p:nvSpPr>
-        <p:spPr>
-          <a:xfrm>
-            <a:off x="640080" y="2679192"/>
-            <a:ext cx="10881360" cy="1316736"/>
-          </a:xfrm>
-          <a:prstGeom prst="rect">
-            <a:avLst/>
-          </a:prstGeom>
-          <a:noFill/>
-        </p:spPr>
-        <p:txBody>
-          <a:bodyPr wrap="square">
-            <a:spAutoFit/>
-          </a:bodyPr>
-          <a:lstStyle/>
-          <a:p>
-            <a:r>
-              <a:rPr sz="1300" b="0">
-                <a:latin typeface="맑은 고딕"/>
-              </a:rPr>
-              <a:t>• 17개 규칙 — </a:t>
-            </a:r>
-            <a:r>
-              <a:rPr sz="1300" b="0">
-                <a:solidFill>
-                  <a:srgbClr val="8B2452"/>
-                </a:solidFill>
-                <a:latin typeface="Consolas"/>
-              </a:rPr>
-              <a:t>SELECT *</a:t>
-            </a:r>
-            <a:r>
-              <a:rPr sz="1300" b="0">
-                <a:latin typeface="맑은 고딕"/>
-              </a:rPr>
-              <a:t>·루프 내 SELECT·</a:t>
-            </a:r>
-            <a:r>
-              <a:rPr sz="1300" b="0">
-                <a:solidFill>
-                  <a:srgbClr val="8B2452"/>
-                </a:solidFill>
-                <a:latin typeface="Consolas"/>
-              </a:rPr>
-              <a:t>FOR ALL ENTRIES</a:t>
-            </a:r>
-            <a:r>
-              <a:rPr sz="1300" b="0">
-                <a:latin typeface="맑은 고딕"/>
-              </a:rPr>
-              <a:t> 빈 체크·</a:t>
-            </a:r>
-            <a:r>
-              <a:rPr sz="1300" b="0">
-                <a:solidFill>
-                  <a:srgbClr val="8B2452"/>
-                </a:solidFill>
-                <a:latin typeface="Consolas"/>
-              </a:rPr>
-              <a:t>SY-SUBRC</a:t>
-            </a:r>
-            <a:r>
-              <a:rPr sz="1300" b="0">
-                <a:latin typeface="맑은 고딕"/>
-              </a:rPr>
-              <a:t>·</a:t>
-            </a:r>
-            <a:r>
-              <a:rPr sz="1300" b="0">
-                <a:solidFill>
-                  <a:srgbClr val="8B2452"/>
-                </a:solidFill>
-                <a:latin typeface="Consolas"/>
-              </a:rPr>
-              <a:t>TABLES</a:t>
-            </a:r>
-            <a:r>
-              <a:rPr sz="1300" b="0">
-                <a:latin typeface="맑은 고딕"/>
-              </a:rPr>
-              <a:t> 선언 등</a:t>
-            </a:r>
-          </a:p>
-          <a:p>
-            <a:r>
-              <a:rPr sz="1300" b="0">
-                <a:latin typeface="맑은 고딕"/>
-              </a:rPr>
-              <a:t>• 지적마다 </a:t>
+              <a:rPr sz="1300" b="0">
+                <a:latin typeface="맑은 고딕"/>
+              </a:rPr>
+              <a:t>• </a:t>
             </a:r>
             <a:r>
               <a:rPr sz="1300" b="1">
                 <a:latin typeface="맑은 고딕"/>
               </a:rPr>
-              <a:t>근거 패턴 ID + 처방 한 줄</a:t>
-            </a:r>
-            <a:r>
-              <a:rPr sz="1300" b="0">
-                <a:latin typeface="맑은 고딕"/>
-              </a:rPr>
-              <a:t> → 결과를 그대로 AI에 돌려주면 수정됨</a:t>
-            </a:r>
-          </a:p>
-          <a:p>
-            <a:r>
-              <a:rPr sz="1300" b="0">
-                <a:latin typeface="맑은 고딕"/>
-              </a:rPr>
-              <a:t>• 소요 </a:t>
-            </a:r>
-            <a:r>
-              <a:rPr sz="1300" b="1">
-                <a:latin typeface="맑은 고딕"/>
-              </a:rPr>
-              <a:t>0.04초</a:t>
-            </a:r>
-            <a:r>
-              <a:rPr sz="1300" b="0">
-                <a:latin typeface="맑은 고딕"/>
-              </a:rPr>
-              <a:t>. 기계가 판별 못하는 항목은 "사람 판단"으로 명시 분리</a:t>
-            </a:r>
-          </a:p>
-          <a:p>
-            <a:r>
-              <a:rPr sz="1300" b="0">
-                <a:latin typeface="맑은 고딕"/>
-              </a:rPr>
-              <a:t>• 자체 테스트 32항목으로 점검기 자체의 신뢰성 보증</a:t>
+              <a:t>SAP 시스템에는 어떤 도구도 설치하지 않음</a:t>
+            </a:r>
+            <a:r>
+              <a:rPr sz="1300" b="0">
+                <a:latin typeface="맑은 고딕"/>
+              </a:rPr>
+              <a:t> — 기존 SE38/SE37 방식을 그대로 두고 앞단만 보강</a:t>
+            </a:r>
+          </a:p>
+          <a:p>
+            <a:r>
+              <a:rPr sz="1300" b="0">
+                <a:latin typeface="맑은 고딕"/>
+              </a:rPr>
+              <a:t>• 시스템 영향도·보안 검토 부담 없음</a:t>
             </a:r>
           </a:p>
         </p:txBody>
@@ -3464,7 +3495,7 @@
                 </a:solidFill>
                 <a:latin typeface="맑은 고딕"/>
               </a:rPr>
-              <a:t>9. 개선 방법 — 오류가 자산이 되는 경로</a:t>
+              <a:t>8. 개선 방법 — 설계 원칙 3가지</a:t>
             </a:r>
           </a:p>
         </p:txBody>
@@ -3478,7 +3509,7 @@
         <p:spPr>
           <a:xfrm>
             <a:off x="640080" y="1234440"/>
-            <a:ext cx="10881360" cy="1527048"/>
+            <a:ext cx="10881360" cy="1645920"/>
           </a:xfrm>
           <a:prstGeom prst="rect">
             <a:avLst/>
@@ -3492,89 +3523,42 @@
           <a:lstStyle/>
           <a:p>
             <a:r>
-              <a:rPr sz="1000">
-                <a:latin typeface="Consolas"/>
-              </a:rPr>
-              <a:t>① 활성화 실패 발생</a:t>
-            </a:r>
-          </a:p>
-          <a:p>
-            <a:r>
-              <a:rPr sz="1000">
-                <a:latin typeface="Consolas"/>
-              </a:rPr>
-              <a:t>      ↓ 오류 전문 회수 (양식 고정)</a:t>
-            </a:r>
-          </a:p>
-          <a:p>
-            <a:r>
-              <a:rPr sz="1000">
-                <a:latin typeface="Consolas"/>
-              </a:rPr>
-              <a:t>② practice/error-patterns.md 패턴 승격 (ERR / MSG / PROC)</a:t>
-            </a:r>
-          </a:p>
-          <a:p>
-            <a:r>
-              <a:rPr sz="1000">
-                <a:latin typeface="Consolas"/>
-              </a:rPr>
-              <a:t>      ↓ 기계 판별 가능하면</a:t>
-            </a:r>
-          </a:p>
-          <a:p>
-            <a:r>
-              <a:rPr sz="1000">
-                <a:latin typeface="Consolas"/>
-              </a:rPr>
-              <a:t>③ tools/abap_check.py 규칙 추가 → 코드 제시 전 자동 차단</a:t>
-            </a:r>
-          </a:p>
-          <a:p>
-            <a:r>
-              <a:rPr sz="1000">
-                <a:latin typeface="Consolas"/>
-              </a:rPr>
-              <a:t>      ↓ 모든 신규 프로그램에 해당하면</a:t>
-            </a:r>
-          </a:p>
-          <a:p>
-            <a:r>
-              <a:rPr sz="1000">
-                <a:latin typeface="Consolas"/>
-              </a:rPr>
-              <a:t>④ templates/abap/ 코드 골격 선반영 → 애초에 그렇게 생성됨</a:t>
-            </a:r>
-          </a:p>
-        </p:txBody>
-      </p:sp>
-      <p:sp>
-        <p:nvSpPr>
-          <p:cNvPr id="4" name="TextBox 3"/>
-          <p:cNvSpPr txBox="1"/>
-          <p:nvPr/>
-        </p:nvSpPr>
-        <p:spPr>
-          <a:xfrm>
-            <a:off x="640080" y="2871216"/>
-            <a:ext cx="10881360" cy="987552"/>
-          </a:xfrm>
-          <a:prstGeom prst="rect">
-            <a:avLst/>
-          </a:prstGeom>
-          <a:noFill/>
-        </p:spPr>
-        <p:txBody>
-          <a:bodyPr wrap="square">
-            <a:spAutoFit/>
-          </a:bodyPr>
-          <a:lstStyle/>
-          <a:p>
-            <a:r>
-              <a:rPr sz="1300" b="0">
-                <a:latin typeface="맑은 고딕"/>
-              </a:rPr>
-              <a:t>• 실제 사례: </a:t>
+              <a:rPr sz="1300" b="0">
+                <a:latin typeface="맑은 고딕"/>
+              </a:rPr>
+              <a:t>• </a:t>
+            </a:r>
+            <a:r>
+              <a:rPr sz="1300" b="1">
+                <a:latin typeface="맑은 고딕"/>
+              </a:rPr>
+              <a:t>DDIC 그라운딩</a:t>
+            </a:r>
+            <a:r>
+              <a:rPr sz="1300" b="0">
+                <a:latin typeface="맑은 고딕"/>
+              </a:rPr>
+              <a:t> — 담당자가 확인해 준 값, 또는 과거 활성화로 실재가 증명된 값만 사용. 모르면 추측 코드 대신 질문으로 되돌림. 가정 3건 초과 시 코드 생성 중단</a:t>
+            </a:r>
+          </a:p>
+          <a:p>
+            <a:r>
+              <a:rPr sz="1300" b="0">
+                <a:latin typeface="맑은 고딕"/>
+              </a:rPr>
+              <a:t>• </a:t>
+            </a:r>
+            <a:r>
+              <a:rPr sz="1300" b="1">
+                <a:latin typeface="맑은 고딕"/>
+              </a:rPr>
+              <a:t>릴리스 게이트</a:t>
+            </a:r>
+            <a:r>
+              <a:rPr sz="1300" b="0">
+                <a:latin typeface="맑은 고딕"/>
+              </a:rPr>
+              <a:t> — 기준 </a:t>
             </a:r>
             <a:r>
               <a:rPr sz="1300" b="0">
@@ -3583,58 +3567,13 @@
                 </a:solidFill>
                 <a:latin typeface="Consolas"/>
               </a:rPr>
-              <a:t>SELECT-OPTIONS FOR eban-badat</a:t>
-            </a:r>
-            <a:r>
-              <a:rPr sz="1300" b="0">
-                <a:latin typeface="맑은 고딕"/>
-              </a:rPr>
-              <a:t> 에 </a:t>
-            </a:r>
-            <a:r>
-              <a:rPr sz="1300" b="0">
-                <a:solidFill>
-                  <a:srgbClr val="8B2452"/>
-                </a:solidFill>
-                <a:latin typeface="Consolas"/>
-              </a:rPr>
-              <a:t>TABLES eban.</a:t>
-            </a:r>
-            <a:r>
-              <a:rPr sz="1300" b="0">
-                <a:latin typeface="맑은 고딕"/>
-              </a:rPr>
-              <a:t> 누락 → 활성화 실패 → </a:t>
-            </a:r>
-            <a:r>
-              <a:rPr sz="1300" b="0">
-                <a:solidFill>
-                  <a:srgbClr val="8B2452"/>
-                </a:solidFill>
-                <a:latin typeface="Consolas"/>
-              </a:rPr>
-              <a:t>ERR-006</a:t>
-            </a:r>
-            <a:r>
-              <a:rPr sz="1300" b="0">
-                <a:latin typeface="맑은 고딕"/>
-              </a:rPr>
-              <a:t> 패턴 → </a:t>
-            </a:r>
-            <a:r>
-              <a:rPr sz="1300" b="0">
-                <a:solidFill>
-                  <a:srgbClr val="8B2452"/>
-                </a:solidFill>
-                <a:latin typeface="Consolas"/>
-              </a:rPr>
-              <a:t>CHK-005</a:t>
-            </a:r>
-            <a:r>
-              <a:rPr sz="1300" b="0">
-                <a:latin typeface="맑은 고딕"/>
-              </a:rPr>
-              <a:t> 규칙 → 골격 3종 선반영</a:t>
+              <a:t>SAP_BASIS 750 / S/4HANA</a:t>
+            </a:r>
+            <a:r>
+              <a:rPr sz="1300" b="0">
+                <a:latin typeface="맑은 고딕"/>
+              </a:rPr>
+              <a:t> 고정, 코드 상단 명시. 보수 문법 필요 건만 ECC 호환으로 폴백</a:t>
             </a:r>
           </a:p>
           <a:p>
@@ -3648,7 +3587,13 @@
               <a:rPr sz="1300" b="1">
                 <a:latin typeface="맑은 고딕"/>
               </a:rPr>
-              <a:t>현재 동일 오류는 담당자에게 전달되기 전에 기계가 차단</a:t>
+              <a:t>복붙 계약</a:t>
+            </a:r>
+            <a:r>
+              <a:rPr sz="1300" b="0">
+                <a:latin typeface="맑은 고딕"/>
+              </a:rPr>
+              <a:t> — 완전 소스 1개 + 번호 매긴 복사 순서 + DDIC·메시지·T-code 정의서 + T1~T3 테스트 표 + 오류 회수 양식. 담당자가 추가 판단 없이 그대로 옮길 수 있는 상태로만 전달</a:t>
             </a:r>
           </a:p>
         </p:txBody>
@@ -3700,424 +3645,21 @@
                 </a:solidFill>
                 <a:latin typeface="맑은 고딕"/>
               </a:rPr>
-              <a:t>10. 개선 효과 — 검증된 정량 지표</a:t>
-            </a:r>
-          </a:p>
-        </p:txBody>
-      </p:sp>
-      <p:graphicFrame>
-        <p:nvGraphicFramePr>
-          <p:cNvPr id="3" name="Table 2"/>
-          <p:cNvGraphicFramePr>
-            <a:graphicFrameLocks noGrp="1"/>
-          </p:cNvGraphicFramePr>
-          <p:nvPr/>
-        </p:nvGraphicFramePr>
-        <p:xfrm>
-          <a:off x="640080" y="1234440"/>
-          <a:ext cx="10881360" cy="2414016"/>
-        </p:xfrm>
-        <a:graphic>
-          <a:graphicData uri="http://schemas.openxmlformats.org/drawingml/2006/table">
-            <a:tbl>
-              <a:tblPr firstRow="1" bandRow="1">
-                <a:tableStyleId>{5C22544A-7EE6-4342-B048-85BDC9FD1C3A}</a:tableStyleId>
-              </a:tblPr>
-              <a:tblGrid>
-                <a:gridCol w="3627120"/>
-                <a:gridCol w="3627120"/>
-                <a:gridCol w="3627120"/>
-              </a:tblGrid>
-              <a:tr h="301752">
-                <a:tc>
-                  <a:txBody>
-                    <a:bodyPr/>
-                    <a:lstStyle/>
-                    <a:p>
-                      <a:r>
-                        <a:rPr sz="1100" b="1">
-                          <a:latin typeface="맑은 고딕"/>
-                        </a:rPr>
-                        <a:t>지표</a:t>
-                      </a:r>
-                    </a:p>
-                  </a:txBody>
-                  <a:tcPr/>
-                </a:tc>
-                <a:tc>
-                  <a:txBody>
-                    <a:bodyPr/>
-                    <a:lstStyle/>
-                    <a:p>
-                      <a:r>
-                        <a:rPr sz="1100" b="1">
-                          <a:latin typeface="맑은 고딕"/>
-                        </a:rPr>
-                        <a:t>As-Is</a:t>
-                      </a:r>
-                    </a:p>
-                  </a:txBody>
-                  <a:tcPr/>
-                </a:tc>
-                <a:tc>
-                  <a:txBody>
-                    <a:bodyPr/>
-                    <a:lstStyle/>
-                    <a:p>
-                      <a:r>
-                        <a:rPr sz="1100" b="1">
-                          <a:latin typeface="맑은 고딕"/>
-                        </a:rPr>
-                        <a:t>To-Be</a:t>
-                      </a:r>
-                    </a:p>
-                  </a:txBody>
-                  <a:tcPr/>
-                </a:tc>
-              </a:tr>
-              <a:tr h="301752">
-                <a:tc>
-                  <a:txBody>
-                    <a:bodyPr/>
-                    <a:lstStyle/>
-                    <a:p>
-                      <a:r>
-                        <a:rPr sz="1100" b="0">
-                          <a:latin typeface="맑은 고딕"/>
-                        </a:rPr>
-                        <a:t>품질 점검 방식</a:t>
-                      </a:r>
-                    </a:p>
-                  </a:txBody>
-                  <a:tcPr/>
-                </a:tc>
-                <a:tc>
-                  <a:txBody>
-                    <a:bodyPr/>
-                    <a:lstStyle/>
-                    <a:p>
-                      <a:r>
-                        <a:rPr sz="1100" b="0">
-                          <a:latin typeface="맑은 고딕"/>
-                        </a:rPr>
-                        <a:t>수동 체크리스트 8항목</a:t>
-                      </a:r>
-                    </a:p>
-                  </a:txBody>
-                  <a:tcPr/>
-                </a:tc>
-                <a:tc>
-                  <a:txBody>
-                    <a:bodyPr/>
-                    <a:lstStyle/>
-                    <a:p>
-                      <a:r>
-                        <a:rPr sz="1100" b="0">
-                          <a:latin typeface="맑은 고딕"/>
-                        </a:rPr>
-                        <a:t>자동 점검 17규칙 · 0.04초</a:t>
-                      </a:r>
-                    </a:p>
-                  </a:txBody>
-                  <a:tcPr/>
-                </a:tc>
-              </a:tr>
-              <a:tr h="301752">
-                <a:tc>
-                  <a:txBody>
-                    <a:bodyPr/>
-                    <a:lstStyle/>
-                    <a:p>
-                      <a:r>
-                        <a:rPr sz="1100" b="0">
-                          <a:latin typeface="맑은 고딕"/>
-                        </a:rPr>
-                        <a:t>점검 누락 가능성</a:t>
-                      </a:r>
-                    </a:p>
-                  </a:txBody>
-                  <a:tcPr/>
-                </a:tc>
-                <a:tc>
-                  <a:txBody>
-                    <a:bodyPr/>
-                    <a:lstStyle/>
-                    <a:p>
-                      <a:r>
-                        <a:rPr sz="1100" b="0">
-                          <a:latin typeface="맑은 고딕"/>
-                        </a:rPr>
-                        <a:t>기억·집중도 의존</a:t>
-                      </a:r>
-                    </a:p>
-                  </a:txBody>
-                  <a:tcPr/>
-                </a:tc>
-                <a:tc>
-                  <a:txBody>
-                    <a:bodyPr/>
-                    <a:lstStyle/>
-                    <a:p>
-                      <a:r>
-                        <a:rPr sz="1100" b="0">
-                          <a:latin typeface="맑은 고딕"/>
-                        </a:rPr>
-                        <a:t>종료코드로 강제 차단</a:t>
-                      </a:r>
-                    </a:p>
-                  </a:txBody>
-                  <a:tcPr/>
-                </a:tc>
-              </a:tr>
-              <a:tr h="301752">
-                <a:tc>
-                  <a:txBody>
-                    <a:bodyPr/>
-                    <a:lstStyle/>
-                    <a:p>
-                      <a:r>
-                        <a:rPr sz="1100" b="0">
-                          <a:latin typeface="맑은 고딕"/>
-                        </a:rPr>
-                        <a:t>잠복 결함 발견</a:t>
-                      </a:r>
-                    </a:p>
-                  </a:txBody>
-                  <a:tcPr/>
-                </a:tc>
-                <a:tc>
-                  <a:txBody>
-                    <a:bodyPr/>
-                    <a:lstStyle/>
-                    <a:p>
-                      <a:r>
-                        <a:rPr sz="1100" b="0">
-                          <a:latin typeface="맑은 고딕"/>
-                        </a:rPr>
-                        <a:t>—</a:t>
-                      </a:r>
-                    </a:p>
-                  </a:txBody>
-                  <a:tcPr/>
-                </a:tc>
-                <a:tc>
-                  <a:txBody>
-                    <a:bodyPr/>
-                    <a:lstStyle/>
-                    <a:p>
-                      <a:r>
-                        <a:rPr sz="1100" b="0">
-                          <a:latin typeface="맑은 고딕"/>
-                        </a:rPr>
-                        <a:t>기준 샘플에서 1건 발견·수정</a:t>
-                      </a:r>
-                    </a:p>
-                  </a:txBody>
-                  <a:tcPr/>
-                </a:tc>
-              </a:tr>
-              <a:tr h="301752">
-                <a:tc>
-                  <a:txBody>
-                    <a:bodyPr/>
-                    <a:lstStyle/>
-                    <a:p>
-                      <a:r>
-                        <a:rPr sz="1100" b="0">
-                          <a:latin typeface="맑은 고딕"/>
-                        </a:rPr>
-                        <a:t>ABAP 산출물 품질</a:t>
-                      </a:r>
-                    </a:p>
-                  </a:txBody>
-                  <a:tcPr/>
-                </a:tc>
-                <a:tc>
-                  <a:txBody>
-                    <a:bodyPr/>
-                    <a:lstStyle/>
-                    <a:p>
-                      <a:r>
-                        <a:rPr sz="1100" b="0">
-                          <a:latin typeface="맑은 고딕"/>
-                        </a:rPr>
-                        <a:t>—</a:t>
-                      </a:r>
-                    </a:p>
-                  </a:txBody>
-                  <a:tcPr/>
-                </a:tc>
-                <a:tc>
-                  <a:txBody>
-                    <a:bodyPr/>
-                    <a:lstStyle/>
-                    <a:p>
-                      <a:r>
-                        <a:rPr sz="1100" b="0">
-                          <a:latin typeface="맑은 고딕"/>
-                        </a:rPr>
-                        <a:t>6개 파일 오류 0건 (CI 상시)</a:t>
-                      </a:r>
-                    </a:p>
-                  </a:txBody>
-                  <a:tcPr/>
-                </a:tc>
-              </a:tr>
-              <a:tr h="301752">
-                <a:tc>
-                  <a:txBody>
-                    <a:bodyPr/>
-                    <a:lstStyle/>
-                    <a:p>
-                      <a:r>
-                        <a:rPr sz="1100" b="0">
-                          <a:latin typeface="맑은 고딕"/>
-                        </a:rPr>
-                        <a:t>재발 방지 자산</a:t>
-                      </a:r>
-                    </a:p>
-                  </a:txBody>
-                  <a:tcPr/>
-                </a:tc>
-                <a:tc>
-                  <a:txBody>
-                    <a:bodyPr/>
-                    <a:lstStyle/>
-                    <a:p>
-                      <a:r>
-                        <a:rPr sz="1100" b="0">
-                          <a:latin typeface="맑은 고딕"/>
-                        </a:rPr>
-                        <a:t>개인 경험</a:t>
-                      </a:r>
-                    </a:p>
-                  </a:txBody>
-                  <a:tcPr/>
-                </a:tc>
-                <a:tc>
-                  <a:txBody>
-                    <a:bodyPr/>
-                    <a:lstStyle/>
-                    <a:p>
-                      <a:r>
-                        <a:rPr sz="1100" b="0">
-                          <a:latin typeface="맑은 고딕"/>
-                        </a:rPr>
-                        <a:t>패턴 10 + 규칙 17 + 골격 3</a:t>
-                      </a:r>
-                    </a:p>
-                  </a:txBody>
-                  <a:tcPr/>
-                </a:tc>
-              </a:tr>
-              <a:tr h="301752">
-                <a:tc>
-                  <a:txBody>
-                    <a:bodyPr/>
-                    <a:lstStyle/>
-                    <a:p>
-                      <a:r>
-                        <a:rPr sz="1100" b="0">
-                          <a:latin typeface="맑은 고딕"/>
-                        </a:rPr>
-                        <a:t>코드 작성 출발점</a:t>
-                      </a:r>
-                    </a:p>
-                  </a:txBody>
-                  <a:tcPr/>
-                </a:tc>
-                <a:tc>
-                  <a:txBody>
-                    <a:bodyPr/>
-                    <a:lstStyle/>
-                    <a:p>
-                      <a:r>
-                        <a:rPr sz="1100" b="0">
-                          <a:latin typeface="맑은 고딕"/>
-                        </a:rPr>
-                        <a:t>빈 화면</a:t>
-                      </a:r>
-                    </a:p>
-                  </a:txBody>
-                  <a:tcPr/>
-                </a:tc>
-                <a:tc>
-                  <a:txBody>
-                    <a:bodyPr/>
-                    <a:lstStyle/>
-                    <a:p>
-                      <a:r>
-                        <a:rPr sz="1100" b="0">
-                          <a:latin typeface="맑은 고딕"/>
-                        </a:rPr>
-                        <a:t>골격(패턴 선반영)</a:t>
-                      </a:r>
-                    </a:p>
-                  </a:txBody>
-                  <a:tcPr/>
-                </a:tc>
-              </a:tr>
-              <a:tr h="301752">
-                <a:tc>
-                  <a:txBody>
-                    <a:bodyPr/>
-                    <a:lstStyle/>
-                    <a:p>
-                      <a:r>
-                        <a:rPr sz="1100" b="0">
-                          <a:latin typeface="맑은 고딕"/>
-                        </a:rPr>
-                        <a:t>요구사항 확인 시점</a:t>
-                      </a:r>
-                    </a:p>
-                  </a:txBody>
-                  <a:tcPr/>
-                </a:tc>
-                <a:tc>
-                  <a:txBody>
-                    <a:bodyPr/>
-                    <a:lstStyle/>
-                    <a:p>
-                      <a:r>
-                        <a:rPr sz="1100" b="0">
-                          <a:latin typeface="맑은 고딕"/>
-                        </a:rPr>
-                        <a:t>코드 완성 후</a:t>
-                      </a:r>
-                    </a:p>
-                  </a:txBody>
-                  <a:tcPr/>
-                </a:tc>
-                <a:tc>
-                  <a:txBody>
-                    <a:bodyPr/>
-                    <a:lstStyle/>
-                    <a:p>
-                      <a:r>
-                        <a:rPr sz="1100" b="0">
-                          <a:latin typeface="맑은 고딕"/>
-                        </a:rPr>
-                        <a:t>화면·필드 단계</a:t>
-                      </a:r>
-                    </a:p>
-                  </a:txBody>
-                  <a:tcPr/>
-                </a:tc>
-              </a:tr>
-            </a:tbl>
-          </a:graphicData>
-        </a:graphic>
-      </p:graphicFrame>
-      <p:sp>
-        <p:nvSpPr>
-          <p:cNvPr id="4" name="TextBox 3"/>
+              <a:t>9. 개선 방법 — 진행 절차 9개 게이트</a:t>
+            </a:r>
+          </a:p>
+        </p:txBody>
+      </p:sp>
+      <p:sp>
+        <p:nvSpPr>
+          <p:cNvPr id="3" name="TextBox 2"/>
           <p:cNvSpPr txBox="1"/>
           <p:nvPr/>
         </p:nvSpPr>
         <p:spPr>
           <a:xfrm>
-            <a:off x="640080" y="3785616"/>
-            <a:ext cx="10881360" cy="329184"/>
+            <a:off x="640080" y="1234440"/>
+            <a:ext cx="10881360" cy="2295144"/>
           </a:xfrm>
           <a:prstGeom prst="rect">
             <a:avLst/>
@@ -4131,22 +3673,156 @@
           <a:lstStyle/>
           <a:p>
             <a:r>
-              <a:rPr sz="1300" b="0">
-                <a:latin typeface="맑은 고딕"/>
-              </a:rPr>
-              <a:t>• 모두 저장소에서 명령으로 </a:t>
+              <a:rPr sz="1000">
+                <a:latin typeface="Consolas"/>
+              </a:rPr>
+              <a:t>[0]   사전준비 1회 ─ 릴리스·패키지·네이밍            │ Gate 0</a:t>
+            </a:r>
+          </a:p>
+          <a:p>
+            <a:r>
+              <a:rPr sz="1000">
+                <a:latin typeface="Consolas"/>
+              </a:rPr>
+              <a:t>[0.5] 인터뷰 설계 25문항 (한 턴 3문항, [모름] 허용)</a:t>
+            </a:r>
+          </a:p>
+          <a:p>
+            <a:r>
+              <a:rPr sz="1000">
+                <a:latin typeface="Consolas"/>
+              </a:rPr>
+              <a:t>        │ Gate U   AI 이해 내용 확인서 승인</a:t>
+            </a:r>
+          </a:p>
+          <a:p>
+            <a:r>
+              <a:rPr sz="1000">
+                <a:latin typeface="Consolas"/>
+              </a:rPr>
+              <a:t>        │ Gate D   화면 텍스트 목업 컨펌</a:t>
+            </a:r>
+          </a:p>
+          <a:p>
+            <a:r>
+              <a:rPr sz="1000">
+                <a:latin typeface="Consolas"/>
+              </a:rPr>
+              <a:t>        │ Gate D-2 화면 이미지 재검증 (S1 선택화면 / S2 결과 분리)</a:t>
+            </a:r>
+          </a:p>
+          <a:p>
+            <a:r>
+              <a:rPr sz="1000">
+                <a:latin typeface="Consolas"/>
+              </a:rPr>
+              <a:t>        │ Gate F   필드 연결표·조인·구현 방식 승인</a:t>
+            </a:r>
+          </a:p>
+          <a:p>
+            <a:r>
+              <a:rPr sz="1000">
+                <a:latin typeface="Consolas"/>
+              </a:rPr>
+              <a:t>[1]   DDIC 캐시 확인 → 부족분만 SE11 수집            │ Gate 1 ★빈칸 시 코드 금지</a:t>
+            </a:r>
+          </a:p>
+          <a:p>
+            <a:r>
+              <a:rPr sz="1000">
+                <a:latin typeface="Consolas"/>
+              </a:rPr>
+              <a:t>[2]   스펙 확정                                     │ Gate 2 "OK" 전 코드 금지</a:t>
+            </a:r>
+          </a:p>
+          <a:p>
+            <a:r>
+              <a:rPr sz="1000">
+                <a:latin typeface="Consolas"/>
+              </a:rPr>
+              <a:t>[3]   코드 생성 (골격 복제 → 세션 값 교체)            │ Gate 3 자동 점검 오류 0건</a:t>
+            </a:r>
+          </a:p>
+          <a:p>
+            <a:r>
+              <a:rPr sz="1000">
+                <a:latin typeface="Consolas"/>
+              </a:rPr>
+              <a:t>[4]   활성화 → 실행 테스트 → 오류 회수·수정           │ Gate 4 결과 회수 전 이관 금지</a:t>
+            </a:r>
+          </a:p>
+          <a:p>
+            <a:r>
+              <a:rPr sz="1000">
+                <a:latin typeface="Consolas"/>
+              </a:rPr>
+              <a:t>[5]   운영 이관 → 패턴·DDIC 캐시 승격</a:t>
+            </a:r>
+          </a:p>
+        </p:txBody>
+      </p:sp>
+      <p:sp>
+        <p:nvSpPr>
+          <p:cNvPr id="4" name="TextBox 3"/>
+          <p:cNvSpPr txBox="1"/>
+          <p:nvPr/>
+        </p:nvSpPr>
+        <p:spPr>
+          <a:xfrm>
+            <a:off x="640080" y="3639312"/>
+            <a:ext cx="10881360" cy="658368"/>
+          </a:xfrm>
+          <a:prstGeom prst="rect">
+            <a:avLst/>
+          </a:prstGeom>
+          <a:noFill/>
+        </p:spPr>
+        <p:txBody>
+          <a:bodyPr wrap="square">
+            <a:spAutoFit/>
+          </a:bodyPr>
+          <a:lstStyle/>
+          <a:p>
+            <a:r>
+              <a:rPr sz="1300" b="0">
+                <a:latin typeface="맑은 고딕"/>
+              </a:rPr>
+              <a:t>• 전 구간이 </a:t>
             </a:r>
             <a:r>
               <a:rPr sz="1300" b="1">
                 <a:latin typeface="맑은 고딕"/>
               </a:rPr>
-              <a:t>재현 가능한 실측값</a:t>
-            </a:r>
-            <a:r>
-              <a:rPr sz="1300" b="0">
-                <a:latin typeface="맑은 고딕"/>
-              </a:rPr>
-              <a:t> (재현 명령은 리포트 부록 D)</a:t>
+              <a:t>AI가 묻고 담당자가 답하는 형식</a:t>
+            </a:r>
+            <a:r>
+              <a:rPr sz="1300" b="0">
+                <a:latin typeface="맑은 고딕"/>
+              </a:rPr>
+              <a:t> (설계 25문항 + 검증·이관 12문항 = 37문항)</a:t>
+            </a:r>
+          </a:p>
+          <a:p>
+            <a:r>
+              <a:rPr sz="1300" b="0">
+                <a:latin typeface="맑은 고딕"/>
+              </a:rPr>
+              <a:t>• 담당자는 양식을 작성하지 않음. 모르는 항목은 </a:t>
+            </a:r>
+            <a:r>
+              <a:rPr sz="1300" b="0">
+                <a:solidFill>
+                  <a:srgbClr val="8B2452"/>
+                </a:solidFill>
+                <a:latin typeface="Consolas"/>
+              </a:rPr>
+              <a:t>[모름]</a:t>
+            </a:r>
+            <a:r>
+              <a:rPr sz="1300" b="0">
+                <a:latin typeface="맑은 고딕"/>
+              </a:rPr>
+              <a:t>으로 넘김</a:t>
             </a:r>
           </a:p>
         </p:txBody>
@@ -4198,7 +3874,1179 @@
                 </a:solidFill>
                 <a:latin typeface="맑은 고딕"/>
               </a:rPr>
-              <a:t>11. 개선 효과 — 실전 적용 사례</a:t>
+              <a:t>10. 개선 방법 — Gate 3 자동 점검기</a:t>
+            </a:r>
+          </a:p>
+        </p:txBody>
+      </p:sp>
+      <p:sp>
+        <p:nvSpPr>
+          <p:cNvPr id="3" name="TextBox 2"/>
+          <p:cNvSpPr txBox="1"/>
+          <p:nvPr/>
+        </p:nvSpPr>
+        <p:spPr>
+          <a:xfrm>
+            <a:off x="640080" y="1234440"/>
+            <a:ext cx="10881360" cy="1335024"/>
+          </a:xfrm>
+          <a:prstGeom prst="rect">
+            <a:avLst/>
+          </a:prstGeom>
+          <a:noFill/>
+        </p:spPr>
+        <p:txBody>
+          <a:bodyPr wrap="square">
+            <a:spAutoFit/>
+          </a:bodyPr>
+          <a:lstStyle/>
+          <a:p>
+            <a:r>
+              <a:rPr sz="1000">
+                <a:latin typeface="Consolas"/>
+              </a:rPr>
+              <a:t>$ python3 tools/abap_check.py sessions/.../code.abap</a:t>
+            </a:r>
+          </a:p>
+          <a:p>
+            <a:r>
+              <a:rPr sz="1000">
+                <a:latin typeface="Consolas"/>
+              </a:rPr>
+              <a:t>  ERROR  L47  CHK-005  사전 필드 `VBAK-...`를 참조하는데 `TABLES vbak.` 선언이 없습니다.</a:t>
+            </a:r>
+          </a:p>
+          <a:p>
+            <a:r>
+              <a:rPr sz="1000">
+                <a:latin typeface="Consolas"/>
+              </a:rPr>
+              <a:t>                       근거 ERR-006 · 처방: 코드 상단에 `TABLES &lt;테이블&gt;.` 선언을 추가하십시오.</a:t>
+            </a:r>
+          </a:p>
+          <a:p>
+            <a:r>
+              <a:rPr sz="1000">
+                <a:latin typeface="Consolas"/>
+              </a:rPr>
+              <a:t>  ERROR  L92  CHK-004  SELECT 직후 `SY-SUBRC` 체크가 없습니다.</a:t>
+            </a:r>
+          </a:p>
+          <a:p>
+            <a:r>
+              <a:rPr sz="1000">
+                <a:latin typeface="Consolas"/>
+              </a:rPr>
+              <a:t>요약: 파일 1개 · 오류 2건 · 경고 0건</a:t>
+            </a:r>
+          </a:p>
+          <a:p>
+            <a:r>
+              <a:rPr sz="1000">
+                <a:latin typeface="Consolas"/>
+              </a:rPr>
+              <a:t>Gate 3 미통과 — 오류 0건이 될 때까지 코드를 사용자에게 제시하지 마십시오.</a:t>
+            </a:r>
+          </a:p>
+        </p:txBody>
+      </p:sp>
+      <p:sp>
+        <p:nvSpPr>
+          <p:cNvPr id="4" name="TextBox 3"/>
+          <p:cNvSpPr txBox="1"/>
+          <p:nvPr/>
+        </p:nvSpPr>
+        <p:spPr>
+          <a:xfrm>
+            <a:off x="640080" y="2679192"/>
+            <a:ext cx="10881360" cy="1316736"/>
+          </a:xfrm>
+          <a:prstGeom prst="rect">
+            <a:avLst/>
+          </a:prstGeom>
+          <a:noFill/>
+        </p:spPr>
+        <p:txBody>
+          <a:bodyPr wrap="square">
+            <a:spAutoFit/>
+          </a:bodyPr>
+          <a:lstStyle/>
+          <a:p>
+            <a:r>
+              <a:rPr sz="1300" b="0">
+                <a:latin typeface="맑은 고딕"/>
+              </a:rPr>
+              <a:t>• 17개 규칙 — </a:t>
+            </a:r>
+            <a:r>
+              <a:rPr sz="1300" b="0">
+                <a:solidFill>
+                  <a:srgbClr val="8B2452"/>
+                </a:solidFill>
+                <a:latin typeface="Consolas"/>
+              </a:rPr>
+              <a:t>SELECT *</a:t>
+            </a:r>
+            <a:r>
+              <a:rPr sz="1300" b="0">
+                <a:latin typeface="맑은 고딕"/>
+              </a:rPr>
+              <a:t>·루프 내 SELECT·</a:t>
+            </a:r>
+            <a:r>
+              <a:rPr sz="1300" b="0">
+                <a:solidFill>
+                  <a:srgbClr val="8B2452"/>
+                </a:solidFill>
+                <a:latin typeface="Consolas"/>
+              </a:rPr>
+              <a:t>FOR ALL ENTRIES</a:t>
+            </a:r>
+            <a:r>
+              <a:rPr sz="1300" b="0">
+                <a:latin typeface="맑은 고딕"/>
+              </a:rPr>
+              <a:t> 빈 체크·</a:t>
+            </a:r>
+            <a:r>
+              <a:rPr sz="1300" b="0">
+                <a:solidFill>
+                  <a:srgbClr val="8B2452"/>
+                </a:solidFill>
+                <a:latin typeface="Consolas"/>
+              </a:rPr>
+              <a:t>SY-SUBRC</a:t>
+            </a:r>
+            <a:r>
+              <a:rPr sz="1300" b="0">
+                <a:latin typeface="맑은 고딕"/>
+              </a:rPr>
+              <a:t>·</a:t>
+            </a:r>
+            <a:r>
+              <a:rPr sz="1300" b="0">
+                <a:solidFill>
+                  <a:srgbClr val="8B2452"/>
+                </a:solidFill>
+                <a:latin typeface="Consolas"/>
+              </a:rPr>
+              <a:t>TABLES</a:t>
+            </a:r>
+            <a:r>
+              <a:rPr sz="1300" b="0">
+                <a:latin typeface="맑은 고딕"/>
+              </a:rPr>
+              <a:t> 선언 등</a:t>
+            </a:r>
+          </a:p>
+          <a:p>
+            <a:r>
+              <a:rPr sz="1300" b="0">
+                <a:latin typeface="맑은 고딕"/>
+              </a:rPr>
+              <a:t>• 지적마다 </a:t>
+            </a:r>
+            <a:r>
+              <a:rPr sz="1300" b="1">
+                <a:latin typeface="맑은 고딕"/>
+              </a:rPr>
+              <a:t>근거 패턴 ID + 처방 한 줄</a:t>
+            </a:r>
+            <a:r>
+              <a:rPr sz="1300" b="0">
+                <a:latin typeface="맑은 고딕"/>
+              </a:rPr>
+              <a:t> → 결과를 그대로 AI에 돌려주면 수정됨</a:t>
+            </a:r>
+          </a:p>
+          <a:p>
+            <a:r>
+              <a:rPr sz="1300" b="0">
+                <a:latin typeface="맑은 고딕"/>
+              </a:rPr>
+              <a:t>• 소요 </a:t>
+            </a:r>
+            <a:r>
+              <a:rPr sz="1300" b="1">
+                <a:latin typeface="맑은 고딕"/>
+              </a:rPr>
+              <a:t>0.04초</a:t>
+            </a:r>
+            <a:r>
+              <a:rPr sz="1300" b="0">
+                <a:latin typeface="맑은 고딕"/>
+              </a:rPr>
+              <a:t>. 기계가 판별 못하는 항목은 "사람 판단"으로 명시 분리</a:t>
+            </a:r>
+          </a:p>
+          <a:p>
+            <a:r>
+              <a:rPr sz="1300" b="0">
+                <a:latin typeface="맑은 고딕"/>
+              </a:rPr>
+              <a:t>• 자체 테스트 32항목으로 점검기 자체의 신뢰성 보증</a:t>
+            </a:r>
+          </a:p>
+        </p:txBody>
+      </p:sp>
+    </p:spTree>
+  </p:cSld>
+  <p:clrMapOvr>
+    <a:masterClrMapping/>
+  </p:clrMapOvr>
+</p:sld>
+</file>
+
+<file path=ppt/slides/slide14.xml><?xml version="1.0" encoding="utf-8"?>
+<p:sld xmlns:a="http://schemas.openxmlformats.org/drawingml/2006/main" xmlns:p="http://schemas.openxmlformats.org/presentationml/2006/main" xmlns:r="http://schemas.openxmlformats.org/officeDocument/2006/relationships">
+  <p:cSld>
+    <p:spTree>
+      <p:nvGrpSpPr>
+        <p:cNvPr id="1" name=""/>
+        <p:cNvGrpSpPr/>
+        <p:nvPr/>
+      </p:nvGrpSpPr>
+      <p:grpSpPr/>
+      <p:sp>
+        <p:nvSpPr>
+          <p:cNvPr id="2" name="TextBox 1"/>
+          <p:cNvSpPr txBox="1"/>
+          <p:nvPr/>
+        </p:nvSpPr>
+        <p:spPr>
+          <a:xfrm>
+            <a:off x="548640" y="320040"/>
+            <a:ext cx="11064240" cy="822960"/>
+          </a:xfrm>
+          <a:prstGeom prst="rect">
+            <a:avLst/>
+          </a:prstGeom>
+          <a:noFill/>
+        </p:spPr>
+        <p:txBody>
+          <a:bodyPr wrap="square">
+            <a:spAutoFit/>
+          </a:bodyPr>
+          <a:lstStyle/>
+          <a:p>
+            <a:r>
+              <a:rPr sz="2400" b="1">
+                <a:solidFill>
+                  <a:srgbClr val="1F4E79"/>
+                </a:solidFill>
+                <a:latin typeface="맑은 고딕"/>
+              </a:rPr>
+              <a:t>11. 개선 방법 — 오류가 자산이 되는 경로</a:t>
+            </a:r>
+          </a:p>
+        </p:txBody>
+      </p:sp>
+      <p:sp>
+        <p:nvSpPr>
+          <p:cNvPr id="3" name="TextBox 2"/>
+          <p:cNvSpPr txBox="1"/>
+          <p:nvPr/>
+        </p:nvSpPr>
+        <p:spPr>
+          <a:xfrm>
+            <a:off x="640080" y="1234440"/>
+            <a:ext cx="10881360" cy="1527048"/>
+          </a:xfrm>
+          <a:prstGeom prst="rect">
+            <a:avLst/>
+          </a:prstGeom>
+          <a:noFill/>
+        </p:spPr>
+        <p:txBody>
+          <a:bodyPr wrap="square">
+            <a:spAutoFit/>
+          </a:bodyPr>
+          <a:lstStyle/>
+          <a:p>
+            <a:r>
+              <a:rPr sz="1000">
+                <a:latin typeface="Consolas"/>
+              </a:rPr>
+              <a:t>① 활성화 실패 발생</a:t>
+            </a:r>
+          </a:p>
+          <a:p>
+            <a:r>
+              <a:rPr sz="1000">
+                <a:latin typeface="Consolas"/>
+              </a:rPr>
+              <a:t>      ↓ 오류 전문 회수 (양식 고정)</a:t>
+            </a:r>
+          </a:p>
+          <a:p>
+            <a:r>
+              <a:rPr sz="1000">
+                <a:latin typeface="Consolas"/>
+              </a:rPr>
+              <a:t>② practice/error-patterns.md 패턴 승격 (ERR / MSG / PROC)</a:t>
+            </a:r>
+          </a:p>
+          <a:p>
+            <a:r>
+              <a:rPr sz="1000">
+                <a:latin typeface="Consolas"/>
+              </a:rPr>
+              <a:t>      ↓ 기계 판별 가능하면</a:t>
+            </a:r>
+          </a:p>
+          <a:p>
+            <a:r>
+              <a:rPr sz="1000">
+                <a:latin typeface="Consolas"/>
+              </a:rPr>
+              <a:t>③ tools/abap_check.py 규칙 추가 → 코드 제시 전 자동 차단</a:t>
+            </a:r>
+          </a:p>
+          <a:p>
+            <a:r>
+              <a:rPr sz="1000">
+                <a:latin typeface="Consolas"/>
+              </a:rPr>
+              <a:t>      ↓ 모든 신규 프로그램에 해당하면</a:t>
+            </a:r>
+          </a:p>
+          <a:p>
+            <a:r>
+              <a:rPr sz="1000">
+                <a:latin typeface="Consolas"/>
+              </a:rPr>
+              <a:t>④ templates/abap/ 코드 골격 선반영 → 애초에 그렇게 생성됨</a:t>
+            </a:r>
+          </a:p>
+        </p:txBody>
+      </p:sp>
+      <p:sp>
+        <p:nvSpPr>
+          <p:cNvPr id="4" name="TextBox 3"/>
+          <p:cNvSpPr txBox="1"/>
+          <p:nvPr/>
+        </p:nvSpPr>
+        <p:spPr>
+          <a:xfrm>
+            <a:off x="640080" y="2871216"/>
+            <a:ext cx="10881360" cy="987552"/>
+          </a:xfrm>
+          <a:prstGeom prst="rect">
+            <a:avLst/>
+          </a:prstGeom>
+          <a:noFill/>
+        </p:spPr>
+        <p:txBody>
+          <a:bodyPr wrap="square">
+            <a:spAutoFit/>
+          </a:bodyPr>
+          <a:lstStyle/>
+          <a:p>
+            <a:r>
+              <a:rPr sz="1300" b="0">
+                <a:latin typeface="맑은 고딕"/>
+              </a:rPr>
+              <a:t>• 실제 사례: </a:t>
+            </a:r>
+            <a:r>
+              <a:rPr sz="1300" b="0">
+                <a:solidFill>
+                  <a:srgbClr val="8B2452"/>
+                </a:solidFill>
+                <a:latin typeface="Consolas"/>
+              </a:rPr>
+              <a:t>SELECT-OPTIONS FOR eban-badat</a:t>
+            </a:r>
+            <a:r>
+              <a:rPr sz="1300" b="0">
+                <a:latin typeface="맑은 고딕"/>
+              </a:rPr>
+              <a:t> 에 </a:t>
+            </a:r>
+            <a:r>
+              <a:rPr sz="1300" b="0">
+                <a:solidFill>
+                  <a:srgbClr val="8B2452"/>
+                </a:solidFill>
+                <a:latin typeface="Consolas"/>
+              </a:rPr>
+              <a:t>TABLES eban.</a:t>
+            </a:r>
+            <a:r>
+              <a:rPr sz="1300" b="0">
+                <a:latin typeface="맑은 고딕"/>
+              </a:rPr>
+              <a:t> 누락 → 활성화 실패 → </a:t>
+            </a:r>
+            <a:r>
+              <a:rPr sz="1300" b="0">
+                <a:solidFill>
+                  <a:srgbClr val="8B2452"/>
+                </a:solidFill>
+                <a:latin typeface="Consolas"/>
+              </a:rPr>
+              <a:t>ERR-006</a:t>
+            </a:r>
+            <a:r>
+              <a:rPr sz="1300" b="0">
+                <a:latin typeface="맑은 고딕"/>
+              </a:rPr>
+              <a:t> 패턴 → </a:t>
+            </a:r>
+            <a:r>
+              <a:rPr sz="1300" b="0">
+                <a:solidFill>
+                  <a:srgbClr val="8B2452"/>
+                </a:solidFill>
+                <a:latin typeface="Consolas"/>
+              </a:rPr>
+              <a:t>CHK-005</a:t>
+            </a:r>
+            <a:r>
+              <a:rPr sz="1300" b="0">
+                <a:latin typeface="맑은 고딕"/>
+              </a:rPr>
+              <a:t> 규칙 → 골격 3종 선반영</a:t>
+            </a:r>
+          </a:p>
+          <a:p>
+            <a:r>
+              <a:rPr sz="1300" b="0">
+                <a:latin typeface="맑은 고딕"/>
+              </a:rPr>
+              <a:t>• </a:t>
+            </a:r>
+            <a:r>
+              <a:rPr sz="1300" b="1">
+                <a:latin typeface="맑은 고딕"/>
+              </a:rPr>
+              <a:t>현재 동일 오류는 담당자에게 전달되기 전에 기계가 차단</a:t>
+            </a:r>
+          </a:p>
+        </p:txBody>
+      </p:sp>
+    </p:spTree>
+  </p:cSld>
+  <p:clrMapOvr>
+    <a:masterClrMapping/>
+  </p:clrMapOvr>
+</p:sld>
+</file>
+
+<file path=ppt/slides/slide15.xml><?xml version="1.0" encoding="utf-8"?>
+<p:sld xmlns:a="http://schemas.openxmlformats.org/drawingml/2006/main" xmlns:p="http://schemas.openxmlformats.org/presentationml/2006/main" xmlns:r="http://schemas.openxmlformats.org/officeDocument/2006/relationships">
+  <p:cSld>
+    <p:spTree>
+      <p:nvGrpSpPr>
+        <p:cNvPr id="1" name=""/>
+        <p:cNvGrpSpPr/>
+        <p:nvPr/>
+      </p:nvGrpSpPr>
+      <p:grpSpPr/>
+      <p:sp>
+        <p:nvSpPr>
+          <p:cNvPr id="2" name="TextBox 1"/>
+          <p:cNvSpPr txBox="1"/>
+          <p:nvPr/>
+        </p:nvSpPr>
+        <p:spPr>
+          <a:xfrm>
+            <a:off x="548640" y="320040"/>
+            <a:ext cx="11064240" cy="822960"/>
+          </a:xfrm>
+          <a:prstGeom prst="rect">
+            <a:avLst/>
+          </a:prstGeom>
+          <a:noFill/>
+        </p:spPr>
+        <p:txBody>
+          <a:bodyPr wrap="square">
+            <a:spAutoFit/>
+          </a:bodyPr>
+          <a:lstStyle/>
+          <a:p>
+            <a:r>
+              <a:rPr sz="2400" b="1">
+                <a:solidFill>
+                  <a:srgbClr val="1F4E79"/>
+                </a:solidFill>
+                <a:latin typeface="맑은 고딕"/>
+              </a:rPr>
+              <a:t>12. 개선 효과 — 주효과: AI 활용 (① → ②)</a:t>
+            </a:r>
+          </a:p>
+        </p:txBody>
+      </p:sp>
+      <p:sp>
+        <p:nvSpPr>
+          <p:cNvPr id="3" name="TextBox 2"/>
+          <p:cNvSpPr txBox="1"/>
+          <p:nvPr/>
+        </p:nvSpPr>
+        <p:spPr>
+          <a:xfrm>
+            <a:off x="640080" y="1234440"/>
+            <a:ext cx="10881360" cy="329184"/>
+          </a:xfrm>
+          <a:prstGeom prst="rect">
+            <a:avLst/>
+          </a:prstGeom>
+          <a:noFill/>
+        </p:spPr>
+        <p:txBody>
+          <a:bodyPr wrap="square">
+            <a:spAutoFit/>
+          </a:bodyPr>
+          <a:lstStyle/>
+          <a:p>
+            <a:r>
+              <a:rPr sz="1300" b="0">
+                <a:latin typeface="맑은 고딕"/>
+              </a:rPr>
+              <a:t>실전 1호 산출물 기준, </a:t>
+            </a:r>
+            <a:r>
+              <a:rPr sz="1300" b="1">
+                <a:latin typeface="맑은 고딕"/>
+              </a:rPr>
+              <a:t>담당자가 직접 작성하지 않게 된 분량</a:t>
+            </a:r>
+            <a:r>
+              <a:rPr sz="1300" b="0">
+                <a:latin typeface="맑은 고딕"/>
+              </a:rPr>
+              <a:t>입니다.</a:t>
+            </a:r>
+          </a:p>
+        </p:txBody>
+      </p:sp>
+      <p:graphicFrame>
+        <p:nvGraphicFramePr>
+          <p:cNvPr id="4" name="Table 3"/>
+          <p:cNvGraphicFramePr>
+            <a:graphicFrameLocks noGrp="1"/>
+          </p:cNvGraphicFramePr>
+          <p:nvPr/>
+        </p:nvGraphicFramePr>
+        <p:xfrm>
+          <a:off x="640080" y="1673352"/>
+          <a:ext cx="10881360" cy="2715768"/>
+        </p:xfrm>
+        <a:graphic>
+          <a:graphicData uri="http://schemas.openxmlformats.org/drawingml/2006/table">
+            <a:tbl>
+              <a:tblPr firstRow="1" bandRow="1">
+                <a:tableStyleId>{5C22544A-7EE6-4342-B048-85BDC9FD1C3A}</a:tableStyleId>
+              </a:tblPr>
+              <a:tblGrid>
+                <a:gridCol w="3627120"/>
+                <a:gridCol w="3627120"/>
+                <a:gridCol w="3627120"/>
+              </a:tblGrid>
+              <a:tr h="301752">
+                <a:tc>
+                  <a:txBody>
+                    <a:bodyPr/>
+                    <a:lstStyle/>
+                    <a:p>
+                      <a:r>
+                        <a:rPr sz="1100" b="1">
+                          <a:latin typeface="맑은 고딕"/>
+                        </a:rPr>
+                        <a:t>지표</a:t>
+                      </a:r>
+                    </a:p>
+                  </a:txBody>
+                  <a:tcPr/>
+                </a:tc>
+                <a:tc>
+                  <a:txBody>
+                    <a:bodyPr/>
+                    <a:lstStyle/>
+                    <a:p>
+                      <a:r>
+                        <a:rPr sz="1100" b="1">
+                          <a:latin typeface="맑은 고딕"/>
+                        </a:rPr>
+                        <a:t>① AI 미활용</a:t>
+                      </a:r>
+                    </a:p>
+                  </a:txBody>
+                  <a:tcPr/>
+                </a:tc>
+                <a:tc>
+                  <a:txBody>
+                    <a:bodyPr/>
+                    <a:lstStyle/>
+                    <a:p>
+                      <a:r>
+                        <a:rPr sz="1100" b="1">
+                          <a:latin typeface="맑은 고딕"/>
+                        </a:rPr>
+                        <a:t>② AI 활용</a:t>
+                      </a:r>
+                    </a:p>
+                  </a:txBody>
+                  <a:tcPr/>
+                </a:tc>
+              </a:tr>
+              <a:tr h="301752">
+                <a:tc>
+                  <a:txBody>
+                    <a:bodyPr/>
+                    <a:lstStyle/>
+                    <a:p>
+                      <a:r>
+                        <a:rPr sz="1100" b="0">
+                          <a:latin typeface="맑은 고딕"/>
+                        </a:rPr>
+                        <a:t>착수 조건</a:t>
+                      </a:r>
+                    </a:p>
+                  </a:txBody>
+                  <a:tcPr/>
+                </a:tc>
+                <a:tc>
+                  <a:txBody>
+                    <a:bodyPr/>
+                    <a:lstStyle/>
+                    <a:p>
+                      <a:r>
+                        <a:rPr sz="1100" b="0">
+                          <a:latin typeface="맑은 고딕"/>
+                        </a:rPr>
+                        <a:t>대상 테이블을 알아야 착수</a:t>
+                      </a:r>
+                    </a:p>
+                  </a:txBody>
+                  <a:tcPr/>
+                </a:tc>
+                <a:tc>
+                  <a:txBody>
+                    <a:bodyPr/>
+                    <a:lstStyle/>
+                    <a:p>
+                      <a:r>
+                        <a:rPr sz="1100" b="0">
+                          <a:latin typeface="맑은 고딕"/>
+                        </a:rPr>
+                        <a:t>테이블 </a:t>
+                      </a:r>
+                      <a:r>
+                        <a:rPr sz="1100" b="0">
+                          <a:solidFill>
+                            <a:srgbClr val="8B2452"/>
+                          </a:solidFill>
+                          <a:latin typeface="Consolas"/>
+                        </a:rPr>
+                        <a:t>[모름]</a:t>
+                      </a:r>
+                      <a:r>
+                        <a:rPr sz="1100" b="0">
+                          <a:latin typeface="맑은 고딕"/>
+                        </a:rPr>
+                        <a:t> 상태에서 착수</a:t>
+                      </a:r>
+                    </a:p>
+                  </a:txBody>
+                  <a:tcPr/>
+                </a:tc>
+              </a:tr>
+              <a:tr h="301752">
+                <a:tc>
+                  <a:txBody>
+                    <a:bodyPr/>
+                    <a:lstStyle/>
+                    <a:p>
+                      <a:r>
+                        <a:rPr sz="1100" b="0">
+                          <a:latin typeface="맑은 고딕"/>
+                        </a:rPr>
+                        <a:t>테이블 선정</a:t>
+                      </a:r>
+                    </a:p>
+                  </a:txBody>
+                  <a:tcPr/>
+                </a:tc>
+                <a:tc>
+                  <a:txBody>
+                    <a:bodyPr/>
+                    <a:lstStyle/>
+                    <a:p>
+                      <a:r>
+                        <a:rPr sz="1100" b="0">
+                          <a:latin typeface="맑은 고딕"/>
+                        </a:rPr>
+                        <a:t>SE11·업무 문서 직접 탐색</a:t>
+                      </a:r>
+                    </a:p>
+                  </a:txBody>
+                  <a:tcPr/>
+                </a:tc>
+                <a:tc>
+                  <a:txBody>
+                    <a:bodyPr/>
+                    <a:lstStyle/>
+                    <a:p>
+                      <a:r>
+                        <a:rPr sz="1100" b="0">
+                          <a:latin typeface="맑은 고딕"/>
+                        </a:rPr>
+                        <a:t>AI가 후보 </a:t>
+                      </a:r>
+                      <a:r>
+                        <a:rPr sz="1100" b="1">
+                          <a:latin typeface="맑은 고딕"/>
+                        </a:rPr>
+                        <a:t>6개</a:t>
+                      </a:r>
+                      <a:r>
+                        <a:rPr sz="1100" b="0">
+                          <a:latin typeface="맑은 고딕"/>
+                        </a:rPr>
+                        <a:t> 제안 → 확인</a:t>
+                      </a:r>
+                    </a:p>
+                  </a:txBody>
+                  <a:tcPr/>
+                </a:tc>
+              </a:tr>
+              <a:tr h="301752">
+                <a:tc>
+                  <a:txBody>
+                    <a:bodyPr/>
+                    <a:lstStyle/>
+                    <a:p>
+                      <a:r>
+                        <a:rPr sz="1100" b="0">
+                          <a:latin typeface="맑은 고딕"/>
+                        </a:rPr>
+                        <a:t>ABAP 소스</a:t>
+                      </a:r>
+                    </a:p>
+                  </a:txBody>
+                  <a:tcPr/>
+                </a:tc>
+                <a:tc>
+                  <a:txBody>
+                    <a:bodyPr/>
+                    <a:lstStyle/>
+                    <a:p>
+                      <a:r>
+                        <a:rPr sz="1100" b="1">
+                          <a:latin typeface="맑은 고딕"/>
+                        </a:rPr>
+                        <a:t>156줄</a:t>
+                      </a:r>
+                      <a:r>
+                        <a:rPr sz="1100" b="0">
+                          <a:latin typeface="맑은 고딕"/>
+                        </a:rPr>
+                        <a:t> 전량 수작업</a:t>
+                      </a:r>
+                    </a:p>
+                  </a:txBody>
+                  <a:tcPr/>
+                </a:tc>
+                <a:tc>
+                  <a:txBody>
+                    <a:bodyPr/>
+                    <a:lstStyle/>
+                    <a:p>
+                      <a:r>
+                        <a:rPr sz="1100" b="0">
+                          <a:latin typeface="맑은 고딕"/>
+                        </a:rPr>
+                        <a:t>AI 생성 (실효 122줄)</a:t>
+                      </a:r>
+                    </a:p>
+                  </a:txBody>
+                  <a:tcPr/>
+                </a:tc>
+              </a:tr>
+              <a:tr h="301752">
+                <a:tc>
+                  <a:txBody>
+                    <a:bodyPr/>
+                    <a:lstStyle/>
+                    <a:p>
+                      <a:r>
+                        <a:rPr sz="1100" b="0">
+                          <a:latin typeface="맑은 고딕"/>
+                        </a:rPr>
+                        <a:t>선택화면 설계</a:t>
+                      </a:r>
+                    </a:p>
+                  </a:txBody>
+                  <a:tcPr/>
+                </a:tc>
+                <a:tc>
+                  <a:txBody>
+                    <a:bodyPr/>
+                    <a:lstStyle/>
+                    <a:p>
+                      <a:r>
+                        <a:rPr sz="1100" b="0">
+                          <a:latin typeface="맑은 고딕"/>
+                        </a:rPr>
+                        <a:t>항목·검증 규칙 직접 결정</a:t>
+                      </a:r>
+                    </a:p>
+                  </a:txBody>
+                  <a:tcPr/>
+                </a:tc>
+                <a:tc>
+                  <a:txBody>
+                    <a:bodyPr/>
+                    <a:lstStyle/>
+                    <a:p>
+                      <a:r>
+                        <a:rPr sz="1100" b="0">
+                          <a:latin typeface="맑은 고딕"/>
+                        </a:rPr>
+                        <a:t>AI가 항목 4개 + 검증 3종 제안</a:t>
+                      </a:r>
+                    </a:p>
+                  </a:txBody>
+                  <a:tcPr/>
+                </a:tc>
+              </a:tr>
+              <a:tr h="301752">
+                <a:tc>
+                  <a:txBody>
+                    <a:bodyPr/>
+                    <a:lstStyle/>
+                    <a:p>
+                      <a:r>
+                        <a:rPr sz="1100" b="0">
+                          <a:latin typeface="맑은 고딕"/>
+                        </a:rPr>
+                        <a:t>테스트 설계</a:t>
+                      </a:r>
+                    </a:p>
+                  </a:txBody>
+                  <a:tcPr/>
+                </a:tc>
+                <a:tc>
+                  <a:txBody>
+                    <a:bodyPr/>
+                    <a:lstStyle/>
+                    <a:p>
+                      <a:r>
+                        <a:rPr sz="1100" b="0">
+                          <a:latin typeface="맑은 고딕"/>
+                        </a:rPr>
+                        <a:t>케이스·테스트값 직접 작성</a:t>
+                      </a:r>
+                    </a:p>
+                  </a:txBody>
+                  <a:tcPr/>
+                </a:tc>
+                <a:tc>
+                  <a:txBody>
+                    <a:bodyPr/>
+                    <a:lstStyle/>
+                    <a:p>
+                      <a:r>
+                        <a:rPr sz="1100" b="0">
+                          <a:latin typeface="맑은 고딕"/>
+                        </a:rPr>
+                        <a:t>AI가 T1~T3 작성</a:t>
+                      </a:r>
+                    </a:p>
+                  </a:txBody>
+                  <a:tcPr/>
+                </a:tc>
+              </a:tr>
+              <a:tr h="301752">
+                <a:tc>
+                  <a:txBody>
+                    <a:bodyPr/>
+                    <a:lstStyle/>
+                    <a:p>
+                      <a:r>
+                        <a:rPr sz="1100" b="0">
+                          <a:latin typeface="맑은 고딕"/>
+                        </a:rPr>
+                        <a:t>운영 이관 문서</a:t>
+                      </a:r>
+                    </a:p>
+                  </a:txBody>
+                  <a:tcPr/>
+                </a:tc>
+                <a:tc>
+                  <a:txBody>
+                    <a:bodyPr/>
+                    <a:lstStyle/>
+                    <a:p>
+                      <a:r>
+                        <a:rPr sz="1100" b="0">
+                          <a:latin typeface="맑은 고딕"/>
+                        </a:rPr>
+                        <a:t>권한 조사·TR·잡 판단 직접</a:t>
+                      </a:r>
+                    </a:p>
+                  </a:txBody>
+                  <a:tcPr/>
+                </a:tc>
+                <a:tc>
+                  <a:txBody>
+                    <a:bodyPr/>
+                    <a:lstStyle/>
+                    <a:p>
+                      <a:r>
+                        <a:rPr sz="1100" b="0">
+                          <a:latin typeface="맑은 고딕"/>
+                        </a:rPr>
+                        <a:t>AI가 권한·TR 초안·판정 작성</a:t>
+                      </a:r>
+                    </a:p>
+                  </a:txBody>
+                  <a:tcPr/>
+                </a:tc>
+              </a:tr>
+              <a:tr h="301752">
+                <a:tc>
+                  <a:txBody>
+                    <a:bodyPr/>
+                    <a:lstStyle/>
+                    <a:p>
+                      <a:r>
+                        <a:rPr sz="1100" b="0">
+                          <a:latin typeface="맑은 고딕"/>
+                        </a:rPr>
+                        <a:t>세션 문서화</a:t>
+                      </a:r>
+                    </a:p>
+                  </a:txBody>
+                  <a:tcPr/>
+                </a:tc>
+                <a:tc>
+                  <a:txBody>
+                    <a:bodyPr/>
+                    <a:lstStyle/>
+                    <a:p>
+                      <a:r>
+                        <a:rPr sz="1100" b="0">
+                          <a:latin typeface="맑은 고딕"/>
+                        </a:rPr>
+                        <a:t>별도 작성(또는 미작성)</a:t>
+                      </a:r>
+                    </a:p>
+                  </a:txBody>
+                  <a:tcPr/>
+                </a:tc>
+                <a:tc>
+                  <a:txBody>
+                    <a:bodyPr/>
+                    <a:lstStyle/>
+                    <a:p>
+                      <a:r>
+                        <a:rPr sz="1100" b="0">
+                          <a:latin typeface="맑은 고딕"/>
+                        </a:rPr>
+                        <a:t>설계~검증 기록 </a:t>
+                      </a:r>
+                      <a:r>
+                        <a:rPr sz="1100" b="1">
+                          <a:latin typeface="맑은 고딕"/>
+                        </a:rPr>
+                        <a:t>76줄</a:t>
+                      </a:r>
+                      <a:r>
+                        <a:rPr sz="1100" b="0">
+                          <a:latin typeface="맑은 고딕"/>
+                        </a:rPr>
+                        <a:t> 자동</a:t>
+                      </a:r>
+                    </a:p>
+                  </a:txBody>
+                  <a:tcPr/>
+                </a:tc>
+              </a:tr>
+              <a:tr h="301752">
+                <a:tc>
+                  <a:txBody>
+                    <a:bodyPr/>
+                    <a:lstStyle/>
+                    <a:p>
+                      <a:r>
+                        <a:rPr sz="1100" b="0">
+                          <a:latin typeface="맑은 고딕"/>
+                        </a:rPr>
+                        <a:t>1건 소요 공수</a:t>
+                      </a:r>
+                    </a:p>
+                  </a:txBody>
+                  <a:tcPr/>
+                </a:tc>
+                <a:tc>
+                  <a:txBody>
+                    <a:bodyPr/>
+                    <a:lstStyle/>
+                    <a:p>
+                      <a:r>
+                        <a:rPr sz="1100" b="1">
+                          <a:latin typeface="맑은 고딕"/>
+                        </a:rPr>
+                        <a:t>[실측 기입]</a:t>
+                      </a:r>
+                    </a:p>
+                  </a:txBody>
+                  <a:tcPr/>
+                </a:tc>
+                <a:tc>
+                  <a:txBody>
+                    <a:bodyPr/>
+                    <a:lstStyle/>
+                    <a:p>
+                      <a:r>
+                        <a:rPr sz="1100" b="1">
+                          <a:latin typeface="맑은 고딕"/>
+                        </a:rPr>
+                        <a:t>[실측 기입]</a:t>
+                      </a:r>
+                      <a:r>
+                        <a:rPr sz="1100" b="0">
+                          <a:latin typeface="맑은 고딕"/>
+                        </a:rPr>
+                        <a:t> → §15 계산식</a:t>
+                      </a:r>
+                    </a:p>
+                  </a:txBody>
+                  <a:tcPr/>
+                </a:tc>
+              </a:tr>
+            </a:tbl>
+          </a:graphicData>
+        </a:graphic>
+      </p:graphicFrame>
+      <p:sp>
+        <p:nvSpPr>
+          <p:cNvPr id="5" name="TextBox 4"/>
+          <p:cNvSpPr txBox="1"/>
+          <p:nvPr/>
+        </p:nvSpPr>
+        <p:spPr>
+          <a:xfrm>
+            <a:off x="640080" y="4526280"/>
+            <a:ext cx="10881360" cy="658368"/>
+          </a:xfrm>
+          <a:prstGeom prst="rect">
+            <a:avLst/>
+          </a:prstGeom>
+          <a:noFill/>
+        </p:spPr>
+        <p:txBody>
+          <a:bodyPr wrap="square">
+            <a:spAutoFit/>
+          </a:bodyPr>
+          <a:lstStyle/>
+          <a:p>
+            <a:r>
+              <a:rPr sz="1300" b="0">
+                <a:latin typeface="맑은 고딕"/>
+              </a:rPr>
+              <a:t>• 핵심은 분량이 아니라 </a:t>
+            </a:r>
+            <a:r>
+              <a:rPr sz="1300" b="1">
+                <a:latin typeface="맑은 고딕"/>
+              </a:rPr>
+              <a:t>착수 가능성</a:t>
+            </a:r>
+            <a:r>
+              <a:rPr sz="1300" b="0">
+                <a:latin typeface="맑은 고딕"/>
+              </a:rPr>
+              <a:t> — 테이블·빈도·권한 전부 </a:t>
+            </a:r>
+            <a:r>
+              <a:rPr sz="1300" b="0">
+                <a:solidFill>
+                  <a:srgbClr val="8B2452"/>
+                </a:solidFill>
+                <a:latin typeface="Consolas"/>
+              </a:rPr>
+              <a:t>[모름]</a:t>
+            </a:r>
+            <a:r>
+              <a:rPr sz="1300" b="0">
+                <a:latin typeface="맑은 고딕"/>
+              </a:rPr>
+              <a:t>에서 운영 이관까지 완주</a:t>
+            </a:r>
+          </a:p>
+          <a:p>
+            <a:r>
+              <a:rPr sz="1300" b="0">
+                <a:latin typeface="맑은 고딕"/>
+              </a:rPr>
+              <a:t>• 활성화 오류가 실효 122줄 중 </a:t>
+            </a:r>
+            <a:r>
+              <a:rPr sz="1300" b="1">
+                <a:latin typeface="맑은 고딕"/>
+              </a:rPr>
+              <a:t>1건</a:t>
+            </a:r>
+            <a:r>
+              <a:rPr sz="1300" b="0">
+                <a:latin typeface="맑은 고딕"/>
+              </a:rPr>
+              <a:t> → 수정 왕복 없이 거의 바로 쓸 수 있는 수준</a:t>
+            </a:r>
+          </a:p>
+        </p:txBody>
+      </p:sp>
+    </p:spTree>
+  </p:cSld>
+  <p:clrMapOvr>
+    <a:masterClrMapping/>
+  </p:clrMapOvr>
+</p:sld>
+</file>
+
+<file path=ppt/slides/slide16.xml><?xml version="1.0" encoding="utf-8"?>
+<p:sld xmlns:a="http://schemas.openxmlformats.org/drawingml/2006/main" xmlns:p="http://schemas.openxmlformats.org/presentationml/2006/main" xmlns:r="http://schemas.openxmlformats.org/officeDocument/2006/relationships">
+  <p:cSld>
+    <p:spTree>
+      <p:nvGrpSpPr>
+        <p:cNvPr id="1" name=""/>
+        <p:cNvGrpSpPr/>
+        <p:nvPr/>
+      </p:nvGrpSpPr>
+      <p:grpSpPr/>
+      <p:sp>
+        <p:nvSpPr>
+          <p:cNvPr id="2" name="TextBox 1"/>
+          <p:cNvSpPr txBox="1"/>
+          <p:nvPr/>
+        </p:nvSpPr>
+        <p:spPr>
+          <a:xfrm>
+            <a:off x="548640" y="320040"/>
+            <a:ext cx="11064240" cy="822960"/>
+          </a:xfrm>
+          <a:prstGeom prst="rect">
+            <a:avLst/>
+          </a:prstGeom>
+          <a:noFill/>
+        </p:spPr>
+        <p:txBody>
+          <a:bodyPr wrap="square">
+            <a:spAutoFit/>
+          </a:bodyPr>
+          <a:lstStyle/>
+          <a:p>
+            <a:r>
+              <a:rPr sz="2400" b="1">
+                <a:solidFill>
+                  <a:srgbClr val="1F4E79"/>
+                </a:solidFill>
+                <a:latin typeface="맑은 고딕"/>
+              </a:rPr>
+              <a:t>13. 개선 효과 — 실전 적용 사례</a:t>
             </a:r>
           </a:p>
         </p:txBody>
@@ -4664,7 +5512,7 @@
 </p:sld>
 </file>
 
-<file path=ppt/slides/slide14.xml><?xml version="1.0" encoding="utf-8"?>
+<file path=ppt/slides/slide17.xml><?xml version="1.0" encoding="utf-8"?>
 <p:sld xmlns:a="http://schemas.openxmlformats.org/drawingml/2006/main" xmlns:p="http://schemas.openxmlformats.org/presentationml/2006/main" xmlns:r="http://schemas.openxmlformats.org/officeDocument/2006/relationships">
   <p:cSld>
     <p:spTree>
@@ -4703,7 +5551,7 @@
                 </a:solidFill>
                 <a:latin typeface="맑은 고딕"/>
               </a:rPr>
-              <a:t>12. 개선 효과 — 절감 측정 방식</a:t>
+              <a:t>14. 개선 효과 — 부가효과: 저장소 가이드 (② → ③)</a:t>
             </a:r>
           </a:p>
         </p:txBody>
@@ -4717,7 +5565,7 @@
         <p:spPr>
           <a:xfrm>
             <a:off x="640080" y="1234440"/>
-            <a:ext cx="10881360" cy="1143000"/>
+            <a:ext cx="10881360" cy="329184"/>
           </a:xfrm>
           <a:prstGeom prst="rect">
             <a:avLst/>
@@ -4731,56 +5579,466 @@
           <a:lstStyle/>
           <a:p>
             <a:r>
-              <a:rPr sz="1000">
-                <a:latin typeface="Consolas"/>
-              </a:rPr>
-              <a:t>① 1건 절감 공수 = As-Is 공수 − To-Be 공수</a:t>
-            </a:r>
-          </a:p>
-          <a:p>
-            <a:r>
-              <a:rPr sz="1000">
-                <a:latin typeface="Consolas"/>
-              </a:rPr>
-              <a:t>② 절감률(%)     = ① ÷ As-Is 공수 × 100</a:t>
-            </a:r>
-          </a:p>
-          <a:p>
-            <a:r>
-              <a:rPr sz="1000">
-                <a:latin typeface="Consolas"/>
-              </a:rPr>
-              <a:t>③ 연간 절감 공수 = ① × 연간 건수</a:t>
-            </a:r>
-          </a:p>
-          <a:p>
-            <a:r>
-              <a:rPr sz="1000">
-                <a:latin typeface="Consolas"/>
-              </a:rPr>
-              <a:t>④ 연간 절감 금액 = ③ × 시간당 인건비</a:t>
-            </a:r>
-          </a:p>
-          <a:p>
-            <a:r>
-              <a:rPr sz="1000">
-                <a:latin typeface="Consolas"/>
-              </a:rPr>
-              <a:t>⑤ 재작업 회피   = (As-Is 재시도 − To-Be 재시도) × 1회 왕복 공수 × 연간 건수</a:t>
-            </a:r>
-          </a:p>
-        </p:txBody>
-      </p:sp>
-      <p:sp>
-        <p:nvSpPr>
-          <p:cNvPr id="4" name="TextBox 3"/>
+              <a:rPr sz="1300" b="0">
+                <a:latin typeface="맑은 고딕"/>
+              </a:rPr>
+              <a:t>AI를 </a:t>
+            </a:r>
+            <a:r>
+              <a:rPr sz="1300" b="1">
+                <a:latin typeface="맑은 고딕"/>
+              </a:rPr>
+              <a:t>그냥</a:t>
+            </a:r>
+            <a:r>
+              <a:rPr sz="1300" b="0">
+                <a:latin typeface="맑은 고딕"/>
+              </a:rPr>
+              <a:t> 쓰는 것과, </a:t>
+            </a:r>
+            <a:r>
+              <a:rPr sz="1300" b="1">
+                <a:latin typeface="맑은 고딕"/>
+              </a:rPr>
+              <a:t>방향을 주고</a:t>
+            </a:r>
+            <a:r>
+              <a:rPr sz="1300" b="0">
+                <a:latin typeface="맑은 고딕"/>
+              </a:rPr>
+              <a:t> 쓰는 것의 차이입니다.</a:t>
+            </a:r>
+          </a:p>
+        </p:txBody>
+      </p:sp>
+      <p:graphicFrame>
+        <p:nvGraphicFramePr>
+          <p:cNvPr id="4" name="Table 3"/>
+          <p:cNvGraphicFramePr>
+            <a:graphicFrameLocks noGrp="1"/>
+          </p:cNvGraphicFramePr>
+          <p:nvPr/>
+        </p:nvGraphicFramePr>
+        <p:xfrm>
+          <a:off x="640080" y="1673352"/>
+          <a:ext cx="10881360" cy="2414016"/>
+        </p:xfrm>
+        <a:graphic>
+          <a:graphicData uri="http://schemas.openxmlformats.org/drawingml/2006/table">
+            <a:tbl>
+              <a:tblPr firstRow="1" bandRow="1">
+                <a:tableStyleId>{5C22544A-7EE6-4342-B048-85BDC9FD1C3A}</a:tableStyleId>
+              </a:tblPr>
+              <a:tblGrid>
+                <a:gridCol w="3627120"/>
+                <a:gridCol w="3627120"/>
+                <a:gridCol w="3627120"/>
+              </a:tblGrid>
+              <a:tr h="301752">
+                <a:tc>
+                  <a:txBody>
+                    <a:bodyPr/>
+                    <a:lstStyle/>
+                    <a:p>
+                      <a:r>
+                        <a:rPr sz="1100" b="1">
+                          <a:latin typeface="맑은 고딕"/>
+                        </a:rPr>
+                        <a:t>지표</a:t>
+                      </a:r>
+                    </a:p>
+                  </a:txBody>
+                  <a:tcPr/>
+                </a:tc>
+                <a:tc>
+                  <a:txBody>
+                    <a:bodyPr/>
+                    <a:lstStyle/>
+                    <a:p>
+                      <a:r>
+                        <a:rPr sz="1100" b="1">
+                          <a:latin typeface="맑은 고딕"/>
+                        </a:rPr>
+                        <a:t>② AI 단독</a:t>
+                      </a:r>
+                    </a:p>
+                  </a:txBody>
+                  <a:tcPr/>
+                </a:tc>
+                <a:tc>
+                  <a:txBody>
+                    <a:bodyPr/>
+                    <a:lstStyle/>
+                    <a:p>
+                      <a:r>
+                        <a:rPr sz="1100" b="1">
+                          <a:latin typeface="맑은 고딕"/>
+                        </a:rPr>
+                        <a:t>③ AI + 저장소 가이드</a:t>
+                      </a:r>
+                    </a:p>
+                  </a:txBody>
+                  <a:tcPr/>
+                </a:tc>
+              </a:tr>
+              <a:tr h="301752">
+                <a:tc>
+                  <a:txBody>
+                    <a:bodyPr/>
+                    <a:lstStyle/>
+                    <a:p>
+                      <a:r>
+                        <a:rPr sz="1100" b="0">
+                          <a:latin typeface="맑은 고딕"/>
+                        </a:rPr>
+                        <a:t>품질 검증</a:t>
+                      </a:r>
+                    </a:p>
+                  </a:txBody>
+                  <a:tcPr/>
+                </a:tc>
+                <a:tc>
+                  <a:txBody>
+                    <a:bodyPr/>
+                    <a:lstStyle/>
+                    <a:p>
+                      <a:r>
+                        <a:rPr sz="1100" b="0">
+                          <a:latin typeface="맑은 고딕"/>
+                        </a:rPr>
+                        <a:t>담당자 눈 검토 (8항목)</a:t>
+                      </a:r>
+                    </a:p>
+                  </a:txBody>
+                  <a:tcPr/>
+                </a:tc>
+                <a:tc>
+                  <a:txBody>
+                    <a:bodyPr/>
+                    <a:lstStyle/>
+                    <a:p>
+                      <a:r>
+                        <a:rPr sz="1100" b="0">
+                          <a:latin typeface="맑은 고딕"/>
+                        </a:rPr>
+                        <a:t>17규칙 기계 점검 · </a:t>
+                      </a:r>
+                      <a:r>
+                        <a:rPr sz="1100" b="1">
+                          <a:latin typeface="맑은 고딕"/>
+                        </a:rPr>
+                        <a:t>0.04초</a:t>
+                      </a:r>
+                    </a:p>
+                  </a:txBody>
+                  <a:tcPr/>
+                </a:tc>
+              </a:tr>
+              <a:tr h="301752">
+                <a:tc>
+                  <a:txBody>
+                    <a:bodyPr/>
+                    <a:lstStyle/>
+                    <a:p>
+                      <a:r>
+                        <a:rPr sz="1100" b="0">
+                          <a:latin typeface="맑은 고딕"/>
+                        </a:rPr>
+                        <a:t>검증 누락</a:t>
+                      </a:r>
+                    </a:p>
+                  </a:txBody>
+                  <a:tcPr/>
+                </a:tc>
+                <a:tc>
+                  <a:txBody>
+                    <a:bodyPr/>
+                    <a:lstStyle/>
+                    <a:p>
+                      <a:r>
+                        <a:rPr sz="1100" b="0">
+                          <a:latin typeface="맑은 고딕"/>
+                        </a:rPr>
+                        <a:t>기억·집중도 의존</a:t>
+                      </a:r>
+                    </a:p>
+                  </a:txBody>
+                  <a:tcPr/>
+                </a:tc>
+                <a:tc>
+                  <a:txBody>
+                    <a:bodyPr/>
+                    <a:lstStyle/>
+                    <a:p>
+                      <a:r>
+                        <a:rPr sz="1100" b="0">
+                          <a:latin typeface="맑은 고딕"/>
+                        </a:rPr>
+                        <a:t>종료코드로 강제 차단</a:t>
+                      </a:r>
+                    </a:p>
+                  </a:txBody>
+                  <a:tcPr/>
+                </a:tc>
+              </a:tr>
+              <a:tr h="301752">
+                <a:tc>
+                  <a:txBody>
+                    <a:bodyPr/>
+                    <a:lstStyle/>
+                    <a:p>
+                      <a:r>
+                        <a:rPr sz="1100" b="0">
+                          <a:latin typeface="맑은 고딕"/>
+                        </a:rPr>
+                        <a:t>요구사항 확인</a:t>
+                      </a:r>
+                    </a:p>
+                  </a:txBody>
+                  <a:tcPr/>
+                </a:tc>
+                <a:tc>
+                  <a:txBody>
+                    <a:bodyPr/>
+                    <a:lstStyle/>
+                    <a:p>
+                      <a:r>
+                        <a:rPr sz="1100" b="0">
+                          <a:latin typeface="맑은 고딕"/>
+                        </a:rPr>
+                        <a:t>코드 제시 후 교정</a:t>
+                      </a:r>
+                    </a:p>
+                  </a:txBody>
+                  <a:tcPr/>
+                </a:tc>
+                <a:tc>
+                  <a:txBody>
+                    <a:bodyPr/>
+                    <a:lstStyle/>
+                    <a:p>
+                      <a:r>
+                        <a:rPr sz="1100" b="0">
+                          <a:latin typeface="맑은 고딕"/>
+                        </a:rPr>
+                        <a:t>화면 목업·필드표 승인(Gate D/F)</a:t>
+                      </a:r>
+                    </a:p>
+                  </a:txBody>
+                  <a:tcPr/>
+                </a:tc>
+              </a:tr>
+              <a:tr h="301752">
+                <a:tc>
+                  <a:txBody>
+                    <a:bodyPr/>
+                    <a:lstStyle/>
+                    <a:p>
+                      <a:r>
+                        <a:rPr sz="1100" b="0">
+                          <a:latin typeface="맑은 고딕"/>
+                        </a:rPr>
+                        <a:t>DDIC 환각</a:t>
+                      </a:r>
+                    </a:p>
+                  </a:txBody>
+                  <a:tcPr/>
+                </a:tc>
+                <a:tc>
+                  <a:txBody>
+                    <a:bodyPr/>
+                    <a:lstStyle/>
+                    <a:p>
+                      <a:r>
+                        <a:rPr sz="1100" b="0">
+                          <a:latin typeface="맑은 고딕"/>
+                        </a:rPr>
+                        <a:t>모르는 필드를 지어냄</a:t>
+                      </a:r>
+                    </a:p>
+                  </a:txBody>
+                  <a:tcPr/>
+                </a:tc>
+                <a:tc>
+                  <a:txBody>
+                    <a:bodyPr/>
+                    <a:lstStyle/>
+                    <a:p>
+                      <a:r>
+                        <a:rPr sz="1100" b="0">
+                          <a:latin typeface="맑은 고딕"/>
+                        </a:rPr>
+                        <a:t>확정값만 사용 · </a:t>
+                      </a:r>
+                      <a:r>
+                        <a:rPr sz="1100" b="0">
+                          <a:solidFill>
+                            <a:srgbClr val="8B2452"/>
+                          </a:solidFill>
+                          <a:latin typeface="Consolas"/>
+                        </a:rPr>
+                        <a:t>[확인필요]</a:t>
+                      </a:r>
+                    </a:p>
+                  </a:txBody>
+                  <a:tcPr/>
+                </a:tc>
+              </a:tr>
+              <a:tr h="301752">
+                <a:tc>
+                  <a:txBody>
+                    <a:bodyPr/>
+                    <a:lstStyle/>
+                    <a:p>
+                      <a:r>
+                        <a:rPr sz="1100" b="0">
+                          <a:latin typeface="맑은 고딕"/>
+                        </a:rPr>
+                        <a:t>출력 완전성</a:t>
+                      </a:r>
+                    </a:p>
+                  </a:txBody>
+                  <a:tcPr/>
+                </a:tc>
+                <a:tc>
+                  <a:txBody>
+                    <a:bodyPr/>
+                    <a:lstStyle/>
+                    <a:p>
+                      <a:r>
+                        <a:rPr sz="1100" b="0">
+                          <a:latin typeface="맑은 고딕"/>
+                        </a:rPr>
+                        <a:t>일부 생략 가능</a:t>
+                      </a:r>
+                    </a:p>
+                  </a:txBody>
+                  <a:tcPr/>
+                </a:tc>
+                <a:tc>
+                  <a:txBody>
+                    <a:bodyPr/>
+                    <a:lstStyle/>
+                    <a:p>
+                      <a:r>
+                        <a:rPr sz="1100" b="0">
+                          <a:latin typeface="맑은 고딕"/>
+                        </a:rPr>
+                        <a:t>복붙 계약으로 완전 소스 강제</a:t>
+                      </a:r>
+                    </a:p>
+                  </a:txBody>
+                  <a:tcPr/>
+                </a:tc>
+              </a:tr>
+              <a:tr h="301752">
+                <a:tc>
+                  <a:txBody>
+                    <a:bodyPr/>
+                    <a:lstStyle/>
+                    <a:p>
+                      <a:r>
+                        <a:rPr sz="1100" b="0">
+                          <a:latin typeface="맑은 고딕"/>
+                        </a:rPr>
+                        <a:t>오류 진단</a:t>
+                      </a:r>
+                    </a:p>
+                  </a:txBody>
+                  <a:tcPr/>
+                </a:tc>
+                <a:tc>
+                  <a:txBody>
+                    <a:bodyPr/>
+                    <a:lstStyle/>
+                    <a:p>
+                      <a:r>
+                        <a:rPr sz="1100" b="1">
+                          <a:latin typeface="맑은 고딕"/>
+                        </a:rPr>
+                        <a:t>1차 오진단 발생</a:t>
+                      </a:r>
+                    </a:p>
+                  </a:txBody>
+                  <a:tcPr/>
+                </a:tc>
+                <a:tc>
+                  <a:txBody>
+                    <a:bodyPr/>
+                    <a:lstStyle/>
+                    <a:p>
+                      <a:r>
+                        <a:rPr sz="1100" b="0">
+                          <a:latin typeface="맑은 고딕"/>
+                        </a:rPr>
+                        <a:t>패턴 조회로 즉시 식별</a:t>
+                      </a:r>
+                    </a:p>
+                  </a:txBody>
+                  <a:tcPr/>
+                </a:tc>
+              </a:tr>
+              <a:tr h="301752">
+                <a:tc>
+                  <a:txBody>
+                    <a:bodyPr/>
+                    <a:lstStyle/>
+                    <a:p>
+                      <a:r>
+                        <a:rPr sz="1100" b="0">
+                          <a:latin typeface="맑은 고딕"/>
+                        </a:rPr>
+                        <a:t>경험 축적</a:t>
+                      </a:r>
+                    </a:p>
+                  </a:txBody>
+                  <a:tcPr/>
+                </a:tc>
+                <a:tc>
+                  <a:txBody>
+                    <a:bodyPr/>
+                    <a:lstStyle/>
+                    <a:p>
+                      <a:r>
+                        <a:rPr sz="1100" b="0">
+                          <a:latin typeface="맑은 고딕"/>
+                        </a:rPr>
+                        <a:t>세션 종료 시 소멸</a:t>
+                      </a:r>
+                    </a:p>
+                  </a:txBody>
+                  <a:tcPr/>
+                </a:tc>
+                <a:tc>
+                  <a:txBody>
+                    <a:bodyPr/>
+                    <a:lstStyle/>
+                    <a:p>
+                      <a:r>
+                        <a:rPr sz="1100" b="0">
+                          <a:latin typeface="맑은 고딕"/>
+                        </a:rPr>
+                        <a:t>패턴 10 + 규칙 17 + 골격 3</a:t>
+                      </a:r>
+                    </a:p>
+                  </a:txBody>
+                  <a:tcPr/>
+                </a:tc>
+              </a:tr>
+            </a:tbl>
+          </a:graphicData>
+        </a:graphic>
+      </p:graphicFrame>
+      <p:sp>
+        <p:nvSpPr>
+          <p:cNvPr id="5" name="TextBox 4"/>
           <p:cNvSpPr txBox="1"/>
           <p:nvPr/>
         </p:nvSpPr>
         <p:spPr>
           <a:xfrm>
-            <a:off x="640080" y="2487168"/>
-            <a:ext cx="10881360" cy="987552"/>
+            <a:off x="640080" y="4224528"/>
+            <a:ext cx="10881360" cy="329184"/>
           </a:xfrm>
           <a:prstGeom prst="rect">
             <a:avLst/>
@@ -4794,77 +6052,245 @@
           <a:lstStyle/>
           <a:p>
             <a:r>
-              <a:rPr sz="1300" b="0">
-                <a:latin typeface="맑은 고딕"/>
-              </a:rPr>
-              <a:t>• To-Be 활성화 재시도 </a:t>
-            </a:r>
-            <a:r>
               <a:rPr sz="1300" b="1">
                 <a:latin typeface="맑은 고딕"/>
               </a:rPr>
-              <a:t>1회</a:t>
-            </a:r>
-            <a:r>
-              <a:rPr sz="1300" b="0">
-                <a:latin typeface="맑은 고딕"/>
-              </a:rPr>
-              <a:t>(실측), 코드 생성 후 요구사항 재작업 </a:t>
+              <a:t>결함 발생률 — 같은 실수가 사라졌다</a:t>
+            </a:r>
+          </a:p>
+        </p:txBody>
+      </p:sp>
+      <p:graphicFrame>
+        <p:nvGraphicFramePr>
+          <p:cNvPr id="6" name="Table 5"/>
+          <p:cNvGraphicFramePr>
+            <a:graphicFrameLocks noGrp="1"/>
+          </p:cNvGraphicFramePr>
+          <p:nvPr/>
+        </p:nvGraphicFramePr>
+        <p:xfrm>
+          <a:off x="640080" y="4663440"/>
+          <a:ext cx="10881360" cy="905256"/>
+        </p:xfrm>
+        <a:graphic>
+          <a:graphicData uri="http://schemas.openxmlformats.org/drawingml/2006/table">
+            <a:tbl>
+              <a:tblPr firstRow="1" bandRow="1">
+                <a:tableStyleId>{5C22544A-7EE6-4342-B048-85BDC9FD1C3A}</a:tableStyleId>
+              </a:tblPr>
+              <a:tblGrid>
+                <a:gridCol w="3627120"/>
+                <a:gridCol w="3627120"/>
+                <a:gridCol w="3627120"/>
+              </a:tblGrid>
+              <a:tr h="301752">
+                <a:tc>
+                  <a:txBody>
+                    <a:bodyPr/>
+                    <a:lstStyle/>
+                    <a:p>
+                      <a:r>
+                        <a:rPr sz="1100" b="1">
+                          <a:latin typeface="맑은 고딕"/>
+                        </a:rPr>
+                        <a:t>구분</a:t>
+                      </a:r>
+                    </a:p>
+                  </a:txBody>
+                  <a:tcPr/>
+                </a:tc>
+                <a:tc>
+                  <a:txBody>
+                    <a:bodyPr/>
+                    <a:lstStyle/>
+                    <a:p>
+                      <a:r>
+                        <a:rPr sz="1100" b="1">
+                          <a:latin typeface="맑은 고딕"/>
+                        </a:rPr>
+                        <a:t>산출물</a:t>
+                      </a:r>
+                    </a:p>
+                  </a:txBody>
+                  <a:tcPr/>
+                </a:tc>
+                <a:tc>
+                  <a:txBody>
+                    <a:bodyPr/>
+                    <a:lstStyle/>
+                    <a:p>
+                      <a:r>
+                        <a:rPr sz="1100" b="1">
+                          <a:latin typeface="맑은 고딕"/>
+                        </a:rPr>
+                        <a:t>ERR-006 보유</a:t>
+                      </a:r>
+                    </a:p>
+                  </a:txBody>
+                  <a:tcPr/>
+                </a:tc>
+              </a:tr>
+              <a:tr h="301752">
+                <a:tc>
+                  <a:txBody>
+                    <a:bodyPr/>
+                    <a:lstStyle/>
+                    <a:p>
+                      <a:r>
+                        <a:rPr sz="1100" b="0">
+                          <a:latin typeface="맑은 고딕"/>
+                        </a:rPr>
+                        <a:t>가이드 선반영 </a:t>
+                      </a:r>
+                      <a:r>
+                        <a:rPr sz="1100" b="1">
+                          <a:latin typeface="맑은 고딕"/>
+                        </a:rPr>
+                        <a:t>전</a:t>
+                      </a:r>
+                      <a:r>
+                        <a:rPr sz="1100" b="0">
+                          <a:latin typeface="맑은 고딕"/>
+                        </a:rPr>
+                        <a:t> (AI 단독 생성)</a:t>
+                      </a:r>
+                    </a:p>
+                  </a:txBody>
+                  <a:tcPr/>
+                </a:tc>
+                <a:tc>
+                  <a:txBody>
+                    <a:bodyPr/>
+                    <a:lstStyle/>
+                    <a:p>
+                      <a:r>
+                        <a:rPr sz="1100" b="0">
+                          <a:latin typeface="맑은 고딕"/>
+                        </a:rPr>
+                        <a:t>2건</a:t>
+                      </a:r>
+                    </a:p>
+                  </a:txBody>
+                  <a:tcPr/>
+                </a:tc>
+                <a:tc>
+                  <a:txBody>
+                    <a:bodyPr/>
+                    <a:lstStyle/>
+                    <a:p>
+                      <a:r>
+                        <a:rPr sz="1100" b="1">
+                          <a:latin typeface="맑은 고딕"/>
+                        </a:rPr>
+                        <a:t>2건 (100%)</a:t>
+                      </a:r>
+                    </a:p>
+                  </a:txBody>
+                  <a:tcPr/>
+                </a:tc>
+              </a:tr>
+              <a:tr h="301752">
+                <a:tc>
+                  <a:txBody>
+                    <a:bodyPr/>
+                    <a:lstStyle/>
+                    <a:p>
+                      <a:r>
+                        <a:rPr sz="1100" b="0">
+                          <a:latin typeface="맑은 고딕"/>
+                        </a:rPr>
+                        <a:t>가이드 선반영 </a:t>
+                      </a:r>
+                      <a:r>
+                        <a:rPr sz="1100" b="1">
+                          <a:latin typeface="맑은 고딕"/>
+                        </a:rPr>
+                        <a:t>후</a:t>
+                      </a:r>
+                      <a:r>
+                        <a:rPr sz="1100" b="0">
+                          <a:latin typeface="맑은 고딕"/>
+                        </a:rPr>
+                        <a:t> (골격 기반)</a:t>
+                      </a:r>
+                    </a:p>
+                  </a:txBody>
+                  <a:tcPr/>
+                </a:tc>
+                <a:tc>
+                  <a:txBody>
+                    <a:bodyPr/>
+                    <a:lstStyle/>
+                    <a:p>
+                      <a:r>
+                        <a:rPr sz="1100" b="0">
+                          <a:latin typeface="맑은 고딕"/>
+                        </a:rPr>
+                        <a:t>3건</a:t>
+                      </a:r>
+                    </a:p>
+                  </a:txBody>
+                  <a:tcPr/>
+                </a:tc>
+                <a:tc>
+                  <a:txBody>
+                    <a:bodyPr/>
+                    <a:lstStyle/>
+                    <a:p>
+                      <a:r>
+                        <a:rPr sz="1100" b="1">
+                          <a:latin typeface="맑은 고딕"/>
+                        </a:rPr>
+                        <a:t>0건 (0%)</a:t>
+                      </a:r>
+                    </a:p>
+                  </a:txBody>
+                  <a:tcPr/>
+                </a:tc>
+              </a:tr>
+            </a:tbl>
+          </a:graphicData>
+        </a:graphic>
+      </p:graphicFrame>
+      <p:sp>
+        <p:nvSpPr>
+          <p:cNvPr id="7" name="TextBox 6"/>
+          <p:cNvSpPr txBox="1"/>
+          <p:nvPr/>
+        </p:nvSpPr>
+        <p:spPr>
+          <a:xfrm>
+            <a:off x="640080" y="5705856"/>
+            <a:ext cx="10881360" cy="329184"/>
+          </a:xfrm>
+          <a:prstGeom prst="rect">
+            <a:avLst/>
+          </a:prstGeom>
+          <a:noFill/>
+        </p:spPr>
+        <p:txBody>
+          <a:bodyPr wrap="square">
+            <a:spAutoFit/>
+          </a:bodyPr>
+          <a:lstStyle/>
+          <a:p>
+            <a:r>
+              <a:rPr sz="1300" b="0">
+                <a:latin typeface="맑은 고딕"/>
+              </a:rPr>
+              <a:t>• 사람이 수개월 몰랐던 </a:t>
             </a:r>
             <a:r>
               <a:rPr sz="1300" b="1">
                 <a:latin typeface="맑은 고딕"/>
               </a:rPr>
-              <a:t>0회</a:t>
-            </a:r>
-            <a:r>
-              <a:rPr sz="1300" b="0">
-                <a:latin typeface="맑은 고딕"/>
-              </a:rPr>
-              <a:t>(실측)</a:t>
-            </a:r>
-          </a:p>
-          <a:p>
-            <a:r>
-              <a:rPr sz="1300" b="0">
-                <a:latin typeface="맑은 고딕"/>
-              </a:rPr>
-              <a:t>• As-Is 공수·연간 건수·인건비는 사내 실측값 필요 → </a:t>
-            </a:r>
-            <a:r>
-              <a:rPr sz="1300" b="0">
-                <a:solidFill>
-                  <a:srgbClr val="8B2452"/>
-                </a:solidFill>
-                <a:latin typeface="Consolas"/>
-              </a:rPr>
-              <a:t>report/effect-worksheet.md</a:t>
-            </a:r>
-            <a:r>
-              <a:rPr sz="1300" b="0">
-                <a:latin typeface="맑은 고딕"/>
-              </a:rPr>
-              <a:t>에 기입</a:t>
-            </a:r>
-          </a:p>
-          <a:p>
-            <a:r>
-              <a:rPr sz="1300" b="0">
-                <a:latin typeface="맑은 고딕"/>
-              </a:rPr>
-              <a:t>• </a:t>
-            </a:r>
-            <a:r>
-              <a:rPr sz="1300" b="1">
-                <a:latin typeface="맑은 고딕"/>
-              </a:rPr>
-              <a:t>측정 주의</a:t>
-            </a:r>
-            <a:r>
-              <a:rPr sz="1300" b="0">
-                <a:latin typeface="맑은 고딕"/>
-              </a:rPr>
-              <a:t>: To-Be 공수에 인터뷰 응답 시간을 포함해야 함 (빼면 절감 과대 계상)</a:t>
+              <a:t>기준 샘플 잠복 결함</a:t>
+            </a:r>
+            <a:r>
+              <a:rPr sz="1300" b="0">
+                <a:latin typeface="맑은 고딕"/>
+              </a:rPr>
+              <a:t>을 점검기 도입 즉시 검출</a:t>
             </a:r>
           </a:p>
         </p:txBody>
@@ -4877,7 +6303,7 @@
 </p:sld>
 </file>
 
-<file path=ppt/slides/slide15.xml><?xml version="1.0" encoding="utf-8"?>
+<file path=ppt/slides/slide18.xml><?xml version="1.0" encoding="utf-8"?>
 <p:sld xmlns:a="http://schemas.openxmlformats.org/drawingml/2006/main" xmlns:p="http://schemas.openxmlformats.org/presentationml/2006/main" xmlns:r="http://schemas.openxmlformats.org/officeDocument/2006/relationships">
   <p:cSld>
     <p:spTree>
@@ -4916,7 +6342,1141 @@
                 </a:solidFill>
                 <a:latin typeface="맑은 고딕"/>
               </a:rPr>
-              <a:t>13. 확산 가능성</a:t>
+              <a:t>15. 개선 효과 — 절감 측정 방식 (주축)</a:t>
+            </a:r>
+          </a:p>
+        </p:txBody>
+      </p:sp>
+      <p:sp>
+        <p:nvSpPr>
+          <p:cNvPr id="3" name="TextBox 2"/>
+          <p:cNvSpPr txBox="1"/>
+          <p:nvPr/>
+        </p:nvSpPr>
+        <p:spPr>
+          <a:xfrm>
+            <a:off x="640080" y="1234440"/>
+            <a:ext cx="10881360" cy="329184"/>
+          </a:xfrm>
+          <a:prstGeom prst="rect">
+            <a:avLst/>
+          </a:prstGeom>
+          <a:noFill/>
+        </p:spPr>
+        <p:txBody>
+          <a:bodyPr wrap="square">
+            <a:spAutoFit/>
+          </a:bodyPr>
+          <a:lstStyle/>
+          <a:p>
+            <a:r>
+              <a:rPr sz="1300" b="0">
+                <a:latin typeface="맑은 고딕"/>
+              </a:rPr>
+              <a:t>기준선은 </a:t>
+            </a:r>
+            <a:r>
+              <a:rPr sz="1300" b="1">
+                <a:latin typeface="맑은 고딕"/>
+              </a:rPr>
+              <a:t>AI 미활용(수작업) 공수</a:t>
+            </a:r>
+            <a:r>
+              <a:rPr sz="1300" b="0">
+                <a:latin typeface="맑은 고딕"/>
+              </a:rPr>
+              <a:t>, 비교군은 </a:t>
+            </a:r>
+            <a:r>
+              <a:rPr sz="1300" b="1">
+                <a:latin typeface="맑은 고딕"/>
+              </a:rPr>
+              <a:t>AI 활용 공수</a:t>
+            </a:r>
+            <a:r>
+              <a:rPr sz="1300" b="0">
+                <a:latin typeface="맑은 고딕"/>
+              </a:rPr>
+              <a:t>입니다.</a:t>
+            </a:r>
+          </a:p>
+        </p:txBody>
+      </p:sp>
+      <p:sp>
+        <p:nvSpPr>
+          <p:cNvPr id="4" name="TextBox 3"/>
+          <p:cNvSpPr txBox="1"/>
+          <p:nvPr/>
+        </p:nvSpPr>
+        <p:spPr>
+          <a:xfrm>
+            <a:off x="640080" y="1673352"/>
+            <a:ext cx="10881360" cy="1143000"/>
+          </a:xfrm>
+          <a:prstGeom prst="rect">
+            <a:avLst/>
+          </a:prstGeom>
+          <a:noFill/>
+        </p:spPr>
+        <p:txBody>
+          <a:bodyPr wrap="square">
+            <a:spAutoFit/>
+          </a:bodyPr>
+          <a:lstStyle/>
+          <a:p>
+            <a:r>
+              <a:rPr sz="1000">
+                <a:latin typeface="Consolas"/>
+              </a:rPr>
+              <a:t>① 1건 절감 공수 = [AI 미활용 공수] − [AI 활용 공수]</a:t>
+            </a:r>
+          </a:p>
+          <a:p>
+            <a:r>
+              <a:rPr sz="1000">
+                <a:latin typeface="Consolas"/>
+              </a:rPr>
+              <a:t>② 절감률(%)     = ① ÷ [AI 미활용 공수] × 100</a:t>
+            </a:r>
+          </a:p>
+          <a:p>
+            <a:r>
+              <a:rPr sz="1000">
+                <a:latin typeface="Consolas"/>
+              </a:rPr>
+              <a:t>③ 연간 절감 공수 = ① × 연간 건수</a:t>
+            </a:r>
+          </a:p>
+          <a:p>
+            <a:r>
+              <a:rPr sz="1000">
+                <a:latin typeface="Consolas"/>
+              </a:rPr>
+              <a:t>④ 연간 절감 금액 = ③ × 시간당 인건비</a:t>
+            </a:r>
+          </a:p>
+          <a:p>
+            <a:r>
+              <a:rPr sz="1000">
+                <a:latin typeface="Consolas"/>
+              </a:rPr>
+              <a:t>⑤ 재작업 회피   = (AI 미활용 재시도 − AI 활용 재시도) × 1회 왕복 공수 × 연간 건수</a:t>
+            </a:r>
+          </a:p>
+        </p:txBody>
+      </p:sp>
+      <p:sp>
+        <p:nvSpPr>
+          <p:cNvPr id="5" name="TextBox 4"/>
+          <p:cNvSpPr txBox="1"/>
+          <p:nvPr/>
+        </p:nvSpPr>
+        <p:spPr>
+          <a:xfrm>
+            <a:off x="640080" y="2926080"/>
+            <a:ext cx="10881360" cy="987552"/>
+          </a:xfrm>
+          <a:prstGeom prst="rect">
+            <a:avLst/>
+          </a:prstGeom>
+          <a:noFill/>
+        </p:spPr>
+        <p:txBody>
+          <a:bodyPr wrap="square">
+            <a:spAutoFit/>
+          </a:bodyPr>
+          <a:lstStyle/>
+          <a:p>
+            <a:r>
+              <a:rPr sz="1300" b="0">
+                <a:latin typeface="맑은 고딕"/>
+              </a:rPr>
+              <a:t>• AI 활용 활성화 재시도 </a:t>
+            </a:r>
+            <a:r>
+              <a:rPr sz="1300" b="1">
+                <a:latin typeface="맑은 고딕"/>
+              </a:rPr>
+              <a:t>1회</a:t>
+            </a:r>
+            <a:r>
+              <a:rPr sz="1300" b="0">
+                <a:latin typeface="맑은 고딕"/>
+              </a:rPr>
+              <a:t>(실측), 코드 생성 후 요구사항 재작업 </a:t>
+            </a:r>
+            <a:r>
+              <a:rPr sz="1300" b="1">
+                <a:latin typeface="맑은 고딕"/>
+              </a:rPr>
+              <a:t>0회</a:t>
+            </a:r>
+            <a:r>
+              <a:rPr sz="1300" b="0">
+                <a:latin typeface="맑은 고딕"/>
+              </a:rPr>
+              <a:t>(실측)</a:t>
+            </a:r>
+          </a:p>
+          <a:p>
+            <a:r>
+              <a:rPr sz="1300" b="0">
+                <a:latin typeface="맑은 고딕"/>
+              </a:rPr>
+              <a:t>• AI 미활용 공수·연간 건수·인건비는 사내 실측값 필요 → </a:t>
+            </a:r>
+            <a:r>
+              <a:rPr sz="1300" b="0">
+                <a:solidFill>
+                  <a:srgbClr val="8B2452"/>
+                </a:solidFill>
+                <a:latin typeface="Consolas"/>
+              </a:rPr>
+              <a:t>report/effect-worksheet.md</a:t>
+            </a:r>
+            <a:r>
+              <a:rPr sz="1300" b="0">
+                <a:latin typeface="맑은 고딕"/>
+              </a:rPr>
+              <a:t>에 기입</a:t>
+            </a:r>
+          </a:p>
+          <a:p>
+            <a:r>
+              <a:rPr sz="1300" b="0">
+                <a:latin typeface="맑은 고딕"/>
+              </a:rPr>
+              <a:t>• </a:t>
+            </a:r>
+            <a:r>
+              <a:rPr sz="1300" b="1">
+                <a:latin typeface="맑은 고딕"/>
+              </a:rPr>
+              <a:t>측정 주의</a:t>
+            </a:r>
+            <a:r>
+              <a:rPr sz="1300" b="0">
+                <a:latin typeface="맑은 고딕"/>
+              </a:rPr>
+              <a:t>: AI 활용 공수에 인터뷰 응답 시간을 포함해야 함 (빼면 절감 과대 계상)</a:t>
+            </a:r>
+          </a:p>
+        </p:txBody>
+      </p:sp>
+    </p:spTree>
+  </p:cSld>
+  <p:clrMapOvr>
+    <a:masterClrMapping/>
+  </p:clrMapOvr>
+</p:sld>
+</file>
+
+<file path=ppt/slides/slide19.xml><?xml version="1.0" encoding="utf-8"?>
+<p:sld xmlns:a="http://schemas.openxmlformats.org/drawingml/2006/main" xmlns:p="http://schemas.openxmlformats.org/presentationml/2006/main" xmlns:r="http://schemas.openxmlformats.org/officeDocument/2006/relationships">
+  <p:cSld>
+    <p:spTree>
+      <p:nvGrpSpPr>
+        <p:cNvPr id="1" name=""/>
+        <p:cNvGrpSpPr/>
+        <p:nvPr/>
+      </p:nvGrpSpPr>
+      <p:grpSpPr/>
+      <p:sp>
+        <p:nvSpPr>
+          <p:cNvPr id="2" name="TextBox 1"/>
+          <p:cNvSpPr txBox="1"/>
+          <p:nvPr/>
+        </p:nvSpPr>
+        <p:spPr>
+          <a:xfrm>
+            <a:off x="548640" y="320040"/>
+            <a:ext cx="11064240" cy="822960"/>
+          </a:xfrm>
+          <a:prstGeom prst="rect">
+            <a:avLst/>
+          </a:prstGeom>
+          <a:noFill/>
+        </p:spPr>
+        <p:txBody>
+          <a:bodyPr wrap="square">
+            <a:spAutoFit/>
+          </a:bodyPr>
+          <a:lstStyle/>
+          <a:p>
+            <a:r>
+              <a:rPr sz="2400" b="1">
+                <a:solidFill>
+                  <a:srgbClr val="1F4E79"/>
+                </a:solidFill>
+                <a:latin typeface="맑은 고딕"/>
+              </a:rPr>
+              <a:t>16. 확산 가능성</a:t>
+            </a:r>
+          </a:p>
+        </p:txBody>
+      </p:sp>
+      <p:sp>
+        <p:nvSpPr>
+          <p:cNvPr id="3" name="TextBox 2"/>
+          <p:cNvSpPr txBox="1"/>
+          <p:nvPr/>
+        </p:nvSpPr>
+        <p:spPr>
+          <a:xfrm>
+            <a:off x="640080" y="1234440"/>
+            <a:ext cx="10881360" cy="658368"/>
+          </a:xfrm>
+          <a:prstGeom prst="rect">
+            <a:avLst/>
+          </a:prstGeom>
+          <a:noFill/>
+        </p:spPr>
+        <p:txBody>
+          <a:bodyPr wrap="square">
+            <a:spAutoFit/>
+          </a:bodyPr>
+          <a:lstStyle/>
+          <a:p>
+            <a:r>
+              <a:rPr sz="1300" b="0">
+                <a:latin typeface="맑은 고딕"/>
+              </a:rPr>
+              <a:t>확산 대상은 </a:t>
+            </a:r>
+            <a:r>
+              <a:rPr sz="1300" b="1">
+                <a:latin typeface="맑은 고딕"/>
+              </a:rPr>
+              <a:t>"AI를 활용해 ABAP을 개발하는 방식"</a:t>
+            </a:r>
+            <a:r>
+              <a:rPr sz="1300" b="0">
+                <a:latin typeface="맑은 고딕"/>
+              </a:rPr>
+              <a:t>, 저장소는 그 방식의 </a:t>
+            </a:r>
+            <a:r>
+              <a:rPr sz="1300" b="1">
+                <a:latin typeface="맑은 고딕"/>
+              </a:rPr>
+              <a:t>전달 매체</a:t>
+            </a:r>
+            <a:r>
+              <a:rPr sz="1300" b="0">
+                <a:latin typeface="맑은 고딕"/>
+              </a:rPr>
+              <a:t>입니다. 가이드가 파일로 존재하므로 구두 전수나 교육 없이 복제됩니다.</a:t>
+            </a:r>
+          </a:p>
+        </p:txBody>
+      </p:sp>
+      <p:graphicFrame>
+        <p:nvGraphicFramePr>
+          <p:cNvPr id="4" name="Table 3"/>
+          <p:cNvGraphicFramePr>
+            <a:graphicFrameLocks noGrp="1"/>
+          </p:cNvGraphicFramePr>
+          <p:nvPr/>
+        </p:nvGraphicFramePr>
+        <p:xfrm>
+          <a:off x="640080" y="2002536"/>
+          <a:ext cx="10881360" cy="1810512"/>
+        </p:xfrm>
+        <a:graphic>
+          <a:graphicData uri="http://schemas.openxmlformats.org/drawingml/2006/table">
+            <a:tbl>
+              <a:tblPr firstRow="1" bandRow="1">
+                <a:tableStyleId>{5C22544A-7EE6-4342-B048-85BDC9FD1C3A}</a:tableStyleId>
+              </a:tblPr>
+              <a:tblGrid>
+                <a:gridCol w="3627120"/>
+                <a:gridCol w="3627120"/>
+                <a:gridCol w="3627120"/>
+              </a:tblGrid>
+              <a:tr h="301752">
+                <a:tc>
+                  <a:txBody>
+                    <a:bodyPr/>
+                    <a:lstStyle/>
+                    <a:p>
+                      <a:r>
+                        <a:rPr sz="1100" b="1">
+                          <a:latin typeface="맑은 고딕"/>
+                        </a:rPr>
+                        <a:t>확산 축</a:t>
+                      </a:r>
+                    </a:p>
+                  </a:txBody>
+                  <a:tcPr/>
+                </a:tc>
+                <a:tc>
+                  <a:txBody>
+                    <a:bodyPr/>
+                    <a:lstStyle/>
+                    <a:p>
+                      <a:r>
+                        <a:rPr sz="1100" b="1">
+                          <a:latin typeface="맑은 고딕"/>
+                        </a:rPr>
+                        <a:t>재사용 자산</a:t>
+                      </a:r>
+                    </a:p>
+                  </a:txBody>
+                  <a:tcPr/>
+                </a:tc>
+                <a:tc>
+                  <a:txBody>
+                    <a:bodyPr/>
+                    <a:lstStyle/>
+                    <a:p>
+                      <a:r>
+                        <a:rPr sz="1100" b="1">
+                          <a:latin typeface="맑은 고딕"/>
+                        </a:rPr>
+                        <a:t>추가 필요 작업</a:t>
+                      </a:r>
+                    </a:p>
+                  </a:txBody>
+                  <a:tcPr/>
+                </a:tc>
+              </a:tr>
+              <a:tr h="301752">
+                <a:tc>
+                  <a:txBody>
+                    <a:bodyPr/>
+                    <a:lstStyle/>
+                    <a:p>
+                      <a:r>
+                        <a:rPr sz="1100" b="0">
+                          <a:latin typeface="맑은 고딕"/>
+                        </a:rPr>
+                        <a:t>모듈 (SD·MM·FI·PP)</a:t>
+                      </a:r>
+                    </a:p>
+                  </a:txBody>
+                  <a:tcPr/>
+                </a:tc>
+                <a:tc>
+                  <a:txBody>
+                    <a:bodyPr/>
+                    <a:lstStyle/>
+                    <a:p>
+                      <a:r>
+                        <a:rPr sz="1100" b="0">
+                          <a:latin typeface="맑은 고딕"/>
+                        </a:rPr>
+                        <a:t>규칙·절차·점검기·골격 전부</a:t>
+                      </a:r>
+                    </a:p>
+                  </a:txBody>
+                  <a:tcPr/>
+                </a:tc>
+                <a:tc>
+                  <a:txBody>
+                    <a:bodyPr/>
+                    <a:lstStyle/>
+                    <a:p>
+                      <a:r>
+                        <a:rPr sz="1100" b="0">
+                          <a:latin typeface="맑은 고딕"/>
+                        </a:rPr>
+                        <a:t>모듈별 DDIC 캐시 축적</a:t>
+                      </a:r>
+                    </a:p>
+                  </a:txBody>
+                  <a:tcPr/>
+                </a:tc>
+              </a:tr>
+              <a:tr h="301752">
+                <a:tc>
+                  <a:txBody>
+                    <a:bodyPr/>
+                    <a:lstStyle/>
+                    <a:p>
+                      <a:r>
+                        <a:rPr sz="1100" b="0">
+                          <a:latin typeface="맑은 고딕"/>
+                        </a:rPr>
+                        <a:t>인원 (같은 팀)</a:t>
+                      </a:r>
+                    </a:p>
+                  </a:txBody>
+                  <a:tcPr/>
+                </a:tc>
+                <a:tc>
+                  <a:txBody>
+                    <a:bodyPr/>
+                    <a:lstStyle/>
+                    <a:p>
+                      <a:r>
+                        <a:rPr sz="1100" b="0">
+                          <a:latin typeface="맑은 고딕"/>
+                        </a:rPr>
+                        <a:t>저장소 전체</a:t>
+                      </a:r>
+                    </a:p>
+                  </a:txBody>
+                  <a:tcPr/>
+                </a:tc>
+                <a:tc>
+                  <a:txBody>
+                    <a:bodyPr/>
+                    <a:lstStyle/>
+                    <a:p>
+                      <a:r>
+                        <a:rPr sz="1100" b="0">
+                          <a:latin typeface="맑은 고딕"/>
+                        </a:rPr>
+                        <a:t>없음 — Cursor로 열면 규칙 자동 적용</a:t>
+                      </a:r>
+                    </a:p>
+                  </a:txBody>
+                  <a:tcPr/>
+                </a:tc>
+              </a:tr>
+              <a:tr h="301752">
+                <a:tc>
+                  <a:txBody>
+                    <a:bodyPr/>
+                    <a:lstStyle/>
+                    <a:p>
+                      <a:r>
+                        <a:rPr sz="1100" b="0">
+                          <a:latin typeface="맑은 고딕"/>
+                        </a:rPr>
+                        <a:t>유형 (Module Pool·Interface 등)</a:t>
+                      </a:r>
+                    </a:p>
+                  </a:txBody>
+                  <a:tcPr/>
+                </a:tc>
+                <a:tc>
+                  <a:txBody>
+                    <a:bodyPr/>
+                    <a:lstStyle/>
+                    <a:p>
+                      <a:r>
+                        <a:rPr sz="1100" b="0">
+                          <a:latin typeface="맑은 고딕"/>
+                        </a:rPr>
+                        <a:t>요구사항 템플릿 5종 보유</a:t>
+                      </a:r>
+                    </a:p>
+                  </a:txBody>
+                  <a:tcPr/>
+                </a:tc>
+                <a:tc>
+                  <a:txBody>
+                    <a:bodyPr/>
+                    <a:lstStyle/>
+                    <a:p>
+                      <a:r>
+                        <a:rPr sz="1100" b="0">
+                          <a:latin typeface="맑은 고딕"/>
+                        </a:rPr>
+                        <a:t>유형별 코드 골격 추가</a:t>
+                      </a:r>
+                    </a:p>
+                  </a:txBody>
+                  <a:tcPr/>
+                </a:tc>
+              </a:tr>
+              <a:tr h="301752">
+                <a:tc>
+                  <a:txBody>
+                    <a:bodyPr/>
+                    <a:lstStyle/>
+                    <a:p>
+                      <a:r>
+                        <a:rPr sz="1100" b="0">
+                          <a:latin typeface="맑은 고딕"/>
+                        </a:rPr>
+                        <a:t>부문 (타 SAP 개발 조직)</a:t>
+                      </a:r>
+                    </a:p>
+                  </a:txBody>
+                  <a:tcPr/>
+                </a:tc>
+                <a:tc>
+                  <a:txBody>
+                    <a:bodyPr/>
+                    <a:lstStyle/>
+                    <a:p>
+                      <a:r>
+                        <a:rPr sz="1100" b="0">
+                          <a:latin typeface="맑은 고딕"/>
+                        </a:rPr>
+                        <a:t>규칙·절차·점검기</a:t>
+                      </a:r>
+                    </a:p>
+                  </a:txBody>
+                  <a:tcPr/>
+                </a:tc>
+                <a:tc>
+                  <a:txBody>
+                    <a:bodyPr/>
+                    <a:lstStyle/>
+                    <a:p>
+                      <a:r>
+                        <a:rPr sz="1100" b="0">
+                          <a:latin typeface="맑은 고딕"/>
+                        </a:rPr>
+                        <a:t>네이밍·패키지·권한 규칙 교체</a:t>
+                      </a:r>
+                    </a:p>
+                  </a:txBody>
+                  <a:tcPr/>
+                </a:tc>
+              </a:tr>
+              <a:tr h="301752">
+                <a:tc>
+                  <a:txBody>
+                    <a:bodyPr/>
+                    <a:lstStyle/>
+                    <a:p>
+                      <a:r>
+                        <a:rPr sz="1100" b="0">
+                          <a:latin typeface="맑은 고딕"/>
+                        </a:rPr>
+                        <a:t>도구 (Cursor 미사용)</a:t>
+                      </a:r>
+                    </a:p>
+                  </a:txBody>
+                  <a:tcPr/>
+                </a:tc>
+                <a:tc>
+                  <a:txBody>
+                    <a:bodyPr/>
+                    <a:lstStyle/>
+                    <a:p>
+                      <a:r>
+                        <a:rPr sz="1100" b="0">
+                          <a:latin typeface="맑은 고딕"/>
+                        </a:rPr>
+                        <a:t>규칙 전문 + 프롬프트 조각</a:t>
+                      </a:r>
+                    </a:p>
+                  </a:txBody>
+                  <a:tcPr/>
+                </a:tc>
+                <a:tc>
+                  <a:txBody>
+                    <a:bodyPr/>
+                    <a:lstStyle/>
+                    <a:p>
+                      <a:r>
+                        <a:rPr sz="1100" b="0">
+                          <a:latin typeface="맑은 고딕"/>
+                        </a:rPr>
+                        <a:t>해당 도구에 지침 등록</a:t>
+                      </a:r>
+                    </a:p>
+                  </a:txBody>
+                  <a:tcPr/>
+                </a:tc>
+              </a:tr>
+            </a:tbl>
+          </a:graphicData>
+        </a:graphic>
+      </p:graphicFrame>
+      <p:sp>
+        <p:nvSpPr>
+          <p:cNvPr id="5" name="TextBox 4"/>
+          <p:cNvSpPr txBox="1"/>
+          <p:nvPr/>
+        </p:nvSpPr>
+        <p:spPr>
+          <a:xfrm>
+            <a:off x="640080" y="3950208"/>
+            <a:ext cx="10881360" cy="658368"/>
+          </a:xfrm>
+          <a:prstGeom prst="rect">
+            <a:avLst/>
+          </a:prstGeom>
+          <a:noFill/>
+        </p:spPr>
+        <p:txBody>
+          <a:bodyPr wrap="square">
+            <a:spAutoFit/>
+          </a:bodyPr>
+          <a:lstStyle/>
+          <a:p>
+            <a:r>
+              <a:rPr sz="1300" b="0">
+                <a:latin typeface="맑은 고딕"/>
+              </a:rPr>
+              <a:t>• 사내 고유 정보가 </a:t>
+            </a:r>
+            <a:r>
+              <a:rPr sz="1300" b="1">
+                <a:latin typeface="맑은 고딕"/>
+              </a:rPr>
+              <a:t>3개 파일로 격리</a:t>
+            </a:r>
+            <a:r>
+              <a:rPr sz="1300" b="0">
+                <a:latin typeface="맑은 고딕"/>
+              </a:rPr>
+              <a:t> — 시스템 컨텍스트 / DDIC 캐시 / 오류 패턴</a:t>
+            </a:r>
+          </a:p>
+          <a:p>
+            <a:r>
+              <a:rPr sz="1300" b="0">
+                <a:latin typeface="맑은 고딕"/>
+              </a:rPr>
+              <a:t>• SAP 외 영역 이식 가능: "AI가 직접 실행할 수 없고 사람이 결과를 옮기는" 업무면 동일 설계 적용</a:t>
+            </a:r>
+          </a:p>
+        </p:txBody>
+      </p:sp>
+    </p:spTree>
+  </p:cSld>
+  <p:clrMapOvr>
+    <a:masterClrMapping/>
+  </p:clrMapOvr>
+</p:sld>
+</file>
+
+<file path=ppt/slides/slide2.xml><?xml version="1.0" encoding="utf-8"?>
+<p:sld xmlns:a="http://schemas.openxmlformats.org/drawingml/2006/main" xmlns:p="http://schemas.openxmlformats.org/presentationml/2006/main" xmlns:r="http://schemas.openxmlformats.org/officeDocument/2006/relationships">
+  <p:cSld>
+    <p:spTree>
+      <p:nvGrpSpPr>
+        <p:cNvPr id="1" name=""/>
+        <p:cNvGrpSpPr/>
+        <p:nvPr/>
+      </p:nvGrpSpPr>
+      <p:grpSpPr/>
+      <p:sp>
+        <p:nvSpPr>
+          <p:cNvPr id="2" name="TextBox 1"/>
+          <p:cNvSpPr txBox="1"/>
+          <p:nvPr/>
+        </p:nvSpPr>
+        <p:spPr>
+          <a:xfrm>
+            <a:off x="548640" y="320040"/>
+            <a:ext cx="11064240" cy="822960"/>
+          </a:xfrm>
+          <a:prstGeom prst="rect">
+            <a:avLst/>
+          </a:prstGeom>
+          <a:noFill/>
+        </p:spPr>
+        <p:txBody>
+          <a:bodyPr wrap="square">
+            <a:spAutoFit/>
+          </a:bodyPr>
+          <a:lstStyle/>
+          <a:p>
+            <a:r>
+              <a:rPr sz="2400" b="1">
+                <a:solidFill>
+                  <a:srgbClr val="1F4E79"/>
+                </a:solidFill>
+                <a:latin typeface="맑은 고딕"/>
+              </a:rPr>
+              <a:t>결론 — ABAP 코딩에 AI를 쓰면 훨씬 효율적이다</a:t>
+            </a:r>
+          </a:p>
+        </p:txBody>
+      </p:sp>
+      <p:sp>
+        <p:nvSpPr>
+          <p:cNvPr id="3" name="TextBox 2"/>
+          <p:cNvSpPr txBox="1"/>
+          <p:nvPr/>
+        </p:nvSpPr>
+        <p:spPr>
+          <a:xfrm>
+            <a:off x="640080" y="1234440"/>
+            <a:ext cx="10881360" cy="1316736"/>
+          </a:xfrm>
+          <a:prstGeom prst="rect">
+            <a:avLst/>
+          </a:prstGeom>
+          <a:noFill/>
+        </p:spPr>
+        <p:txBody>
+          <a:bodyPr wrap="square">
+            <a:spAutoFit/>
+          </a:bodyPr>
+          <a:lstStyle/>
+          <a:p>
+            <a:r>
+              <a:rPr sz="1300" b="0">
+                <a:latin typeface="맑은 고딕"/>
+              </a:rPr>
+              <a:t>• 담당자는 </a:t>
+            </a:r>
+            <a:r>
+              <a:rPr sz="1300" b="1">
+                <a:latin typeface="맑은 고딕"/>
+              </a:rPr>
+              <a:t>쓸 테이블조차 모르는 상태</a:t>
+            </a:r>
+            <a:r>
+              <a:rPr sz="1300" b="0">
+                <a:latin typeface="맑은 고딕"/>
+              </a:rPr>
+              <a:t>에서 출발 → AI가 테이블 6개 제안</a:t>
+            </a:r>
+          </a:p>
+          <a:p>
+            <a:r>
+              <a:rPr sz="1300" b="0">
+                <a:latin typeface="맑은 고딕"/>
+              </a:rPr>
+              <a:t>• AI가 </a:t>
+            </a:r>
+            <a:r>
+              <a:rPr sz="1300" b="1">
+                <a:latin typeface="맑은 고딕"/>
+              </a:rPr>
+              <a:t>156줄 ABAP + 테스트 케이스 + 권한·이송 문서</a:t>
+            </a:r>
+            <a:r>
+              <a:rPr sz="1300" b="0">
+                <a:latin typeface="맑은 고딕"/>
+              </a:rPr>
+              <a:t>까지 생성</a:t>
+            </a:r>
+          </a:p>
+          <a:p>
+            <a:r>
+              <a:rPr sz="1300" b="0">
+                <a:latin typeface="맑은 고딕"/>
+              </a:rPr>
+              <a:t>• 결과: </a:t>
+            </a:r>
+            <a:r>
+              <a:rPr sz="1300" b="1">
+                <a:latin typeface="맑은 고딕"/>
+              </a:rPr>
+              <a:t>활성화 오류 1건만</a:t>
+            </a:r>
+            <a:r>
+              <a:rPr sz="1300" b="0">
+                <a:latin typeface="맑은 고딕"/>
+              </a:rPr>
+              <a:t>으로 완성, T1~T3 전부 통과, 운영 이관 완료</a:t>
+            </a:r>
+          </a:p>
+          <a:p>
+            <a:r>
+              <a:rPr sz="1300" b="0">
+                <a:latin typeface="맑은 고딕"/>
+              </a:rPr>
+              <a:t>• 수작업이라면 SE11 조사 단계부터 시작해야 했던 일 → </a:t>
+            </a:r>
+            <a:r>
+              <a:rPr sz="1300" b="1">
+                <a:latin typeface="맑은 고딕"/>
+              </a:rPr>
+              <a:t>AI 없이는 같은 기간 완료 곤란</a:t>
+            </a:r>
+          </a:p>
+        </p:txBody>
+      </p:sp>
+      <p:sp>
+        <p:nvSpPr>
+          <p:cNvPr id="4" name="TextBox 3"/>
+          <p:cNvSpPr txBox="1"/>
+          <p:nvPr/>
+        </p:nvSpPr>
+        <p:spPr>
+          <a:xfrm>
+            <a:off x="640080" y="2660904"/>
+            <a:ext cx="10881360" cy="329184"/>
+          </a:xfrm>
+          <a:prstGeom prst="rect">
+            <a:avLst/>
+          </a:prstGeom>
+          <a:noFill/>
+        </p:spPr>
+        <p:txBody>
+          <a:bodyPr wrap="square">
+            <a:spAutoFit/>
+          </a:bodyPr>
+          <a:lstStyle/>
+          <a:p>
+            <a:r>
+              <a:rPr sz="1300" b="0" i="1">
+                <a:solidFill>
+                  <a:srgbClr val="595959"/>
+                </a:solidFill>
+                <a:latin typeface="맑은 고딕"/>
+              </a:rPr>
+              <a:t>그리고 AI를 </a:t>
+            </a:r>
+            <a:r>
+              <a:rPr sz="1300" b="1" i="1">
+                <a:solidFill>
+                  <a:srgbClr val="595959"/>
+                </a:solidFill>
+                <a:latin typeface="맑은 고딕"/>
+              </a:rPr>
+              <a:t>그냥</a:t>
+            </a:r>
+            <a:r>
+              <a:rPr sz="1300" b="0" i="1">
+                <a:solidFill>
+                  <a:srgbClr val="595959"/>
+                </a:solidFill>
+                <a:latin typeface="맑은 고딕"/>
+              </a:rPr>
+              <a:t> 쓰는 것보다, 저장소로 </a:t>
+            </a:r>
+            <a:r>
+              <a:rPr sz="1300" b="1" i="1">
+                <a:solidFill>
+                  <a:srgbClr val="595959"/>
+                </a:solidFill>
+                <a:latin typeface="맑은 고딕"/>
+              </a:rPr>
+              <a:t>방향과 가이드</a:t>
+            </a:r>
+            <a:r>
+              <a:rPr sz="1300" b="0" i="1">
+                <a:solidFill>
+                  <a:srgbClr val="595959"/>
+                </a:solidFill>
+                <a:latin typeface="맑은 고딕"/>
+              </a:rPr>
+              <a:t>를 줄 때 효과가 더 커진다</a:t>
+            </a:r>
+          </a:p>
+        </p:txBody>
+      </p:sp>
+      <p:graphicFrame>
+        <p:nvGraphicFramePr>
+          <p:cNvPr id="5" name="Table 4"/>
+          <p:cNvGraphicFramePr>
+            <a:graphicFrameLocks noGrp="1"/>
+          </p:cNvGraphicFramePr>
+          <p:nvPr/>
+        </p:nvGraphicFramePr>
+        <p:xfrm>
+          <a:off x="640080" y="3099816"/>
+          <a:ext cx="10881360" cy="905256"/>
+        </p:xfrm>
+        <a:graphic>
+          <a:graphicData uri="http://schemas.openxmlformats.org/drawingml/2006/table">
+            <a:tbl>
+              <a:tblPr firstRow="1" bandRow="1">
+                <a:tableStyleId>{5C22544A-7EE6-4342-B048-85BDC9FD1C3A}</a:tableStyleId>
+              </a:tblPr>
+              <a:tblGrid>
+                <a:gridCol w="3627120"/>
+                <a:gridCol w="3627120"/>
+                <a:gridCol w="3627120"/>
+              </a:tblGrid>
+              <a:tr h="301752">
+                <a:tc>
+                  <a:txBody>
+                    <a:bodyPr/>
+                    <a:lstStyle/>
+                    <a:p>
+                      <a:r>
+                        <a:rPr sz="1100" b="1">
+                          <a:latin typeface="맑은 고딕"/>
+                        </a:rPr>
+                        <a:t>비교축</a:t>
+                      </a:r>
+                    </a:p>
+                  </a:txBody>
+                  <a:tcPr/>
+                </a:tc>
+                <a:tc>
+                  <a:txBody>
+                    <a:bodyPr/>
+                    <a:lstStyle/>
+                    <a:p>
+                      <a:r>
+                        <a:rPr sz="1100" b="1">
+                          <a:latin typeface="맑은 고딕"/>
+                        </a:rPr>
+                        <a:t>내용</a:t>
+                      </a:r>
+                    </a:p>
+                  </a:txBody>
+                  <a:tcPr/>
+                </a:tc>
+                <a:tc>
+                  <a:txBody>
+                    <a:bodyPr/>
+                    <a:lstStyle/>
+                    <a:p>
+                      <a:r>
+                        <a:rPr sz="1100" b="1">
+                          <a:latin typeface="맑은 고딕"/>
+                        </a:rPr>
+                        <a:t>리포트</a:t>
+                      </a:r>
+                    </a:p>
+                  </a:txBody>
+                  <a:tcPr/>
+                </a:tc>
+              </a:tr>
+              <a:tr h="301752">
+                <a:tc>
+                  <a:txBody>
+                    <a:bodyPr/>
+                    <a:lstStyle/>
+                    <a:p>
+                      <a:r>
+                        <a:rPr sz="1100" b="1">
+                          <a:latin typeface="맑은 고딕"/>
+                        </a:rPr>
+                        <a:t>주축</a:t>
+                      </a:r>
+                    </a:p>
+                  </a:txBody>
+                  <a:tcPr/>
+                </a:tc>
+                <a:tc>
+                  <a:txBody>
+                    <a:bodyPr/>
+                    <a:lstStyle/>
+                    <a:p>
+                      <a:r>
+                        <a:rPr sz="1100" b="0">
+                          <a:latin typeface="맑은 고딕"/>
+                        </a:rPr>
+                        <a:t>AI 미활용(수작업) → </a:t>
+                      </a:r>
+                      <a:r>
+                        <a:rPr sz="1100" b="1">
+                          <a:latin typeface="맑은 고딕"/>
+                        </a:rPr>
+                        <a:t>AI 활용</a:t>
+                      </a:r>
+                    </a:p>
+                  </a:txBody>
+                  <a:tcPr/>
+                </a:tc>
+                <a:tc>
+                  <a:txBody>
+                    <a:bodyPr/>
+                    <a:lstStyle/>
+                    <a:p>
+                      <a:r>
+                        <a:rPr sz="1100" b="0">
+                          <a:latin typeface="맑은 고딕"/>
+                        </a:rPr>
+                        <a:t>§4.1 · §4.4</a:t>
+                      </a:r>
+                    </a:p>
+                  </a:txBody>
+                  <a:tcPr/>
+                </a:tc>
+              </a:tr>
+              <a:tr h="301752">
+                <a:tc>
+                  <a:txBody>
+                    <a:bodyPr/>
+                    <a:lstStyle/>
+                    <a:p>
+                      <a:r>
+                        <a:rPr sz="1100" b="0">
+                          <a:latin typeface="맑은 고딕"/>
+                        </a:rPr>
+                        <a:t>보조축</a:t>
+                      </a:r>
+                    </a:p>
+                  </a:txBody>
+                  <a:tcPr/>
+                </a:tc>
+                <a:tc>
+                  <a:txBody>
+                    <a:bodyPr/>
+                    <a:lstStyle/>
+                    <a:p>
+                      <a:r>
+                        <a:rPr sz="1100" b="0">
+                          <a:latin typeface="맑은 고딕"/>
+                        </a:rPr>
+                        <a:t>AI 단독 → </a:t>
+                      </a:r>
+                      <a:r>
+                        <a:rPr sz="1100" b="1">
+                          <a:latin typeface="맑은 고딕"/>
+                        </a:rPr>
+                        <a:t>AI + 저장소 가이드</a:t>
+                      </a:r>
+                    </a:p>
+                  </a:txBody>
+                  <a:tcPr/>
+                </a:tc>
+                <a:tc>
+                  <a:txBody>
+                    <a:bodyPr/>
+                    <a:lstStyle/>
+                    <a:p>
+                      <a:r>
+                        <a:rPr sz="1100" b="0">
+                          <a:latin typeface="맑은 고딕"/>
+                        </a:rPr>
+                        <a:t>§4.3 · §4.5</a:t>
+                      </a:r>
+                    </a:p>
+                  </a:txBody>
+                  <a:tcPr/>
+                </a:tc>
+              </a:tr>
+            </a:tbl>
+          </a:graphicData>
+        </a:graphic>
+      </p:graphicFrame>
+    </p:spTree>
+  </p:cSld>
+  <p:clrMapOvr>
+    <a:masterClrMapping/>
+  </p:clrMapOvr>
+</p:sld>
+</file>
+
+<file path=ppt/slides/slide20.xml><?xml version="1.0" encoding="utf-8"?>
+<p:sld xmlns:a="http://schemas.openxmlformats.org/drawingml/2006/main" xmlns:p="http://schemas.openxmlformats.org/presentationml/2006/main" xmlns:r="http://schemas.openxmlformats.org/officeDocument/2006/relationships">
+  <p:cSld>
+    <p:spTree>
+      <p:nvGrpSpPr>
+        <p:cNvPr id="1" name=""/>
+        <p:cNvGrpSpPr/>
+        <p:nvPr/>
+      </p:nvGrpSpPr>
+      <p:grpSpPr/>
+      <p:sp>
+        <p:nvSpPr>
+          <p:cNvPr id="2" name="TextBox 1"/>
+          <p:cNvSpPr txBox="1"/>
+          <p:nvPr/>
+        </p:nvSpPr>
+        <p:spPr>
+          <a:xfrm>
+            <a:off x="548640" y="320040"/>
+            <a:ext cx="11064240" cy="822960"/>
+          </a:xfrm>
+          <a:prstGeom prst="rect">
+            <a:avLst/>
+          </a:prstGeom>
+          <a:noFill/>
+        </p:spPr>
+        <p:txBody>
+          <a:bodyPr wrap="square">
+            <a:spAutoFit/>
+          </a:bodyPr>
+          <a:lstStyle/>
+          <a:p>
+            <a:r>
+              <a:rPr sz="2400" b="1">
+                <a:solidFill>
+                  <a:srgbClr val="1F4E79"/>
+                </a:solidFill>
+                <a:latin typeface="맑은 고딕"/>
+              </a:rPr>
+              <a:t>17. 향후 계획</a:t>
             </a:r>
           </a:p>
         </p:txBody>
@@ -4954,7 +7514,7 @@
                         <a:rPr sz="1100" b="1">
                           <a:latin typeface="맑은 고딕"/>
                         </a:rPr>
-                        <a:t>확산 축</a:t>
+                        <a:t>단계</a:t>
                       </a:r>
                     </a:p>
                   </a:txBody>
@@ -4969,7 +7529,7 @@
                         <a:rPr sz="1100" b="1">
                           <a:latin typeface="맑은 고딕"/>
                         </a:rPr>
-                        <a:t>재사용 자산</a:t>
+                        <a:t>내용</a:t>
                       </a:r>
                     </a:p>
                   </a:txBody>
@@ -4984,7 +7544,7 @@
                         <a:rPr sz="1100" b="1">
                           <a:latin typeface="맑은 고딕"/>
                         </a:rPr>
-                        <a:t>추가 필요 작업</a:t>
+                        <a:t>완료 기준</a:t>
                       </a:r>
                     </a:p>
                   </a:txBody>
@@ -5001,37 +7561,37 @@
                         <a:rPr sz="1100" b="0">
                           <a:latin typeface="맑은 고딕"/>
                         </a:rPr>
-                        <a:t>모듈 (SD·MM·FI·PP)</a:t>
-                      </a:r>
-                    </a:p>
-                  </a:txBody>
-                  <a:tcPr/>
-                </a:tc>
-                <a:tc>
-                  <a:txBody>
-                    <a:bodyPr/>
-                    <a:lstStyle/>
-                    <a:p>
-                      <a:r>
-                        <a:rPr sz="1100" b="0">
-                          <a:latin typeface="맑은 고딕"/>
-                        </a:rPr>
-                        <a:t>규칙·절차·점검기·골격 전부</a:t>
-                      </a:r>
-                    </a:p>
-                  </a:txBody>
-                  <a:tcPr/>
-                </a:tc>
-                <a:tc>
-                  <a:txBody>
-                    <a:bodyPr/>
-                    <a:lstStyle/>
-                    <a:p>
-                      <a:r>
-                        <a:rPr sz="1100" b="0">
-                          <a:latin typeface="맑은 고딕"/>
-                        </a:rPr>
-                        <a:t>모듈별 DDIC 캐시 축적</a:t>
+                        <a:t>1 적용 확대</a:t>
+                      </a:r>
+                    </a:p>
+                  </a:txBody>
+                  <a:tcPr/>
+                </a:tc>
+                <a:tc>
+                  <a:txBody>
+                    <a:bodyPr/>
+                    <a:lstStyle/>
+                    <a:p>
+                      <a:r>
+                        <a:rPr sz="1100" b="0">
+                          <a:latin typeface="맑은 고딕"/>
+                        </a:rPr>
+                        <a:t>조회성 리포트 중심 세션 누적, 모듈별 DDIC 캐시 확보</a:t>
+                      </a:r>
+                    </a:p>
+                  </a:txBody>
+                  <a:tcPr/>
+                </a:tc>
+                <a:tc>
+                  <a:txBody>
+                    <a:bodyPr/>
+                    <a:lstStyle/>
+                    <a:p>
+                      <a:r>
+                        <a:rPr sz="1100" b="0">
+                          <a:latin typeface="맑은 고딕"/>
+                        </a:rPr>
+                        <a:t>세션 5건 이상</a:t>
                       </a:r>
                     </a:p>
                   </a:txBody>
@@ -5048,37 +7608,58 @@
                         <a:rPr sz="1100" b="0">
                           <a:latin typeface="맑은 고딕"/>
                         </a:rPr>
-                        <a:t>인원 (같은 팀)</a:t>
-                      </a:r>
-                    </a:p>
-                  </a:txBody>
-                  <a:tcPr/>
-                </a:tc>
-                <a:tc>
-                  <a:txBody>
-                    <a:bodyPr/>
-                    <a:lstStyle/>
-                    <a:p>
-                      <a:r>
-                        <a:rPr sz="1100" b="0">
-                          <a:latin typeface="맑은 고딕"/>
-                        </a:rPr>
-                        <a:t>저장소 전체</a:t>
-                      </a:r>
-                    </a:p>
-                  </a:txBody>
-                  <a:tcPr/>
-                </a:tc>
-                <a:tc>
-                  <a:txBody>
-                    <a:bodyPr/>
-                    <a:lstStyle/>
-                    <a:p>
-                      <a:r>
-                        <a:rPr sz="1100" b="0">
-                          <a:latin typeface="맑은 고딕"/>
-                        </a:rPr>
-                        <a:t>없음 — Cursor로 열면 규칙 자동 적용</a:t>
+                        <a:t>2 </a:t>
+                      </a:r>
+                      <a:r>
+                        <a:rPr sz="1100" b="1">
+                          <a:latin typeface="맑은 고딕"/>
+                        </a:rPr>
+                        <a:t>측정 체계</a:t>
+                      </a:r>
+                    </a:p>
+                  </a:txBody>
+                  <a:tcPr/>
+                </a:tc>
+                <a:tc>
+                  <a:txBody>
+                    <a:bodyPr/>
+                    <a:lstStyle/>
+                    <a:p>
+                      <a:r>
+                        <a:rPr sz="1100" b="0">
+                          <a:latin typeface="맑은 고딕"/>
+                        </a:rPr>
+                        <a:t>세션별 공수·재시도 횟수를 </a:t>
+                      </a:r>
+                      <a:r>
+                        <a:rPr sz="1100" b="0">
+                          <a:solidFill>
+                            <a:srgbClr val="8B2452"/>
+                          </a:solidFill>
+                          <a:latin typeface="Consolas"/>
+                        </a:rPr>
+                        <a:t>verify.md</a:t>
+                      </a:r>
+                      <a:r>
+                        <a:rPr sz="1100" b="0">
+                          <a:latin typeface="맑은 고딕"/>
+                        </a:rPr>
+                        <a:t> 표준 기록 항목화</a:t>
+                      </a:r>
+                    </a:p>
+                  </a:txBody>
+                  <a:tcPr/>
+                </a:tc>
+                <a:tc>
+                  <a:txBody>
+                    <a:bodyPr/>
+                    <a:lstStyle/>
+                    <a:p>
+                      <a:r>
+                        <a:rPr sz="1100" b="0">
+                          <a:latin typeface="맑은 고딕"/>
+                        </a:rPr>
+                        <a:t>정량 실측값 확보</a:t>
                       </a:r>
                     </a:p>
                   </a:txBody>
@@ -5095,37 +7676,37 @@
                         <a:rPr sz="1100" b="0">
                           <a:latin typeface="맑은 고딕"/>
                         </a:rPr>
-                        <a:t>유형 (Module Pool·Interface 등)</a:t>
-                      </a:r>
-                    </a:p>
-                  </a:txBody>
-                  <a:tcPr/>
-                </a:tc>
-                <a:tc>
-                  <a:txBody>
-                    <a:bodyPr/>
-                    <a:lstStyle/>
-                    <a:p>
-                      <a:r>
-                        <a:rPr sz="1100" b="0">
-                          <a:latin typeface="맑은 고딕"/>
-                        </a:rPr>
-                        <a:t>요구사항 템플릿 5종 보유</a:t>
-                      </a:r>
-                    </a:p>
-                  </a:txBody>
-                  <a:tcPr/>
-                </a:tc>
-                <a:tc>
-                  <a:txBody>
-                    <a:bodyPr/>
-                    <a:lstStyle/>
-                    <a:p>
-                      <a:r>
-                        <a:rPr sz="1100" b="0">
-                          <a:latin typeface="맑은 고딕"/>
-                        </a:rPr>
-                        <a:t>유형별 코드 골격 추가</a:t>
+                        <a:t>3 유형 확장</a:t>
+                      </a:r>
+                    </a:p>
+                  </a:txBody>
+                  <a:tcPr/>
+                </a:tc>
+                <a:tc>
+                  <a:txBody>
+                    <a:bodyPr/>
+                    <a:lstStyle/>
+                    <a:p>
+                      <a:r>
+                        <a:rPr sz="1100" b="0">
+                          <a:latin typeface="맑은 고딕"/>
+                        </a:rPr>
+                        <a:t>Module Pool·Interface 등 코드 골격 추가</a:t>
+                      </a:r>
+                    </a:p>
+                  </a:txBody>
+                  <a:tcPr/>
+                </a:tc>
+                <a:tc>
+                  <a:txBody>
+                    <a:bodyPr/>
+                    <a:lstStyle/>
+                    <a:p>
+                      <a:r>
+                        <a:rPr sz="1100" b="0">
+                          <a:latin typeface="맑은 고딕"/>
+                        </a:rPr>
+                        <a:t>유형별 골격·규칙 보강</a:t>
                       </a:r>
                     </a:p>
                   </a:txBody>
@@ -5142,37 +7723,37 @@
                         <a:rPr sz="1100" b="0">
                           <a:latin typeface="맑은 고딕"/>
                         </a:rPr>
-                        <a:t>부문 (타 SAP 개발 조직)</a:t>
-                      </a:r>
-                    </a:p>
-                  </a:txBody>
-                  <a:tcPr/>
-                </a:tc>
-                <a:tc>
-                  <a:txBody>
-                    <a:bodyPr/>
-                    <a:lstStyle/>
-                    <a:p>
-                      <a:r>
-                        <a:rPr sz="1100" b="0">
-                          <a:latin typeface="맑은 고딕"/>
-                        </a:rPr>
-                        <a:t>규칙·절차·점검기</a:t>
-                      </a:r>
-                    </a:p>
-                  </a:txBody>
-                  <a:tcPr/>
-                </a:tc>
-                <a:tc>
-                  <a:txBody>
-                    <a:bodyPr/>
-                    <a:lstStyle/>
-                    <a:p>
-                      <a:r>
-                        <a:rPr sz="1100" b="0">
-                          <a:latin typeface="맑은 고딕"/>
-                        </a:rPr>
-                        <a:t>네이밍·패키지·권한 규칙 교체</a:t>
+                        <a:t>4 팀 확산</a:t>
+                      </a:r>
+                    </a:p>
+                  </a:txBody>
+                  <a:tcPr/>
+                </a:tc>
+                <a:tc>
+                  <a:txBody>
+                    <a:bodyPr/>
+                    <a:lstStyle/>
+                    <a:p>
+                      <a:r>
+                        <a:rPr sz="1100" b="0">
+                          <a:latin typeface="맑은 고딕"/>
+                        </a:rPr>
+                        <a:t>적용 가이드 공유, 패턴 공동 축적 운영</a:t>
+                      </a:r>
+                    </a:p>
+                  </a:txBody>
+                  <a:tcPr/>
+                </a:tc>
+                <a:tc>
+                  <a:txBody>
+                    <a:bodyPr/>
+                    <a:lstStyle/>
+                    <a:p>
+                      <a:r>
+                        <a:rPr sz="1100" b="0">
+                          <a:latin typeface="맑은 고딕"/>
+                        </a:rPr>
+                        <a:t>다수 담당자 사용, 패턴 20건</a:t>
                       </a:r>
                     </a:p>
                   </a:txBody>
@@ -5189,37 +7770,37 @@
                         <a:rPr sz="1100" b="0">
                           <a:latin typeface="맑은 고딕"/>
                         </a:rPr>
-                        <a:t>도구 (Cursor 미사용)</a:t>
-                      </a:r>
-                    </a:p>
-                  </a:txBody>
-                  <a:tcPr/>
-                </a:tc>
-                <a:tc>
-                  <a:txBody>
-                    <a:bodyPr/>
-                    <a:lstStyle/>
-                    <a:p>
-                      <a:r>
-                        <a:rPr sz="1100" b="0">
-                          <a:latin typeface="맑은 고딕"/>
-                        </a:rPr>
-                        <a:t>규칙 전문 + 프롬프트 조각</a:t>
-                      </a:r>
-                    </a:p>
-                  </a:txBody>
-                  <a:tcPr/>
-                </a:tc>
-                <a:tc>
-                  <a:txBody>
-                    <a:bodyPr/>
-                    <a:lstStyle/>
-                    <a:p>
-                      <a:r>
-                        <a:rPr sz="1100" b="0">
-                          <a:latin typeface="맑은 고딕"/>
-                        </a:rPr>
-                        <a:t>해당 도구에 지침 등록</a:t>
+                        <a:t>5 규칙 심화</a:t>
+                      </a:r>
+                    </a:p>
+                  </a:txBody>
+                  <a:tcPr/>
+                </a:tc>
+                <a:tc>
+                  <a:txBody>
+                    <a:bodyPr/>
+                    <a:lstStyle/>
+                    <a:p>
+                      <a:r>
+                        <a:rPr sz="1100" b="0">
+                          <a:latin typeface="맑은 고딕"/>
+                        </a:rPr>
+                        <a:t>운영 중 발생 오류를 규칙으로 승격, 성능 규칙 확대</a:t>
+                      </a:r>
+                    </a:p>
+                  </a:txBody>
+                  <a:tcPr/>
+                </a:tc>
+                <a:tc>
+                  <a:txBody>
+                    <a:bodyPr/>
+                    <a:lstStyle/>
+                    <a:p>
+                      <a:r>
+                        <a:rPr sz="1100" b="0">
+                          <a:latin typeface="맑은 고딕"/>
+                        </a:rPr>
+                        <a:t>규칙 25건 이상</a:t>
                       </a:r>
                     </a:p>
                   </a:txBody>
@@ -5239,7 +7820,7 @@
         <p:spPr>
           <a:xfrm>
             <a:off x="640080" y="3182112"/>
-            <a:ext cx="10881360" cy="658368"/>
+            <a:ext cx="10881360" cy="329184"/>
           </a:xfrm>
           <a:prstGeom prst="rect">
             <a:avLst/>
@@ -5256,27 +7837,19 @@
               <a:rPr sz="1300" b="0">
                 <a:latin typeface="맑은 고딕"/>
               </a:rPr>
-              <a:t>• 사내 고유 정보가 </a:t>
+              <a:t>• </a:t>
             </a:r>
             <a:r>
               <a:rPr sz="1300" b="1">
                 <a:latin typeface="맑은 고딕"/>
               </a:rPr>
-              <a:t>3개 파일로 격리</a:t>
-            </a:r>
-            <a:r>
-              <a:rPr sz="1300" b="0">
-                <a:latin typeface="맑은 고딕"/>
-              </a:rPr>
-              <a:t> — 시스템 컨텍스트 / DDIC 캐시 / 오류 패턴</a:t>
-            </a:r>
-          </a:p>
-          <a:p>
-            <a:r>
-              <a:rPr sz="1300" b="0">
-                <a:latin typeface="맑은 고딕"/>
-              </a:rPr>
-              <a:t>• SAP 외 영역 이식 가능: "AI가 직접 실행할 수 없고 사람이 결과를 옮기는" 업무면 동일 설계 적용</a:t>
+              <a:t>2단계를 우선 과제로 설정</a:t>
+            </a:r>
+            <a:r>
+              <a:rPr sz="1300" b="0">
+                <a:latin typeface="맑은 고딕"/>
+              </a:rPr>
+              <a:t> — 공수 기록이 세션 산출물에 없어 현재는 사후 추정이 필요. 표준 기록 항목을 넣으면 이후 세션부터 절감 효과가 자동 집계됨</a:t>
             </a:r>
           </a:p>
         </p:txBody>
@@ -5289,7 +7862,7 @@
 </p:sld>
 </file>
 
-<file path=ppt/slides/slide16.xml><?xml version="1.0" encoding="utf-8"?>
+<file path=ppt/slides/slide21.xml><?xml version="1.0" encoding="utf-8"?>
 <p:sld xmlns:a="http://schemas.openxmlformats.org/drawingml/2006/main" xmlns:p="http://schemas.openxmlformats.org/presentationml/2006/main" xmlns:r="http://schemas.openxmlformats.org/officeDocument/2006/relationships">
   <p:cSld>
     <p:spTree>
@@ -5328,432 +7901,7 @@
                 </a:solidFill>
                 <a:latin typeface="맑은 고딕"/>
               </a:rPr>
-              <a:t>14. 향후 계획</a:t>
-            </a:r>
-          </a:p>
-        </p:txBody>
-      </p:sp>
-      <p:graphicFrame>
-        <p:nvGraphicFramePr>
-          <p:cNvPr id="3" name="Table 2"/>
-          <p:cNvGraphicFramePr>
-            <a:graphicFrameLocks noGrp="1"/>
-          </p:cNvGraphicFramePr>
-          <p:nvPr/>
-        </p:nvGraphicFramePr>
-        <p:xfrm>
-          <a:off x="640080" y="1234440"/>
-          <a:ext cx="10881360" cy="1810512"/>
-        </p:xfrm>
-        <a:graphic>
-          <a:graphicData uri="http://schemas.openxmlformats.org/drawingml/2006/table">
-            <a:tbl>
-              <a:tblPr firstRow="1" bandRow="1">
-                <a:tableStyleId>{5C22544A-7EE6-4342-B048-85BDC9FD1C3A}</a:tableStyleId>
-              </a:tblPr>
-              <a:tblGrid>
-                <a:gridCol w="3627120"/>
-                <a:gridCol w="3627120"/>
-                <a:gridCol w="3627120"/>
-              </a:tblGrid>
-              <a:tr h="301752">
-                <a:tc>
-                  <a:txBody>
-                    <a:bodyPr/>
-                    <a:lstStyle/>
-                    <a:p>
-                      <a:r>
-                        <a:rPr sz="1100" b="1">
-                          <a:latin typeface="맑은 고딕"/>
-                        </a:rPr>
-                        <a:t>단계</a:t>
-                      </a:r>
-                    </a:p>
-                  </a:txBody>
-                  <a:tcPr/>
-                </a:tc>
-                <a:tc>
-                  <a:txBody>
-                    <a:bodyPr/>
-                    <a:lstStyle/>
-                    <a:p>
-                      <a:r>
-                        <a:rPr sz="1100" b="1">
-                          <a:latin typeface="맑은 고딕"/>
-                        </a:rPr>
-                        <a:t>내용</a:t>
-                      </a:r>
-                    </a:p>
-                  </a:txBody>
-                  <a:tcPr/>
-                </a:tc>
-                <a:tc>
-                  <a:txBody>
-                    <a:bodyPr/>
-                    <a:lstStyle/>
-                    <a:p>
-                      <a:r>
-                        <a:rPr sz="1100" b="1">
-                          <a:latin typeface="맑은 고딕"/>
-                        </a:rPr>
-                        <a:t>완료 기준</a:t>
-                      </a:r>
-                    </a:p>
-                  </a:txBody>
-                  <a:tcPr/>
-                </a:tc>
-              </a:tr>
-              <a:tr h="301752">
-                <a:tc>
-                  <a:txBody>
-                    <a:bodyPr/>
-                    <a:lstStyle/>
-                    <a:p>
-                      <a:r>
-                        <a:rPr sz="1100" b="0">
-                          <a:latin typeface="맑은 고딕"/>
-                        </a:rPr>
-                        <a:t>1 적용 확대</a:t>
-                      </a:r>
-                    </a:p>
-                  </a:txBody>
-                  <a:tcPr/>
-                </a:tc>
-                <a:tc>
-                  <a:txBody>
-                    <a:bodyPr/>
-                    <a:lstStyle/>
-                    <a:p>
-                      <a:r>
-                        <a:rPr sz="1100" b="0">
-                          <a:latin typeface="맑은 고딕"/>
-                        </a:rPr>
-                        <a:t>조회성 리포트 중심 세션 누적, 모듈별 DDIC 캐시 확보</a:t>
-                      </a:r>
-                    </a:p>
-                  </a:txBody>
-                  <a:tcPr/>
-                </a:tc>
-                <a:tc>
-                  <a:txBody>
-                    <a:bodyPr/>
-                    <a:lstStyle/>
-                    <a:p>
-                      <a:r>
-                        <a:rPr sz="1100" b="0">
-                          <a:latin typeface="맑은 고딕"/>
-                        </a:rPr>
-                        <a:t>세션 5건 이상</a:t>
-                      </a:r>
-                    </a:p>
-                  </a:txBody>
-                  <a:tcPr/>
-                </a:tc>
-              </a:tr>
-              <a:tr h="301752">
-                <a:tc>
-                  <a:txBody>
-                    <a:bodyPr/>
-                    <a:lstStyle/>
-                    <a:p>
-                      <a:r>
-                        <a:rPr sz="1100" b="0">
-                          <a:latin typeface="맑은 고딕"/>
-                        </a:rPr>
-                        <a:t>2 </a:t>
-                      </a:r>
-                      <a:r>
-                        <a:rPr sz="1100" b="1">
-                          <a:latin typeface="맑은 고딕"/>
-                        </a:rPr>
-                        <a:t>측정 체계</a:t>
-                      </a:r>
-                    </a:p>
-                  </a:txBody>
-                  <a:tcPr/>
-                </a:tc>
-                <a:tc>
-                  <a:txBody>
-                    <a:bodyPr/>
-                    <a:lstStyle/>
-                    <a:p>
-                      <a:r>
-                        <a:rPr sz="1100" b="0">
-                          <a:latin typeface="맑은 고딕"/>
-                        </a:rPr>
-                        <a:t>세션별 공수·재시도 횟수를 </a:t>
-                      </a:r>
-                      <a:r>
-                        <a:rPr sz="1100" b="0">
-                          <a:solidFill>
-                            <a:srgbClr val="8B2452"/>
-                          </a:solidFill>
-                          <a:latin typeface="Consolas"/>
-                        </a:rPr>
-                        <a:t>verify.md</a:t>
-                      </a:r>
-                      <a:r>
-                        <a:rPr sz="1100" b="0">
-                          <a:latin typeface="맑은 고딕"/>
-                        </a:rPr>
-                        <a:t> 표준 기록 항목화</a:t>
-                      </a:r>
-                    </a:p>
-                  </a:txBody>
-                  <a:tcPr/>
-                </a:tc>
-                <a:tc>
-                  <a:txBody>
-                    <a:bodyPr/>
-                    <a:lstStyle/>
-                    <a:p>
-                      <a:r>
-                        <a:rPr sz="1100" b="0">
-                          <a:latin typeface="맑은 고딕"/>
-                        </a:rPr>
-                        <a:t>정량 실측값 확보</a:t>
-                      </a:r>
-                    </a:p>
-                  </a:txBody>
-                  <a:tcPr/>
-                </a:tc>
-              </a:tr>
-              <a:tr h="301752">
-                <a:tc>
-                  <a:txBody>
-                    <a:bodyPr/>
-                    <a:lstStyle/>
-                    <a:p>
-                      <a:r>
-                        <a:rPr sz="1100" b="0">
-                          <a:latin typeface="맑은 고딕"/>
-                        </a:rPr>
-                        <a:t>3 유형 확장</a:t>
-                      </a:r>
-                    </a:p>
-                  </a:txBody>
-                  <a:tcPr/>
-                </a:tc>
-                <a:tc>
-                  <a:txBody>
-                    <a:bodyPr/>
-                    <a:lstStyle/>
-                    <a:p>
-                      <a:r>
-                        <a:rPr sz="1100" b="0">
-                          <a:latin typeface="맑은 고딕"/>
-                        </a:rPr>
-                        <a:t>Module Pool·Interface 등 코드 골격 추가</a:t>
-                      </a:r>
-                    </a:p>
-                  </a:txBody>
-                  <a:tcPr/>
-                </a:tc>
-                <a:tc>
-                  <a:txBody>
-                    <a:bodyPr/>
-                    <a:lstStyle/>
-                    <a:p>
-                      <a:r>
-                        <a:rPr sz="1100" b="0">
-                          <a:latin typeface="맑은 고딕"/>
-                        </a:rPr>
-                        <a:t>유형별 골격·규칙 보강</a:t>
-                      </a:r>
-                    </a:p>
-                  </a:txBody>
-                  <a:tcPr/>
-                </a:tc>
-              </a:tr>
-              <a:tr h="301752">
-                <a:tc>
-                  <a:txBody>
-                    <a:bodyPr/>
-                    <a:lstStyle/>
-                    <a:p>
-                      <a:r>
-                        <a:rPr sz="1100" b="0">
-                          <a:latin typeface="맑은 고딕"/>
-                        </a:rPr>
-                        <a:t>4 팀 확산</a:t>
-                      </a:r>
-                    </a:p>
-                  </a:txBody>
-                  <a:tcPr/>
-                </a:tc>
-                <a:tc>
-                  <a:txBody>
-                    <a:bodyPr/>
-                    <a:lstStyle/>
-                    <a:p>
-                      <a:r>
-                        <a:rPr sz="1100" b="0">
-                          <a:latin typeface="맑은 고딕"/>
-                        </a:rPr>
-                        <a:t>적용 가이드 공유, 패턴 공동 축적 운영</a:t>
-                      </a:r>
-                    </a:p>
-                  </a:txBody>
-                  <a:tcPr/>
-                </a:tc>
-                <a:tc>
-                  <a:txBody>
-                    <a:bodyPr/>
-                    <a:lstStyle/>
-                    <a:p>
-                      <a:r>
-                        <a:rPr sz="1100" b="0">
-                          <a:latin typeface="맑은 고딕"/>
-                        </a:rPr>
-                        <a:t>다수 담당자 사용, 패턴 20건</a:t>
-                      </a:r>
-                    </a:p>
-                  </a:txBody>
-                  <a:tcPr/>
-                </a:tc>
-              </a:tr>
-              <a:tr h="301752">
-                <a:tc>
-                  <a:txBody>
-                    <a:bodyPr/>
-                    <a:lstStyle/>
-                    <a:p>
-                      <a:r>
-                        <a:rPr sz="1100" b="0">
-                          <a:latin typeface="맑은 고딕"/>
-                        </a:rPr>
-                        <a:t>5 규칙 심화</a:t>
-                      </a:r>
-                    </a:p>
-                  </a:txBody>
-                  <a:tcPr/>
-                </a:tc>
-                <a:tc>
-                  <a:txBody>
-                    <a:bodyPr/>
-                    <a:lstStyle/>
-                    <a:p>
-                      <a:r>
-                        <a:rPr sz="1100" b="0">
-                          <a:latin typeface="맑은 고딕"/>
-                        </a:rPr>
-                        <a:t>운영 중 발생 오류를 규칙으로 승격, 성능 규칙 확대</a:t>
-                      </a:r>
-                    </a:p>
-                  </a:txBody>
-                  <a:tcPr/>
-                </a:tc>
-                <a:tc>
-                  <a:txBody>
-                    <a:bodyPr/>
-                    <a:lstStyle/>
-                    <a:p>
-                      <a:r>
-                        <a:rPr sz="1100" b="0">
-                          <a:latin typeface="맑은 고딕"/>
-                        </a:rPr>
-                        <a:t>규칙 25건 이상</a:t>
-                      </a:r>
-                    </a:p>
-                  </a:txBody>
-                  <a:tcPr/>
-                </a:tc>
-              </a:tr>
-            </a:tbl>
-          </a:graphicData>
-        </a:graphic>
-      </p:graphicFrame>
-      <p:sp>
-        <p:nvSpPr>
-          <p:cNvPr id="4" name="TextBox 3"/>
-          <p:cNvSpPr txBox="1"/>
-          <p:nvPr/>
-        </p:nvSpPr>
-        <p:spPr>
-          <a:xfrm>
-            <a:off x="640080" y="3182112"/>
-            <a:ext cx="10881360" cy="329184"/>
-          </a:xfrm>
-          <a:prstGeom prst="rect">
-            <a:avLst/>
-          </a:prstGeom>
-          <a:noFill/>
-        </p:spPr>
-        <p:txBody>
-          <a:bodyPr wrap="square">
-            <a:spAutoFit/>
-          </a:bodyPr>
-          <a:lstStyle/>
-          <a:p>
-            <a:r>
-              <a:rPr sz="1300" b="0">
-                <a:latin typeface="맑은 고딕"/>
-              </a:rPr>
-              <a:t>• </a:t>
-            </a:r>
-            <a:r>
-              <a:rPr sz="1300" b="1">
-                <a:latin typeface="맑은 고딕"/>
-              </a:rPr>
-              <a:t>2단계를 우선 과제로 설정</a:t>
-            </a:r>
-            <a:r>
-              <a:rPr sz="1300" b="0">
-                <a:latin typeface="맑은 고딕"/>
-              </a:rPr>
-              <a:t> — 공수 기록이 세션 산출물에 없어 현재는 사후 추정이 필요. 표준 기록 항목을 넣으면 이후 세션부터 절감 효과가 자동 집계됨</a:t>
-            </a:r>
-          </a:p>
-        </p:txBody>
-      </p:sp>
-    </p:spTree>
-  </p:cSld>
-  <p:clrMapOvr>
-    <a:masterClrMapping/>
-  </p:clrMapOvr>
-</p:sld>
-</file>
-
-<file path=ppt/slides/slide17.xml><?xml version="1.0" encoding="utf-8"?>
-<p:sld xmlns:a="http://schemas.openxmlformats.org/drawingml/2006/main" xmlns:p="http://schemas.openxmlformats.org/presentationml/2006/main" xmlns:r="http://schemas.openxmlformats.org/officeDocument/2006/relationships">
-  <p:cSld>
-    <p:spTree>
-      <p:nvGrpSpPr>
-        <p:cNvPr id="1" name=""/>
-        <p:cNvGrpSpPr/>
-        <p:nvPr/>
-      </p:nvGrpSpPr>
-      <p:grpSpPr/>
-      <p:sp>
-        <p:nvSpPr>
-          <p:cNvPr id="2" name="TextBox 1"/>
-          <p:cNvSpPr txBox="1"/>
-          <p:nvPr/>
-        </p:nvSpPr>
-        <p:spPr>
-          <a:xfrm>
-            <a:off x="548640" y="320040"/>
-            <a:ext cx="11064240" cy="822960"/>
-          </a:xfrm>
-          <a:prstGeom prst="rect">
-            <a:avLst/>
-          </a:prstGeom>
-          <a:noFill/>
-        </p:spPr>
-        <p:txBody>
-          <a:bodyPr wrap="square">
-            <a:spAutoFit/>
-          </a:bodyPr>
-          <a:lstStyle/>
-          <a:p>
-            <a:r>
-              <a:rPr sz="2400" b="1">
-                <a:solidFill>
-                  <a:srgbClr val="1F4E79"/>
-                </a:solidFill>
-                <a:latin typeface="맑은 고딕"/>
-              </a:rPr>
-              <a:t>15. 리스크와 대응</a:t>
+              <a:t>18. 리스크와 대응</a:t>
             </a:r>
           </a:p>
         </p:txBody>
@@ -5952,7 +8100,7 @@
 </p:sld>
 </file>
 
-<file path=ppt/slides/slide18.xml><?xml version="1.0" encoding="utf-8"?>
+<file path=ppt/slides/slide22.xml><?xml version="1.0" encoding="utf-8"?>
 <p:sld xmlns:a="http://schemas.openxmlformats.org/drawingml/2006/main" xmlns:p="http://schemas.openxmlformats.org/presentationml/2006/main" xmlns:r="http://schemas.openxmlformats.org/officeDocument/2006/relationships">
   <p:cSld>
     <p:spTree>
@@ -5991,7 +8139,7 @@
                 </a:solidFill>
                 <a:latin typeface="맑은 고딕"/>
               </a:rPr>
-              <a:t>16. 평가 기준 대응</a:t>
+              <a:t>19. 평가 기준 대응</a:t>
             </a:r>
           </a:p>
         </p:txBody>
@@ -6103,10 +8251,28 @@
                     <a:lstStyle/>
                     <a:p>
                       <a:r>
-                        <a:rPr sz="1100" b="0">
-                          <a:latin typeface="맑은 고딕"/>
-                        </a:rPr>
-                        <a:t>저장소 재현 가능 실측 7지표, 오류 감소 6지표, 절감 계산식 + 측정 양식</a:t>
+                        <a:rPr sz="1100" b="1">
+                          <a:latin typeface="맑은 고딕"/>
+                        </a:rPr>
+                        <a:t>주축</a:t>
+                      </a:r>
+                      <a:r>
+                        <a:rPr sz="1100" b="0">
+                          <a:latin typeface="맑은 고딕"/>
+                        </a:rPr>
+                        <a:t> AI 활용 정량 9지표(소스 156줄·테이블 6개·T1~T3·이관문서) + 절감 계산식·측정 양식 / </a:t>
+                      </a:r>
+                      <a:r>
+                        <a:rPr sz="1100" b="1">
+                          <a:latin typeface="맑은 고딕"/>
+                        </a:rPr>
+                        <a:t>보조축</a:t>
+                      </a:r>
+                      <a:r>
+                        <a:rPr sz="1100" b="0">
+                          <a:latin typeface="맑은 고딕"/>
+                        </a:rPr>
+                        <a:t> 가이드 효과 9지표 + 결함 발생률 2/2→0/3, 오류 감소 6지표</a:t>
                       </a:r>
                     </a:p>
                   </a:txBody>
@@ -6338,7 +8504,7 @@
 </p:sld>
 </file>
 
-<file path=ppt/slides/slide2.xml><?xml version="1.0" encoding="utf-8"?>
+<file path=ppt/slides/slide3.xml><?xml version="1.0" encoding="utf-8"?>
 <p:sld xmlns:a="http://schemas.openxmlformats.org/drawingml/2006/main" xmlns:p="http://schemas.openxmlformats.org/presentationml/2006/main" xmlns:r="http://schemas.openxmlformats.org/officeDocument/2006/relationships">
   <p:cSld>
     <p:spTree>
@@ -6377,7 +8543,7 @@
                 </a:solidFill>
                 <a:latin typeface="맑은 고딕"/>
               </a:rPr>
-              <a:t>요약 — 한 장으로 보는 결과</a:t>
+              <a:t>한 장 요약 — 두 축의 효과</a:t>
             </a:r>
           </a:p>
         </p:txBody>
@@ -6391,7 +8557,7 @@
         <p:spPr>
           <a:xfrm>
             <a:off x="640080" y="1234440"/>
-            <a:ext cx="10881360" cy="987552"/>
+            <a:ext cx="10881360" cy="329184"/>
           </a:xfrm>
           <a:prstGeom prst="rect">
             <a:avLst/>
@@ -6405,62 +8571,10 @@
           <a:lstStyle/>
           <a:p>
             <a:r>
-              <a:rPr sz="1300" b="0">
-                <a:latin typeface="맑은 고딕"/>
-              </a:rPr>
-              <a:t>• 문제: AI가 SAP에 접속할 수 없어, 테이블명 하나만 틀려도 활성화 실패 → 전량 재작업</a:t>
-            </a:r>
-          </a:p>
-          <a:p>
-            <a:r>
-              <a:rPr sz="1300" b="0">
-                <a:latin typeface="맑은 고딕"/>
-              </a:rPr>
-              <a:t>• 접근: AI에게 자유를 주는 대신 </a:t>
-            </a:r>
-            <a:r>
               <a:rPr sz="1300" b="1">
                 <a:latin typeface="맑은 고딕"/>
               </a:rPr>
-              <a:t>9개 게이트</a:t>
-            </a:r>
-            <a:r>
-              <a:rPr sz="1300" b="0">
-                <a:latin typeface="맑은 고딕"/>
-              </a:rPr>
-              <a:t>로 승인받고, 코드는 </a:t>
-            </a:r>
-            <a:r>
-              <a:rPr sz="1300" b="1">
-                <a:latin typeface="맑은 고딕"/>
-              </a:rPr>
-              <a:t>기계가 검사</a:t>
-            </a:r>
-            <a:r>
-              <a:rPr sz="1300" b="0">
-                <a:latin typeface="맑은 고딕"/>
-              </a:rPr>
-              <a:t>한 뒤 전달</a:t>
-            </a:r>
-          </a:p>
-          <a:p>
-            <a:r>
-              <a:rPr sz="1300" b="0">
-                <a:latin typeface="맑은 고딕"/>
-              </a:rPr>
-              <a:t>• 차별점: 한 번 겪은 오류를 </a:t>
-            </a:r>
-            <a:r>
-              <a:rPr sz="1300" b="1">
-                <a:latin typeface="맑은 고딕"/>
-              </a:rPr>
-              <a:t>패턴 → 점검 규칙 → 코드 골격</a:t>
-            </a:r>
-            <a:r>
-              <a:rPr sz="1300" b="0">
-                <a:latin typeface="맑은 고딕"/>
-              </a:rPr>
-              <a:t>으로 승격해 재발을 구조적으로 차단</a:t>
+              <a:t>주효과 (AI 활용)</a:t>
             </a:r>
           </a:p>
         </p:txBody>
@@ -6474,8 +8588,8 @@
           <p:nvPr/>
         </p:nvGraphicFramePr>
         <p:xfrm>
-          <a:off x="640080" y="2331720"/>
-          <a:ext cx="10881360" cy="2112264"/>
+          <a:off x="640080" y="1673352"/>
+          <a:ext cx="10881360" cy="1508760"/>
         </p:xfrm>
         <a:graphic>
           <a:graphicData uri="http://schemas.openxmlformats.org/drawingml/2006/table">
@@ -6561,22 +8675,34 @@
                         <a:rPr sz="1100" b="0">
                           <a:latin typeface="맑은 고딕"/>
                         </a:rPr>
-                        <a:t>활성화 품질</a:t>
-                      </a:r>
-                    </a:p>
-                  </a:txBody>
-                  <a:tcPr/>
-                </a:tc>
-                <a:tc>
-                  <a:txBody>
-                    <a:bodyPr/>
-                    <a:lstStyle/>
-                    <a:p>
-                      <a:r>
-                        <a:rPr sz="1100" b="0">
-                          <a:latin typeface="맑은 고딕"/>
-                        </a:rPr>
-                        <a:t>Syntax 오류 1건 → 0건, 테스트 T1~T3 전부 통과</a:t>
+                        <a:t>AI 생성 분량</a:t>
+                      </a:r>
+                    </a:p>
+                  </a:txBody>
+                  <a:tcPr/>
+                </a:tc>
+                <a:tc>
+                  <a:txBody>
+                    <a:bodyPr/>
+                    <a:lstStyle/>
+                    <a:p>
+                      <a:r>
+                        <a:rPr sz="1100" b="0">
+                          <a:latin typeface="맑은 고딕"/>
+                        </a:rPr>
+                        <a:t>ABAP </a:t>
+                      </a:r>
+                      <a:r>
+                        <a:rPr sz="1100" b="1">
+                          <a:latin typeface="맑은 고딕"/>
+                        </a:rPr>
+                        <a:t>156줄</a:t>
+                      </a:r>
+                      <a:r>
+                        <a:rPr sz="1100" b="0">
+                          <a:latin typeface="맑은 고딕"/>
+                        </a:rPr>
+                        <a:t>(실효 122줄) + 테스트 3건 + 이관 문서</a:t>
                       </a:r>
                     </a:p>
                   </a:txBody>
@@ -6593,22 +8719,34 @@
                         <a:rPr sz="1100" b="0">
                           <a:latin typeface="맑은 고딕"/>
                         </a:rPr>
-                        <a:t>자동 점검 도입 효과</a:t>
-                      </a:r>
-                    </a:p>
-                  </a:txBody>
-                  <a:tcPr/>
-                </a:tc>
-                <a:tc>
-                  <a:txBody>
-                    <a:bodyPr/>
-                    <a:lstStyle/>
-                    <a:p>
-                      <a:r>
-                        <a:rPr sz="1100" b="0">
-                          <a:latin typeface="맑은 고딕"/>
-                        </a:rPr>
-                        <a:t>기준 샘플 잠복 결함 1건 즉시 발견·수정</a:t>
+                        <a:t>착수 조건</a:t>
+                      </a:r>
+                    </a:p>
+                  </a:txBody>
+                  <a:tcPr/>
+                </a:tc>
+                <a:tc>
+                  <a:txBody>
+                    <a:bodyPr/>
+                    <a:lstStyle/>
+                    <a:p>
+                      <a:r>
+                        <a:rPr sz="1100" b="0">
+                          <a:latin typeface="맑은 고딕"/>
+                        </a:rPr>
+                        <a:t>테이블·빈도·권한 </a:t>
+                      </a:r>
+                      <a:r>
+                        <a:rPr sz="1100" b="1">
+                          <a:latin typeface="맑은 고딕"/>
+                        </a:rPr>
+                        <a:t>전부 `[모름]`</a:t>
+                      </a:r>
+                      <a:r>
+                        <a:rPr sz="1100" b="0">
+                          <a:latin typeface="맑은 고딕"/>
+                        </a:rPr>
+                        <a:t> 상태에서 완료</a:t>
                       </a:r>
                     </a:p>
                   </a:txBody>
@@ -6625,22 +8763,123 @@
                         <a:rPr sz="1100" b="0">
                           <a:latin typeface="맑은 고딕"/>
                         </a:rPr>
-                        <a:t>현재 코드 품질</a:t>
-                      </a:r>
-                    </a:p>
-                  </a:txBody>
-                  <a:tcPr/>
-                </a:tc>
-                <a:tc>
-                  <a:txBody>
-                    <a:bodyPr/>
-                    <a:lstStyle/>
-                    <a:p>
-                      <a:r>
-                        <a:rPr sz="1100" b="0">
-                          <a:latin typeface="맑은 고딕"/>
-                        </a:rPr>
-                        <a:t>ABAP 산출물 6개 전부 오류 0건 (CI 상시 검증)</a:t>
+                        <a:t>활성화 품질</a:t>
+                      </a:r>
+                    </a:p>
+                  </a:txBody>
+                  <a:tcPr/>
+                </a:tc>
+                <a:tc>
+                  <a:txBody>
+                    <a:bodyPr/>
+                    <a:lstStyle/>
+                    <a:p>
+                      <a:r>
+                        <a:rPr sz="1100" b="0">
+                          <a:latin typeface="맑은 고딕"/>
+                        </a:rPr>
+                        <a:t>실효 122줄 중 Syntax 오류 </a:t>
+                      </a:r>
+                      <a:r>
+                        <a:rPr sz="1100" b="1">
+                          <a:latin typeface="맑은 고딕"/>
+                        </a:rPr>
+                        <a:t>1건</a:t>
+                      </a:r>
+                      <a:r>
+                        <a:rPr sz="1100" b="0">
+                          <a:latin typeface="맑은 고딕"/>
+                        </a:rPr>
+                        <a:t> → 수정 후 0건</a:t>
+                      </a:r>
+                    </a:p>
+                  </a:txBody>
+                  <a:tcPr/>
+                </a:tc>
+              </a:tr>
+            </a:tbl>
+          </a:graphicData>
+        </a:graphic>
+      </p:graphicFrame>
+      <p:sp>
+        <p:nvSpPr>
+          <p:cNvPr id="5" name="TextBox 4"/>
+          <p:cNvSpPr txBox="1"/>
+          <p:nvPr/>
+        </p:nvSpPr>
+        <p:spPr>
+          <a:xfrm>
+            <a:off x="640080" y="3319272"/>
+            <a:ext cx="10881360" cy="329184"/>
+          </a:xfrm>
+          <a:prstGeom prst="rect">
+            <a:avLst/>
+          </a:prstGeom>
+          <a:noFill/>
+        </p:spPr>
+        <p:txBody>
+          <a:bodyPr wrap="square">
+            <a:spAutoFit/>
+          </a:bodyPr>
+          <a:lstStyle/>
+          <a:p>
+            <a:r>
+              <a:rPr sz="1300" b="1">
+                <a:latin typeface="맑은 고딕"/>
+              </a:rPr>
+              <a:t>부가효과 (저장소 가이드)</a:t>
+            </a:r>
+          </a:p>
+        </p:txBody>
+      </p:sp>
+      <p:graphicFrame>
+        <p:nvGraphicFramePr>
+          <p:cNvPr id="6" name="Table 5"/>
+          <p:cNvGraphicFramePr>
+            <a:graphicFrameLocks noGrp="1"/>
+          </p:cNvGraphicFramePr>
+          <p:nvPr/>
+        </p:nvGraphicFramePr>
+        <p:xfrm>
+          <a:off x="640080" y="3758184"/>
+          <a:ext cx="10881360" cy="1508760"/>
+        </p:xfrm>
+        <a:graphic>
+          <a:graphicData uri="http://schemas.openxmlformats.org/drawingml/2006/table">
+            <a:tbl>
+              <a:tblPr firstRow="1" bandRow="1">
+                <a:tableStyleId>{5C22544A-7EE6-4342-B048-85BDC9FD1C3A}</a:tableStyleId>
+              </a:tblPr>
+              <a:tblGrid>
+                <a:gridCol w="5440680"/>
+                <a:gridCol w="5440680"/>
+              </a:tblGrid>
+              <a:tr h="301752">
+                <a:tc>
+                  <a:txBody>
+                    <a:bodyPr/>
+                    <a:lstStyle/>
+                    <a:p>
+                      <a:r>
+                        <a:rPr sz="1100" b="1">
+                          <a:latin typeface="맑은 고딕"/>
+                        </a:rPr>
+                        <a:t>지표</a:t>
+                      </a:r>
+                    </a:p>
+                  </a:txBody>
+                  <a:tcPr/>
+                </a:tc>
+                <a:tc>
+                  <a:txBody>
+                    <a:bodyPr/>
+                    <a:lstStyle/>
+                    <a:p>
+                      <a:r>
+                        <a:rPr sz="1100" b="1">
+                          <a:latin typeface="맑은 고딕"/>
+                        </a:rPr>
+                        <a:t>결과</a:t>
                       </a:r>
                     </a:p>
                   </a:txBody>
@@ -6657,22 +8896,40 @@
                         <a:rPr sz="1100" b="0">
                           <a:latin typeface="맑은 고딕"/>
                         </a:rPr>
-                        <a:t>재발 방지 자산</a:t>
-                      </a:r>
-                    </a:p>
-                  </a:txBody>
-                  <a:tcPr/>
-                </a:tc>
-                <a:tc>
-                  <a:txBody>
-                    <a:bodyPr/>
-                    <a:lstStyle/>
-                    <a:p>
-                      <a:r>
-                        <a:rPr sz="1100" b="0">
-                          <a:latin typeface="맑은 고딕"/>
-                        </a:rPr>
-                        <a:t>오류 패턴 10건 · 점검 규칙 17건 · 코드 골격 3종</a:t>
+                        <a:t>결함 발생률</a:t>
+                      </a:r>
+                    </a:p>
+                  </a:txBody>
+                  <a:tcPr/>
+                </a:tc>
+                <a:tc>
+                  <a:txBody>
+                    <a:bodyPr/>
+                    <a:lstStyle/>
+                    <a:p>
+                      <a:r>
+                        <a:rPr sz="1100" b="0">
+                          <a:latin typeface="맑은 고딕"/>
+                        </a:rPr>
+                        <a:t>가이드 전 AI 산출물 </a:t>
+                      </a:r>
+                      <a:r>
+                        <a:rPr sz="1100" b="1">
+                          <a:latin typeface="맑은 고딕"/>
+                        </a:rPr>
+                        <a:t>2/2 결함</a:t>
+                      </a:r>
+                      <a:r>
+                        <a:rPr sz="1100" b="0">
+                          <a:latin typeface="맑은 고딕"/>
+                        </a:rPr>
+                        <a:t> → 골격 기반 </a:t>
+                      </a:r>
+                      <a:r>
+                        <a:rPr sz="1100" b="1">
+                          <a:latin typeface="맑은 고딕"/>
+                        </a:rPr>
+                        <a:t>0/3</a:t>
                       </a:r>
                     </a:p>
                   </a:txBody>
@@ -6689,28 +8946,104 @@
                         <a:rPr sz="1100" b="0">
                           <a:latin typeface="맑은 고딕"/>
                         </a:rPr>
-                        <a:t>점검 소요</a:t>
-                      </a:r>
-                    </a:p>
-                  </a:txBody>
-                  <a:tcPr/>
-                </a:tc>
-                <a:tc>
-                  <a:txBody>
-                    <a:bodyPr/>
-                    <a:lstStyle/>
-                    <a:p>
-                      <a:r>
-                        <a:rPr sz="1100" b="0">
-                          <a:latin typeface="맑은 고딕"/>
-                        </a:rPr>
-                        <a:t>수동 8항목 대조 → 명령 1회 </a:t>
+                        <a:t>품질 검증</a:t>
+                      </a:r>
+                    </a:p>
+                  </a:txBody>
+                  <a:tcPr/>
+                </a:tc>
+                <a:tc>
+                  <a:txBody>
+                    <a:bodyPr/>
+                    <a:lstStyle/>
+                    <a:p>
+                      <a:r>
+                        <a:rPr sz="1100" b="0">
+                          <a:latin typeface="맑은 고딕"/>
+                        </a:rPr>
+                        <a:t>수동 8항목 대조 → 명령 1회 17규칙 </a:t>
                       </a:r>
                       <a:r>
                         <a:rPr sz="1100" b="1">
                           <a:latin typeface="맑은 고딕"/>
                         </a:rPr>
                         <a:t>0.04초</a:t>
+                      </a:r>
+                    </a:p>
+                  </a:txBody>
+                  <a:tcPr/>
+                </a:tc>
+              </a:tr>
+              <a:tr h="301752">
+                <a:tc>
+                  <a:txBody>
+                    <a:bodyPr/>
+                    <a:lstStyle/>
+                    <a:p>
+                      <a:r>
+                        <a:rPr sz="1100" b="0">
+                          <a:latin typeface="맑은 고딕"/>
+                        </a:rPr>
+                        <a:t>요구사항 반영</a:t>
+                      </a:r>
+                    </a:p>
+                  </a:txBody>
+                  <a:tcPr/>
+                </a:tc>
+                <a:tc>
+                  <a:txBody>
+                    <a:bodyPr/>
+                    <a:lstStyle/>
+                    <a:p>
+                      <a:r>
+                        <a:rPr sz="1100" b="0">
+                          <a:latin typeface="맑은 고딕"/>
+                        </a:rPr>
+                        <a:t>화면 목업을 </a:t>
+                      </a:r>
+                      <a:r>
+                        <a:rPr sz="1100" b="1">
+                          <a:latin typeface="맑은 고딕"/>
+                        </a:rPr>
+                        <a:t>코드 생성 전</a:t>
+                      </a:r>
+                      <a:r>
+                        <a:rPr sz="1100" b="0">
+                          <a:latin typeface="맑은 고딕"/>
+                        </a:rPr>
+                        <a:t> 컨펌 (1차 반려 → 교정)</a:t>
+                      </a:r>
+                    </a:p>
+                  </a:txBody>
+                  <a:tcPr/>
+                </a:tc>
+              </a:tr>
+              <a:tr h="301752">
+                <a:tc>
+                  <a:txBody>
+                    <a:bodyPr/>
+                    <a:lstStyle/>
+                    <a:p>
+                      <a:r>
+                        <a:rPr sz="1100" b="0">
+                          <a:latin typeface="맑은 고딕"/>
+                        </a:rPr>
+                        <a:t>재발 방지 자산</a:t>
+                      </a:r>
+                    </a:p>
+                  </a:txBody>
+                  <a:tcPr/>
+                </a:tc>
+                <a:tc>
+                  <a:txBody>
+                    <a:bodyPr/>
+                    <a:lstStyle/>
+                    <a:p>
+                      <a:r>
+                        <a:rPr sz="1100" b="0">
+                          <a:latin typeface="맑은 고딕"/>
+                        </a:rPr>
+                        <a:t>오류 패턴 10건 · 점검 규칙 17건 · 코드 골격 3종</a:t>
                       </a:r>
                     </a:p>
                   </a:txBody>
@@ -6729,7 +9062,7 @@
 </p:sld>
 </file>
 
-<file path=ppt/slides/slide3.xml><?xml version="1.0" encoding="utf-8"?>
+<file path=ppt/slides/slide4.xml><?xml version="1.0" encoding="utf-8"?>
 <p:sld xmlns:a="http://schemas.openxmlformats.org/drawingml/2006/main" xmlns:p="http://schemas.openxmlformats.org/presentationml/2006/main" xmlns:r="http://schemas.openxmlformats.org/officeDocument/2006/relationships">
   <p:cSld>
     <p:spTree>
@@ -7141,7 +9474,7 @@
 </p:sld>
 </file>
 
-<file path=ppt/slides/slide4.xml><?xml version="1.0" encoding="utf-8"?>
+<file path=ppt/slides/slide5.xml><?xml version="1.0" encoding="utf-8"?>
 <p:sld xmlns:a="http://schemas.openxmlformats.org/drawingml/2006/main" xmlns:p="http://schemas.openxmlformats.org/presentationml/2006/main" xmlns:r="http://schemas.openxmlformats.org/officeDocument/2006/relationships">
   <p:cSld>
     <p:spTree>
@@ -7180,7 +9513,7 @@
                 </a:solidFill>
                 <a:latin typeface="맑은 고딕"/>
               </a:rPr>
-              <a:t>2. 추진 배경 — 일반 바이브 코딩이 통하지 않는 이유</a:t>
+              <a:t>2. 추진 배경 ① — 왜 AI를 도입했는가</a:t>
             </a:r>
           </a:p>
         </p:txBody>
@@ -7194,7 +9527,7 @@
         <p:spPr>
           <a:xfrm>
             <a:off x="640080" y="1234440"/>
-            <a:ext cx="10881360" cy="1316736"/>
+            <a:ext cx="10881360" cy="1975104"/>
           </a:xfrm>
           <a:prstGeom prst="rect">
             <a:avLst/>
@@ -7211,79 +9544,104 @@
               <a:rPr sz="1300" b="0">
                 <a:latin typeface="맑은 고딕"/>
               </a:rPr>
-              <a:t>• </a:t>
+              <a:t>• 조회성 리포트 1건에 담당자가 </a:t>
             </a:r>
             <a:r>
               <a:rPr sz="1300" b="1">
                 <a:latin typeface="맑은 고딕"/>
               </a:rPr>
-              <a:t>AI가 시스템을 볼 수 없다</a:t>
-            </a:r>
-            <a:r>
-              <a:rPr sz="1300" b="0">
-                <a:latin typeface="맑은 고딕"/>
-              </a:rPr>
-              <a:t> — 접속·실행·디버깅 불가. 사람이 SE38에 손으로 옮겨 활성화</a:t>
-            </a:r>
-          </a:p>
-          <a:p>
-            <a:r>
-              <a:rPr sz="1300" b="0">
-                <a:latin typeface="맑은 고딕"/>
-              </a:rPr>
-              <a:t>• </a:t>
+              <a:t>요구사항~코드~테스트~이관</a:t>
+            </a:r>
+            <a:r>
+              <a:rPr sz="1300" b="0">
+                <a:latin typeface="맑은 고딕"/>
+              </a:rPr>
+              <a:t> 전 과정을 혼자 수행</a:t>
+            </a:r>
+          </a:p>
+          <a:p>
+            <a:r>
+              <a:rPr sz="1300" b="0">
+                <a:latin typeface="맑은 고딕"/>
+              </a:rPr>
+              <a:t>• 그중 상당 부분은 창의적 판단이 아닌 </a:t>
             </a:r>
             <a:r>
               <a:rPr sz="1300" b="1">
                 <a:latin typeface="맑은 고딕"/>
               </a:rPr>
-              <a:t>DDIC 환각이 치명적</a:t>
-            </a:r>
-            <a:r>
-              <a:rPr sz="1300" b="0">
-                <a:latin typeface="맑은 고딕"/>
-              </a:rPr>
-              <a:t> — 필드명 하나를 지어내면 활성화 실패 → 오류 회수·수정·재복붙 왕복</a:t>
-            </a:r>
-          </a:p>
-          <a:p>
-            <a:r>
-              <a:rPr sz="1300" b="0">
-                <a:latin typeface="맑은 고딕"/>
-              </a:rPr>
-              <a:t>• </a:t>
+              <a:t>정형 반복 작업</a:t>
+            </a:r>
+          </a:p>
+          <a:p>
+            <a:r>
+              <a:rPr sz="1300" b="0">
+                <a:latin typeface="맑은 고딕"/>
+              </a:rPr>
+              <a:t>· ALV 뼈대, 선택화면 검증 로직, </a:t>
+            </a:r>
+            <a:r>
+              <a:rPr sz="1300" b="0">
+                <a:solidFill>
+                  <a:srgbClr val="8B2452"/>
+                </a:solidFill>
+                <a:latin typeface="Consolas"/>
+              </a:rPr>
+              <a:t>SY-SUBRC</a:t>
+            </a:r>
+            <a:r>
+              <a:rPr sz="1300" b="0">
+                <a:latin typeface="맑은 고딕"/>
+              </a:rPr>
+              <a:t> 처리, 엑셀 다운로드는 프로그램마다 거의 동일</a:t>
+            </a:r>
+          </a:p>
+          <a:p>
+            <a:r>
+              <a:rPr sz="1300" b="0">
+                <a:latin typeface="맑은 고딕"/>
+              </a:rPr>
+              <a:t>• 더 큰 문제는 </a:t>
             </a:r>
             <a:r>
               <a:rPr sz="1300" b="1">
                 <a:latin typeface="맑은 고딕"/>
               </a:rPr>
-              <a:t>릴리스별 문법 차이</a:t>
-            </a:r>
-            <a:r>
-              <a:rPr sz="1300" b="0">
-                <a:latin typeface="맑은 고딕"/>
-              </a:rPr>
-              <a:t> — ECC 6.0 / NW 7.40 / 7.50 / S4에서 쓸 수 있는 문법이 다름</a:t>
-            </a:r>
-          </a:p>
-          <a:p>
-            <a:r>
-              <a:rPr sz="1300" b="0">
-                <a:latin typeface="맑은 고딕"/>
-              </a:rPr>
-              <a:t>• </a:t>
+              <a:t>착수 자체가 막히는 것</a:t>
+            </a:r>
+          </a:p>
+          <a:p>
+            <a:r>
+              <a:rPr sz="1300" b="0">
+                <a:latin typeface="맑은 고딕"/>
+              </a:rPr>
+              <a:t>· 실전 1호: 담당자가 </a:t>
             </a:r>
             <a:r>
               <a:rPr sz="1300" b="1">
                 <a:latin typeface="맑은 고딕"/>
               </a:rPr>
-              <a:t>요구사항 오해가 늦게 드러남</a:t>
-            </a:r>
-            <a:r>
-              <a:rPr sz="1300" b="0">
-                <a:latin typeface="맑은 고딕"/>
-              </a:rPr>
-              <a:t> — 코드 완성 후 "원하던 화면이 아니다" → 설계부터 재작업</a:t>
+              <a:t>어떤 테이블을 써야 하는지 몰랐음</a:t>
+            </a:r>
+          </a:p>
+          <a:p>
+            <a:r>
+              <a:rPr sz="1300" b="0">
+                <a:latin typeface="맑은 고딕"/>
+              </a:rPr>
+              <a:t>· 수작업이면 SE11·업무 문서 </a:t>
+            </a:r>
+            <a:r>
+              <a:rPr sz="1300" b="1">
+                <a:latin typeface="맑은 고딕"/>
+              </a:rPr>
+              <a:t>조사를 끝낸 뒤</a:t>
+            </a:r>
+            <a:r>
+              <a:rPr sz="1300" b="0">
+                <a:latin typeface="맑은 고딕"/>
+              </a:rPr>
+              <a:t>에야 코딩 진입 가능</a:t>
             </a:r>
           </a:p>
         </p:txBody>
@@ -7296,7 +9654,7 @@
         </p:nvSpPr>
         <p:spPr>
           <a:xfrm>
-            <a:off x="640080" y="2660904"/>
+            <a:off x="640080" y="3319272"/>
             <a:ext cx="10881360" cy="329184"/>
           </a:xfrm>
           <a:prstGeom prst="rect">
@@ -7317,7 +9675,7 @@
                 </a:solidFill>
                 <a:latin typeface="맑은 고딕"/>
               </a:rPr>
-              <a:t>핵심 질문은 "AI가 코드를 잘 쓰는가"가 아니라 </a:t>
+              <a:t>AI는 이 조사 단계를 </a:t>
             </a:r>
             <a:r>
               <a:rPr sz="1300" b="1" i="1">
@@ -7326,295 +9684,20 @@
                 </a:solidFill>
                 <a:latin typeface="맑은 고딕"/>
               </a:rPr>
-              <a:t>"한 번에 활성화되는 코드가 나오는가"</a:t>
-            </a:r>
-          </a:p>
-        </p:txBody>
-      </p:sp>
-    </p:spTree>
-  </p:cSld>
-  <p:clrMapOvr>
-    <a:masterClrMapping/>
-  </p:clrMapOvr>
-</p:sld>
-</file>
-
-<file path=ppt/slides/slide5.xml><?xml version="1.0" encoding="utf-8"?>
-<p:sld xmlns:a="http://schemas.openxmlformats.org/drawingml/2006/main" xmlns:p="http://schemas.openxmlformats.org/presentationml/2006/main" xmlns:r="http://schemas.openxmlformats.org/officeDocument/2006/relationships">
-  <p:cSld>
-    <p:spTree>
-      <p:nvGrpSpPr>
-        <p:cNvPr id="1" name=""/>
-        <p:cNvGrpSpPr/>
-        <p:nvPr/>
-      </p:nvGrpSpPr>
-      <p:grpSpPr/>
-      <p:sp>
-        <p:nvSpPr>
-          <p:cNvPr id="2" name="TextBox 1"/>
-          <p:cNvSpPr txBox="1"/>
-          <p:nvPr/>
-        </p:nvSpPr>
-        <p:spPr>
-          <a:xfrm>
-            <a:off x="548640" y="320040"/>
-            <a:ext cx="11064240" cy="822960"/>
-          </a:xfrm>
-          <a:prstGeom prst="rect">
-            <a:avLst/>
-          </a:prstGeom>
-          <a:noFill/>
-        </p:spPr>
-        <p:txBody>
-          <a:bodyPr wrap="square">
-            <a:spAutoFit/>
-          </a:bodyPr>
-          <a:lstStyle/>
-          <a:p>
-            <a:r>
-              <a:rPr sz="2400" b="1">
+              <a:t>"후보 제안 + 담당자 확인"</a:t>
+            </a:r>
+            <a:r>
+              <a:rPr sz="1300" b="0" i="1">
                 <a:solidFill>
-                  <a:srgbClr val="1F4E79"/>
+                  <a:srgbClr val="595959"/>
                 </a:solidFill>
                 <a:latin typeface="맑은 고딕"/>
               </a:rPr>
-              <a:t>3. 기존 업무 방식 — 구조적 문제</a:t>
-            </a:r>
-          </a:p>
-        </p:txBody>
-      </p:sp>
-      <p:sp>
-        <p:nvSpPr>
-          <p:cNvPr id="3" name="TextBox 2"/>
-          <p:cNvSpPr txBox="1"/>
-          <p:nvPr/>
-        </p:nvSpPr>
-        <p:spPr>
-          <a:xfrm>
-            <a:off x="640080" y="1234440"/>
-            <a:ext cx="10881360" cy="1316736"/>
-          </a:xfrm>
-          <a:prstGeom prst="rect">
-            <a:avLst/>
-          </a:prstGeom>
-          <a:noFill/>
-        </p:spPr>
-        <p:txBody>
-          <a:bodyPr wrap="square">
-            <a:spAutoFit/>
-          </a:bodyPr>
-          <a:lstStyle/>
-          <a:p>
-            <a:r>
-              <a:rPr sz="1300" b="0">
-                <a:latin typeface="맑은 고딕"/>
-              </a:rPr>
-              <a:t>• </a:t>
-            </a:r>
-            <a:r>
-              <a:rPr sz="1300" b="1">
-                <a:latin typeface="맑은 고딕"/>
-              </a:rPr>
-              <a:t>요구사항이 말로만 오간다</a:t>
-            </a:r>
-            <a:r>
-              <a:rPr sz="1300" b="0">
-                <a:latin typeface="맑은 고딕"/>
-              </a:rPr>
-              <a:t> — 머릿속 화면이 틀렸다는 사실은 코드가 나온 뒤 드러남</a:t>
-            </a:r>
-          </a:p>
-          <a:p>
-            <a:r>
-              <a:rPr sz="1300" b="0">
-                <a:latin typeface="맑은 고딕"/>
-              </a:rPr>
-              <a:t>• </a:t>
-            </a:r>
-            <a:r>
-              <a:rPr sz="1300" b="1">
-                <a:latin typeface="맑은 고딕"/>
-              </a:rPr>
-              <a:t>테이블 확인이 매번 처음부터</a:t>
-            </a:r>
-            <a:r>
-              <a:rPr sz="1300" b="0">
-                <a:latin typeface="맑은 고딕"/>
-              </a:rPr>
-              <a:t> — 같은 테이블도 SE11을 다시 열어 받아 적음</a:t>
-            </a:r>
-          </a:p>
-          <a:p>
-            <a:r>
-              <a:rPr sz="1300" b="0">
-                <a:latin typeface="맑은 고딕"/>
-              </a:rPr>
-              <a:t>• </a:t>
-            </a:r>
-            <a:r>
-              <a:rPr sz="1300" b="1">
-                <a:latin typeface="맑은 고딕"/>
-              </a:rPr>
-              <a:t>코드 품질이 담당자 기억에 의존</a:t>
-            </a:r>
-            <a:r>
-              <a:rPr sz="1300" b="0">
-                <a:latin typeface="맑은 고딕"/>
-              </a:rPr>
-              <a:t> — </a:t>
-            </a:r>
-            <a:r>
-              <a:rPr sz="1300" b="0">
-                <a:solidFill>
-                  <a:srgbClr val="8B2452"/>
-                </a:solidFill>
-                <a:latin typeface="Consolas"/>
-              </a:rPr>
-              <a:t>SELECT *</a:t>
-            </a:r>
-            <a:r>
-              <a:rPr sz="1300" b="0">
-                <a:latin typeface="맑은 고딕"/>
-              </a:rPr>
-              <a:t> 금지, </a:t>
-            </a:r>
-            <a:r>
-              <a:rPr sz="1300" b="0">
-                <a:solidFill>
-                  <a:srgbClr val="8B2452"/>
-                </a:solidFill>
-                <a:latin typeface="Consolas"/>
-              </a:rPr>
-              <a:t>SY-SUBRC</a:t>
-            </a:r>
-            <a:r>
-              <a:rPr sz="1300" b="0">
-                <a:latin typeface="맑은 고딕"/>
-              </a:rPr>
-              <a:t> 확인 등이 바쁠 때 빠짐</a:t>
-            </a:r>
-          </a:p>
-          <a:p>
-            <a:r>
-              <a:rPr sz="1300" b="0">
-                <a:latin typeface="맑은 고딕"/>
-              </a:rPr>
-              <a:t>• </a:t>
-            </a:r>
-            <a:r>
-              <a:rPr sz="1300" b="1">
-                <a:latin typeface="맑은 고딕"/>
-              </a:rPr>
-              <a:t>같은 오류를 반복</a:t>
-            </a:r>
-            <a:r>
-              <a:rPr sz="1300" b="0">
-                <a:latin typeface="맑은 고딕"/>
-              </a:rPr>
-              <a:t> — 해결책이 개인 경험으로만 남아 다른 사람이 같은 함정에 빠짐</a:t>
-            </a:r>
-          </a:p>
-        </p:txBody>
-      </p:sp>
-      <p:graphicFrame>
-        <p:nvGraphicFramePr>
-          <p:cNvPr id="4" name="Table 3"/>
-          <p:cNvGraphicFramePr>
-            <a:graphicFrameLocks noGrp="1"/>
-          </p:cNvGraphicFramePr>
-          <p:nvPr/>
-        </p:nvGraphicFramePr>
-        <p:xfrm>
-          <a:off x="640080" y="2660904"/>
-          <a:ext cx="10881360" cy="603504"/>
-        </p:xfrm>
-        <a:graphic>
-          <a:graphicData uri="http://schemas.openxmlformats.org/drawingml/2006/table">
-            <a:tbl>
-              <a:tblPr firstRow="1" bandRow="1">
-                <a:tableStyleId>{5C22544A-7EE6-4342-B048-85BDC9FD1C3A}</a:tableStyleId>
-              </a:tblPr>
-              <a:tblGrid>
-                <a:gridCol w="5440680"/>
-                <a:gridCol w="5440680"/>
-              </a:tblGrid>
-              <a:tr h="301752">
-                <a:tc>
-                  <a:txBody>
-                    <a:bodyPr/>
-                    <a:lstStyle/>
-                    <a:p>
-                      <a:r>
-                        <a:rPr sz="1100" b="1">
-                          <a:latin typeface="맑은 고딕"/>
-                        </a:rPr>
-                        <a:t>항목</a:t>
-                      </a:r>
-                    </a:p>
-                  </a:txBody>
-                  <a:tcPr/>
-                </a:tc>
-                <a:tc>
-                  <a:txBody>
-                    <a:bodyPr/>
-                    <a:lstStyle/>
-                    <a:p>
-                      <a:r>
-                        <a:rPr sz="1100" b="1">
-                          <a:latin typeface="맑은 고딕"/>
-                        </a:rPr>
-                        <a:t>값</a:t>
-                      </a:r>
-                    </a:p>
-                  </a:txBody>
-                  <a:tcPr/>
-                </a:tc>
-              </a:tr>
-              <a:tr h="301752">
-                <a:tc>
-                  <a:txBody>
-                    <a:bodyPr/>
-                    <a:lstStyle/>
-                    <a:p>
-                      <a:r>
-                        <a:rPr sz="1100" b="0">
-                          <a:latin typeface="맑은 고딕"/>
-                        </a:rPr>
-                        <a:t>담당자 / 빈도 / 1건 공수</a:t>
-                      </a:r>
-                    </a:p>
-                  </a:txBody>
-                  <a:tcPr/>
-                </a:tc>
-                <a:tc>
-                  <a:txBody>
-                    <a:bodyPr/>
-                    <a:lstStyle/>
-                    <a:p>
-                      <a:r>
-                        <a:rPr sz="1100" b="0">
-                          <a:latin typeface="맑은 고딕"/>
-                        </a:rPr>
-                        <a:t>[실측 기입] — 측정 양식: </a:t>
-                      </a:r>
-                      <a:r>
-                        <a:rPr sz="1100" b="0">
-                          <a:solidFill>
-                            <a:srgbClr val="8B2452"/>
-                          </a:solidFill>
-                          <a:latin typeface="Consolas"/>
-                        </a:rPr>
-                        <a:t>report/effect-worksheet.md</a:t>
-                      </a:r>
-                    </a:p>
-                  </a:txBody>
-                  <a:tcPr/>
-                </a:tc>
-              </a:tr>
-            </a:tbl>
-          </a:graphicData>
-        </a:graphic>
-      </p:graphicFrame>
+              <a:t> 으로 단축 → AI 도입의 1차 동기</a:t>
+            </a:r>
+          </a:p>
+        </p:txBody>
+      </p:sp>
     </p:spTree>
   </p:cSld>
   <p:clrMapOvr>
@@ -7662,7 +9745,803 @@
                 </a:solidFill>
                 <a:latin typeface="맑은 고딕"/>
               </a:rPr>
-              <a:t>4. 실패 비용 구조 — 게이트를 앞단에 집중시킨 이유</a:t>
+              <a:t>3. 추진 배경 ② — 왜 저장소 가이드가 필요한가</a:t>
+            </a:r>
+          </a:p>
+        </p:txBody>
+      </p:sp>
+      <p:sp>
+        <p:nvSpPr>
+          <p:cNvPr id="3" name="TextBox 2"/>
+          <p:cNvSpPr txBox="1"/>
+          <p:nvPr/>
+        </p:nvSpPr>
+        <p:spPr>
+          <a:xfrm>
+            <a:off x="640080" y="1234440"/>
+            <a:ext cx="10881360" cy="329184"/>
+          </a:xfrm>
+          <a:prstGeom prst="rect">
+            <a:avLst/>
+          </a:prstGeom>
+          <a:noFill/>
+        </p:spPr>
+        <p:txBody>
+          <a:bodyPr wrap="square">
+            <a:spAutoFit/>
+          </a:bodyPr>
+          <a:lstStyle/>
+          <a:p>
+            <a:r>
+              <a:rPr sz="1300" b="0">
+                <a:latin typeface="맑은 고딕"/>
+              </a:rPr>
+              <a:t>SAP GUI 환경에서는 AI를 그대로 쓰면 효과가 깎입니다.</a:t>
+            </a:r>
+          </a:p>
+        </p:txBody>
+      </p:sp>
+      <p:sp>
+        <p:nvSpPr>
+          <p:cNvPr id="4" name="TextBox 3"/>
+          <p:cNvSpPr txBox="1"/>
+          <p:nvPr/>
+        </p:nvSpPr>
+        <p:spPr>
+          <a:xfrm>
+            <a:off x="640080" y="1673352"/>
+            <a:ext cx="10881360" cy="1316736"/>
+          </a:xfrm>
+          <a:prstGeom prst="rect">
+            <a:avLst/>
+          </a:prstGeom>
+          <a:noFill/>
+        </p:spPr>
+        <p:txBody>
+          <a:bodyPr wrap="square">
+            <a:spAutoFit/>
+          </a:bodyPr>
+          <a:lstStyle/>
+          <a:p>
+            <a:r>
+              <a:rPr sz="1300" b="0">
+                <a:latin typeface="맑은 고딕"/>
+              </a:rPr>
+              <a:t>• </a:t>
+            </a:r>
+            <a:r>
+              <a:rPr sz="1300" b="1">
+                <a:latin typeface="맑은 고딕"/>
+              </a:rPr>
+              <a:t>AI가 시스템을 볼 수 없다</a:t>
+            </a:r>
+            <a:r>
+              <a:rPr sz="1300" b="0">
+                <a:latin typeface="맑은 고딕"/>
+              </a:rPr>
+              <a:t> — 접속·실행·디버깅 불가. 사람이 SE38에 손으로 옮겨 활성화</a:t>
+            </a:r>
+          </a:p>
+          <a:p>
+            <a:r>
+              <a:rPr sz="1300" b="0">
+                <a:latin typeface="맑은 고딕"/>
+              </a:rPr>
+              <a:t>• </a:t>
+            </a:r>
+            <a:r>
+              <a:rPr sz="1300" b="1">
+                <a:latin typeface="맑은 고딕"/>
+              </a:rPr>
+              <a:t>DDIC 환각이 치명적</a:t>
+            </a:r>
+            <a:r>
+              <a:rPr sz="1300" b="0">
+                <a:latin typeface="맑은 고딕"/>
+              </a:rPr>
+              <a:t> — 필드명 하나를 지어내면 활성화 실패 → 오류 회수·수정·재복붙 왕복</a:t>
+            </a:r>
+          </a:p>
+          <a:p>
+            <a:r>
+              <a:rPr sz="1300" b="0">
+                <a:latin typeface="맑은 고딕"/>
+              </a:rPr>
+              <a:t>• </a:t>
+            </a:r>
+            <a:r>
+              <a:rPr sz="1300" b="1">
+                <a:latin typeface="맑은 고딕"/>
+              </a:rPr>
+              <a:t>릴리스별 문법 차이</a:t>
+            </a:r>
+            <a:r>
+              <a:rPr sz="1300" b="0">
+                <a:latin typeface="맑은 고딕"/>
+              </a:rPr>
+              <a:t> — ECC 6.0 / NW 7.40 / 7.50 / S4에서 쓸 수 있는 문법이 다름</a:t>
+            </a:r>
+          </a:p>
+          <a:p>
+            <a:r>
+              <a:rPr sz="1300" b="0">
+                <a:latin typeface="맑은 고딕"/>
+              </a:rPr>
+              <a:t>• </a:t>
+            </a:r>
+            <a:r>
+              <a:rPr sz="1300" b="1">
+                <a:latin typeface="맑은 고딕"/>
+              </a:rPr>
+              <a:t>요구사항 오해가 늦게 드러남</a:t>
+            </a:r>
+            <a:r>
+              <a:rPr sz="1300" b="0">
+                <a:latin typeface="맑은 고딕"/>
+              </a:rPr>
+              <a:t> — 코드 완성 후 "원하던 화면이 아니다" → 설계부터 재작업</a:t>
+            </a:r>
+          </a:p>
+        </p:txBody>
+      </p:sp>
+      <p:sp>
+        <p:nvSpPr>
+          <p:cNvPr id="5" name="TextBox 4"/>
+          <p:cNvSpPr txBox="1"/>
+          <p:nvPr/>
+        </p:nvSpPr>
+        <p:spPr>
+          <a:xfrm>
+            <a:off x="640080" y="3099816"/>
+            <a:ext cx="10881360" cy="329184"/>
+          </a:xfrm>
+          <a:prstGeom prst="rect">
+            <a:avLst/>
+          </a:prstGeom>
+          <a:noFill/>
+        </p:spPr>
+        <p:txBody>
+          <a:bodyPr wrap="square">
+            <a:spAutoFit/>
+          </a:bodyPr>
+          <a:lstStyle/>
+          <a:p>
+            <a:r>
+              <a:rPr sz="1300" b="0" i="1">
+                <a:solidFill>
+                  <a:srgbClr val="595959"/>
+                </a:solidFill>
+                <a:latin typeface="맑은 고딕"/>
+              </a:rPr>
+              <a:t>핵심 질문은 "AI가 코드를 잘 쓰는가"가 아니라 </a:t>
+            </a:r>
+            <a:r>
+              <a:rPr sz="1300" b="1" i="1">
+                <a:solidFill>
+                  <a:srgbClr val="595959"/>
+                </a:solidFill>
+                <a:latin typeface="맑은 고딕"/>
+              </a:rPr>
+              <a:t>"한 번에 활성화되는 코드가 나오는가"</a:t>
+            </a:r>
+            <a:r>
+              <a:rPr sz="1300" b="0" i="1">
+                <a:solidFill>
+                  <a:srgbClr val="595959"/>
+                </a:solidFill>
+                <a:latin typeface="맑은 고딕"/>
+              </a:rPr>
+              <a:t> → 이 제약을 방치하면 복붙 왕복이 늘어 </a:t>
+            </a:r>
+            <a:r>
+              <a:rPr sz="1300" b="1" i="1">
+                <a:solidFill>
+                  <a:srgbClr val="595959"/>
+                </a:solidFill>
+                <a:latin typeface="맑은 고딕"/>
+              </a:rPr>
+              <a:t>AI 도입 효과가 상쇄됨</a:t>
+            </a:r>
+          </a:p>
+        </p:txBody>
+      </p:sp>
+    </p:spTree>
+  </p:cSld>
+  <p:clrMapOvr>
+    <a:masterClrMapping/>
+  </p:clrMapOvr>
+</p:sld>
+</file>
+
+<file path=ppt/slides/slide7.xml><?xml version="1.0" encoding="utf-8"?>
+<p:sld xmlns:a="http://schemas.openxmlformats.org/drawingml/2006/main" xmlns:p="http://schemas.openxmlformats.org/presentationml/2006/main" xmlns:r="http://schemas.openxmlformats.org/officeDocument/2006/relationships">
+  <p:cSld>
+    <p:spTree>
+      <p:nvGrpSpPr>
+        <p:cNvPr id="1" name=""/>
+        <p:cNvGrpSpPr/>
+        <p:nvPr/>
+      </p:nvGrpSpPr>
+      <p:grpSpPr/>
+      <p:sp>
+        <p:nvSpPr>
+          <p:cNvPr id="2" name="TextBox 1"/>
+          <p:cNvSpPr txBox="1"/>
+          <p:nvPr/>
+        </p:nvSpPr>
+        <p:spPr>
+          <a:xfrm>
+            <a:off x="548640" y="320040"/>
+            <a:ext cx="11064240" cy="822960"/>
+          </a:xfrm>
+          <a:prstGeom prst="rect">
+            <a:avLst/>
+          </a:prstGeom>
+          <a:noFill/>
+        </p:spPr>
+        <p:txBody>
+          <a:bodyPr wrap="square">
+            <a:spAutoFit/>
+          </a:bodyPr>
+          <a:lstStyle/>
+          <a:p>
+            <a:r>
+              <a:rPr sz="2400" b="1">
+                <a:solidFill>
+                  <a:srgbClr val="1F4E79"/>
+                </a:solidFill>
+                <a:latin typeface="맑은 고딕"/>
+              </a:rPr>
+              <a:t>4. 기존 업무 방식 — AI 미활용 (As-Is)</a:t>
+            </a:r>
+          </a:p>
+        </p:txBody>
+      </p:sp>
+      <p:sp>
+        <p:nvSpPr>
+          <p:cNvPr id="3" name="TextBox 2"/>
+          <p:cNvSpPr txBox="1"/>
+          <p:nvPr/>
+        </p:nvSpPr>
+        <p:spPr>
+          <a:xfrm>
+            <a:off x="640080" y="1234440"/>
+            <a:ext cx="10881360" cy="329184"/>
+          </a:xfrm>
+          <a:prstGeom prst="rect">
+            <a:avLst/>
+          </a:prstGeom>
+          <a:noFill/>
+        </p:spPr>
+        <p:txBody>
+          <a:bodyPr wrap="square">
+            <a:spAutoFit/>
+          </a:bodyPr>
+          <a:lstStyle/>
+          <a:p>
+            <a:r>
+              <a:rPr sz="1300" b="0">
+                <a:latin typeface="맑은 고딕"/>
+              </a:rPr>
+              <a:t>기준선은 </a:t>
+            </a:r>
+            <a:r>
+              <a:rPr sz="1300" b="1">
+                <a:latin typeface="맑은 고딕"/>
+              </a:rPr>
+              <a:t>AI를 전혀 쓰지 않고 담당자가 전 과정을 수행하던 방식</a:t>
+            </a:r>
+            <a:r>
+              <a:rPr sz="1300" b="0">
+                <a:latin typeface="맑은 고딕"/>
+              </a:rPr>
+              <a:t>입니다.</a:t>
+            </a:r>
+          </a:p>
+        </p:txBody>
+      </p:sp>
+      <p:graphicFrame>
+        <p:nvGraphicFramePr>
+          <p:cNvPr id="4" name="Table 3"/>
+          <p:cNvGraphicFramePr>
+            <a:graphicFrameLocks noGrp="1"/>
+          </p:cNvGraphicFramePr>
+          <p:nvPr/>
+        </p:nvGraphicFramePr>
+        <p:xfrm>
+          <a:off x="640080" y="1673352"/>
+          <a:ext cx="10881360" cy="2112264"/>
+        </p:xfrm>
+        <a:graphic>
+          <a:graphicData uri="http://schemas.openxmlformats.org/drawingml/2006/table">
+            <a:tbl>
+              <a:tblPr firstRow="1" bandRow="1">
+                <a:tableStyleId>{5C22544A-7EE6-4342-B048-85BDC9FD1C3A}</a:tableStyleId>
+              </a:tblPr>
+              <a:tblGrid>
+                <a:gridCol w="3627120"/>
+                <a:gridCol w="3627120"/>
+                <a:gridCol w="3627120"/>
+              </a:tblGrid>
+              <a:tr h="301752">
+                <a:tc>
+                  <a:txBody>
+                    <a:bodyPr/>
+                    <a:lstStyle/>
+                    <a:p>
+                      <a:r>
+                        <a:rPr sz="1100" b="1">
+                          <a:latin typeface="맑은 고딕"/>
+                        </a:rPr>
+                        <a:t>단계</a:t>
+                      </a:r>
+                    </a:p>
+                  </a:txBody>
+                  <a:tcPr/>
+                </a:tc>
+                <a:tc>
+                  <a:txBody>
+                    <a:bodyPr/>
+                    <a:lstStyle/>
+                    <a:p>
+                      <a:r>
+                        <a:rPr sz="1100" b="1">
+                          <a:latin typeface="맑은 고딕"/>
+                        </a:rPr>
+                        <a:t>수작업 시 담당자가 하던 일</a:t>
+                      </a:r>
+                    </a:p>
+                  </a:txBody>
+                  <a:tcPr/>
+                </a:tc>
+                <a:tc>
+                  <a:txBody>
+                    <a:bodyPr/>
+                    <a:lstStyle/>
+                    <a:p>
+                      <a:r>
+                        <a:rPr sz="1100" b="1">
+                          <a:latin typeface="맑은 고딕"/>
+                        </a:rPr>
+                        <a:t>AI 활용 시</a:t>
+                      </a:r>
+                    </a:p>
+                  </a:txBody>
+                  <a:tcPr/>
+                </a:tc>
+              </a:tr>
+              <a:tr h="301752">
+                <a:tc>
+                  <a:txBody>
+                    <a:bodyPr/>
+                    <a:lstStyle/>
+                    <a:p>
+                      <a:r>
+                        <a:rPr sz="1100" b="0">
+                          <a:latin typeface="맑은 고딕"/>
+                        </a:rPr>
+                        <a:t>요구사항 정리</a:t>
+                      </a:r>
+                    </a:p>
+                  </a:txBody>
+                  <a:tcPr/>
+                </a:tc>
+                <a:tc>
+                  <a:txBody>
+                    <a:bodyPr/>
+                    <a:lstStyle/>
+                    <a:p>
+                      <a:r>
+                        <a:rPr sz="1100" b="0">
+                          <a:latin typeface="맑은 고딕"/>
+                        </a:rPr>
+                        <a:t>구두·메일 요청을 문서로 정리</a:t>
+                      </a:r>
+                    </a:p>
+                  </a:txBody>
+                  <a:tcPr/>
+                </a:tc>
+                <a:tc>
+                  <a:txBody>
+                    <a:bodyPr/>
+                    <a:lstStyle/>
+                    <a:p>
+                      <a:r>
+                        <a:rPr sz="1100" b="0">
+                          <a:latin typeface="맑은 고딕"/>
+                        </a:rPr>
+                        <a:t>AI가 37문항 질문, 담당자는 답변만</a:t>
+                      </a:r>
+                    </a:p>
+                  </a:txBody>
+                  <a:tcPr/>
+                </a:tc>
+              </a:tr>
+              <a:tr h="301752">
+                <a:tc>
+                  <a:txBody>
+                    <a:bodyPr/>
+                    <a:lstStyle/>
+                    <a:p>
+                      <a:r>
+                        <a:rPr sz="1100" b="0">
+                          <a:latin typeface="맑은 고딕"/>
+                        </a:rPr>
+                        <a:t>테이블 조사</a:t>
+                      </a:r>
+                    </a:p>
+                  </a:txBody>
+                  <a:tcPr/>
+                </a:tc>
+                <a:tc>
+                  <a:txBody>
+                    <a:bodyPr/>
+                    <a:lstStyle/>
+                    <a:p>
+                      <a:r>
+                        <a:rPr sz="1100" b="0">
+                          <a:latin typeface="맑은 고딕"/>
+                        </a:rPr>
+                        <a:t>SE11·업무 문서로 탐색</a:t>
+                      </a:r>
+                    </a:p>
+                  </a:txBody>
+                  <a:tcPr/>
+                </a:tc>
+                <a:tc>
+                  <a:txBody>
+                    <a:bodyPr/>
+                    <a:lstStyle/>
+                    <a:p>
+                      <a:r>
+                        <a:rPr sz="1100" b="0">
+                          <a:latin typeface="맑은 고딕"/>
+                        </a:rPr>
+                        <a:t>AI가 후보 6개 제안 → 확인</a:t>
+                      </a:r>
+                    </a:p>
+                  </a:txBody>
+                  <a:tcPr/>
+                </a:tc>
+              </a:tr>
+              <a:tr h="301752">
+                <a:tc>
+                  <a:txBody>
+                    <a:bodyPr/>
+                    <a:lstStyle/>
+                    <a:p>
+                      <a:r>
+                        <a:rPr sz="1100" b="0">
+                          <a:latin typeface="맑은 고딕"/>
+                        </a:rPr>
+                        <a:t>조인·필드 설계</a:t>
+                      </a:r>
+                    </a:p>
+                  </a:txBody>
+                  <a:tcPr/>
+                </a:tc>
+                <a:tc>
+                  <a:txBody>
+                    <a:bodyPr/>
+                    <a:lstStyle/>
+                    <a:p>
+                      <a:r>
+                        <a:rPr sz="1100" b="0">
+                          <a:latin typeface="맑은 고딕"/>
+                        </a:rPr>
+                        <a:t>키 관계 파악, 연결표 작성</a:t>
+                      </a:r>
+                    </a:p>
+                  </a:txBody>
+                  <a:tcPr/>
+                </a:tc>
+                <a:tc>
+                  <a:txBody>
+                    <a:bodyPr/>
+                    <a:lstStyle/>
+                    <a:p>
+                      <a:r>
+                        <a:rPr sz="1100" b="0">
+                          <a:latin typeface="맑은 고딕"/>
+                        </a:rPr>
+                        <a:t>AI가 연결표 초안 → 승인</a:t>
+                      </a:r>
+                    </a:p>
+                  </a:txBody>
+                  <a:tcPr/>
+                </a:tc>
+              </a:tr>
+              <a:tr h="301752">
+                <a:tc>
+                  <a:txBody>
+                    <a:bodyPr/>
+                    <a:lstStyle/>
+                    <a:p>
+                      <a:r>
+                        <a:rPr sz="1100" b="0">
+                          <a:latin typeface="맑은 고딕"/>
+                        </a:rPr>
+                        <a:t>코드 작성</a:t>
+                      </a:r>
+                    </a:p>
+                  </a:txBody>
+                  <a:tcPr/>
+                </a:tc>
+                <a:tc>
+                  <a:txBody>
+                    <a:bodyPr/>
+                    <a:lstStyle/>
+                    <a:p>
+                      <a:r>
+                        <a:rPr sz="1100" b="0">
+                          <a:latin typeface="맑은 고딕"/>
+                        </a:rPr>
+                        <a:t>ABAP 전량 타이핑</a:t>
+                      </a:r>
+                    </a:p>
+                  </a:txBody>
+                  <a:tcPr/>
+                </a:tc>
+                <a:tc>
+                  <a:txBody>
+                    <a:bodyPr/>
+                    <a:lstStyle/>
+                    <a:p>
+                      <a:r>
+                        <a:rPr sz="1100" b="0">
+                          <a:latin typeface="맑은 고딕"/>
+                        </a:rPr>
+                        <a:t>AI가 </a:t>
+                      </a:r>
+                      <a:r>
+                        <a:rPr sz="1100" b="1">
+                          <a:latin typeface="맑은 고딕"/>
+                        </a:rPr>
+                        <a:t>156줄</a:t>
+                      </a:r>
+                      <a:r>
+                        <a:rPr sz="1100" b="0">
+                          <a:latin typeface="맑은 고딕"/>
+                        </a:rPr>
+                        <a:t> 생성</a:t>
+                      </a:r>
+                    </a:p>
+                  </a:txBody>
+                  <a:tcPr/>
+                </a:tc>
+              </a:tr>
+              <a:tr h="301752">
+                <a:tc>
+                  <a:txBody>
+                    <a:bodyPr/>
+                    <a:lstStyle/>
+                    <a:p>
+                      <a:r>
+                        <a:rPr sz="1100" b="0">
+                          <a:latin typeface="맑은 고딕"/>
+                        </a:rPr>
+                        <a:t>테스트 설계</a:t>
+                      </a:r>
+                    </a:p>
+                  </a:txBody>
+                  <a:tcPr/>
+                </a:tc>
+                <a:tc>
+                  <a:txBody>
+                    <a:bodyPr/>
+                    <a:lstStyle/>
+                    <a:p>
+                      <a:r>
+                        <a:rPr sz="1100" b="0">
+                          <a:latin typeface="맑은 고딕"/>
+                        </a:rPr>
+                        <a:t>케이스·테스트값 작성</a:t>
+                      </a:r>
+                    </a:p>
+                  </a:txBody>
+                  <a:tcPr/>
+                </a:tc>
+                <a:tc>
+                  <a:txBody>
+                    <a:bodyPr/>
+                    <a:lstStyle/>
+                    <a:p>
+                      <a:r>
+                        <a:rPr sz="1100" b="0">
+                          <a:latin typeface="맑은 고딕"/>
+                        </a:rPr>
+                        <a:t>AI가 T1~T3 작성</a:t>
+                      </a:r>
+                    </a:p>
+                  </a:txBody>
+                  <a:tcPr/>
+                </a:tc>
+              </a:tr>
+              <a:tr h="301752">
+                <a:tc>
+                  <a:txBody>
+                    <a:bodyPr/>
+                    <a:lstStyle/>
+                    <a:p>
+                      <a:r>
+                        <a:rPr sz="1100" b="0">
+                          <a:latin typeface="맑은 고딕"/>
+                        </a:rPr>
+                        <a:t>운영 이관</a:t>
+                      </a:r>
+                    </a:p>
+                  </a:txBody>
+                  <a:tcPr/>
+                </a:tc>
+                <a:tc>
+                  <a:txBody>
+                    <a:bodyPr/>
+                    <a:lstStyle/>
+                    <a:p>
+                      <a:r>
+                        <a:rPr sz="1100" b="0">
+                          <a:latin typeface="맑은 고딕"/>
+                        </a:rPr>
+                        <a:t>권한 조사, TR·잡 판단</a:t>
+                      </a:r>
+                    </a:p>
+                  </a:txBody>
+                  <a:tcPr/>
+                </a:tc>
+                <a:tc>
+                  <a:txBody>
+                    <a:bodyPr/>
+                    <a:lstStyle/>
+                    <a:p>
+                      <a:r>
+                        <a:rPr sz="1100" b="0">
+                          <a:latin typeface="맑은 고딕"/>
+                        </a:rPr>
+                        <a:t>AI가 권한·TR 초안·판정 작성</a:t>
+                      </a:r>
+                    </a:p>
+                  </a:txBody>
+                  <a:tcPr/>
+                </a:tc>
+              </a:tr>
+            </a:tbl>
+          </a:graphicData>
+        </a:graphic>
+      </p:graphicFrame>
+      <p:sp>
+        <p:nvSpPr>
+          <p:cNvPr id="5" name="TextBox 4"/>
+          <p:cNvSpPr txBox="1"/>
+          <p:nvPr/>
+        </p:nvSpPr>
+        <p:spPr>
+          <a:xfrm>
+            <a:off x="640080" y="3922776"/>
+            <a:ext cx="10881360" cy="987552"/>
+          </a:xfrm>
+          <a:prstGeom prst="rect">
+            <a:avLst/>
+          </a:prstGeom>
+          <a:noFill/>
+        </p:spPr>
+        <p:txBody>
+          <a:bodyPr wrap="square">
+            <a:spAutoFit/>
+          </a:bodyPr>
+          <a:lstStyle/>
+          <a:p>
+            <a:r>
+              <a:rPr sz="1300" b="0">
+                <a:latin typeface="맑은 고딕"/>
+              </a:rPr>
+              <a:t>• 담당자에게 남는 일은 </a:t>
+            </a:r>
+            <a:r>
+              <a:rPr sz="1300" b="1">
+                <a:latin typeface="맑은 고딕"/>
+              </a:rPr>
+              <a:t>확인·승인·SAP 조작(복붙·활성화·실행)</a:t>
+            </a:r>
+          </a:p>
+          <a:p>
+            <a:r>
+              <a:rPr sz="1300" b="0">
+                <a:latin typeface="맑은 고딕"/>
+              </a:rPr>
+              <a:t>• </a:t>
+            </a:r>
+            <a:r>
+              <a:rPr sz="1300" b="1">
+                <a:latin typeface="맑은 고딕"/>
+              </a:rPr>
+              <a:t>판단은 사람, 작성은 AI</a:t>
+            </a:r>
+            <a:r>
+              <a:rPr sz="1300" b="0">
+                <a:latin typeface="맑은 고딕"/>
+              </a:rPr>
+              <a:t> 로 분담</a:t>
+            </a:r>
+          </a:p>
+          <a:p>
+            <a:r>
+              <a:rPr sz="1300" b="0">
+                <a:latin typeface="맑은 고딕"/>
+              </a:rPr>
+              <a:t>• 담당자 / 빈도 / 1건 공수: </a:t>
+            </a:r>
+            <a:r>
+              <a:rPr sz="1300" b="1">
+                <a:latin typeface="맑은 고딕"/>
+              </a:rPr>
+              <a:t>[실측 기입]</a:t>
+            </a:r>
+            <a:r>
+              <a:rPr sz="1300" b="0">
+                <a:latin typeface="맑은 고딕"/>
+              </a:rPr>
+              <a:t> — 양식 </a:t>
+            </a:r>
+            <a:r>
+              <a:rPr sz="1300" b="0">
+                <a:solidFill>
+                  <a:srgbClr val="8B2452"/>
+                </a:solidFill>
+                <a:latin typeface="Consolas"/>
+              </a:rPr>
+              <a:t>report/effect-worksheet.md</a:t>
+            </a:r>
+          </a:p>
+        </p:txBody>
+      </p:sp>
+    </p:spTree>
+  </p:cSld>
+  <p:clrMapOvr>
+    <a:masterClrMapping/>
+  </p:clrMapOvr>
+</p:sld>
+</file>
+
+<file path=ppt/slides/slide8.xml><?xml version="1.0" encoding="utf-8"?>
+<p:sld xmlns:a="http://schemas.openxmlformats.org/drawingml/2006/main" xmlns:p="http://schemas.openxmlformats.org/presentationml/2006/main" xmlns:r="http://schemas.openxmlformats.org/officeDocument/2006/relationships">
+  <p:cSld>
+    <p:spTree>
+      <p:nvGrpSpPr>
+        <p:cNvPr id="1" name=""/>
+        <p:cNvGrpSpPr/>
+        <p:nvPr/>
+      </p:nvGrpSpPr>
+      <p:grpSpPr/>
+      <p:sp>
+        <p:nvSpPr>
+          <p:cNvPr id="2" name="TextBox 1"/>
+          <p:cNvSpPr txBox="1"/>
+          <p:nvPr/>
+        </p:nvSpPr>
+        <p:spPr>
+          <a:xfrm>
+            <a:off x="548640" y="320040"/>
+            <a:ext cx="11064240" cy="822960"/>
+          </a:xfrm>
+          <a:prstGeom prst="rect">
+            <a:avLst/>
+          </a:prstGeom>
+          <a:noFill/>
+        </p:spPr>
+        <p:txBody>
+          <a:bodyPr wrap="square">
+            <a:spAutoFit/>
+          </a:bodyPr>
+          <a:lstStyle/>
+          <a:p>
+            <a:r>
+              <a:rPr sz="2400" b="1">
+                <a:solidFill>
+                  <a:srgbClr val="1F4E79"/>
+                </a:solidFill>
+                <a:latin typeface="맑은 고딕"/>
+              </a:rPr>
+              <a:t>5. 실패 비용 구조 — 게이트를 앞단에 집중시킨 이유</a:t>
             </a:r>
           </a:p>
         </p:txBody>
@@ -8027,7 +10906,7 @@
 </p:sld>
 </file>
 
-<file path=ppt/slides/slide7.xml><?xml version="1.0" encoding="utf-8"?>
+<file path=ppt/slides/slide9.xml><?xml version="1.0" encoding="utf-8"?>
 <p:sld xmlns:a="http://schemas.openxmlformats.org/drawingml/2006/main" xmlns:p="http://schemas.openxmlformats.org/presentationml/2006/main" xmlns:r="http://schemas.openxmlformats.org/officeDocument/2006/relationships">
   <p:cSld>
     <p:spTree>
@@ -8066,197 +10945,130 @@
                 </a:solidFill>
                 <a:latin typeface="맑은 고딕"/>
               </a:rPr>
-              <a:t>5. 개선 방법 — 활용 AI 도구</a:t>
-            </a:r>
-          </a:p>
-        </p:txBody>
-      </p:sp>
-      <p:graphicFrame>
-        <p:nvGraphicFramePr>
-          <p:cNvPr id="3" name="Table 2"/>
-          <p:cNvGraphicFramePr>
-            <a:graphicFrameLocks noGrp="1"/>
-          </p:cNvGraphicFramePr>
+              <a:t>6. 개선 방법 — 두 단계로 진행했다</a:t>
+            </a:r>
+          </a:p>
+        </p:txBody>
+      </p:sp>
+      <p:sp>
+        <p:nvSpPr>
+          <p:cNvPr id="3" name="TextBox 2"/>
+          <p:cNvSpPr txBox="1"/>
           <p:nvPr/>
-        </p:nvGraphicFramePr>
-        <p:xfrm>
-          <a:off x="640080" y="1234440"/>
-          <a:ext cx="10881360" cy="1508760"/>
-        </p:xfrm>
-        <a:graphic>
-          <a:graphicData uri="http://schemas.openxmlformats.org/drawingml/2006/table">
-            <a:tbl>
-              <a:tblPr firstRow="1" bandRow="1">
-                <a:tableStyleId>{5C22544A-7EE6-4342-B048-85BDC9FD1C3A}</a:tableStyleId>
-              </a:tblPr>
-              <a:tblGrid>
-                <a:gridCol w="5440680"/>
-                <a:gridCol w="5440680"/>
-              </a:tblGrid>
-              <a:tr h="301752">
-                <a:tc>
-                  <a:txBody>
-                    <a:bodyPr/>
-                    <a:lstStyle/>
-                    <a:p>
-                      <a:r>
-                        <a:rPr sz="1100" b="1">
-                          <a:latin typeface="맑은 고딕"/>
-                        </a:rPr>
-                        <a:t>도구</a:t>
-                      </a:r>
-                    </a:p>
-                  </a:txBody>
-                  <a:tcPr/>
-                </a:tc>
-                <a:tc>
-                  <a:txBody>
-                    <a:bodyPr/>
-                    <a:lstStyle/>
-                    <a:p>
-                      <a:r>
-                        <a:rPr sz="1100" b="1">
-                          <a:latin typeface="맑은 고딕"/>
-                        </a:rPr>
-                        <a:t>용도</a:t>
-                      </a:r>
-                    </a:p>
-                  </a:txBody>
-                  <a:tcPr/>
-                </a:tc>
-              </a:tr>
-              <a:tr h="301752">
-                <a:tc>
-                  <a:txBody>
-                    <a:bodyPr/>
-                    <a:lstStyle/>
-                    <a:p>
-                      <a:r>
-                        <a:rPr sz="1100" b="1">
-                          <a:latin typeface="맑은 고딕"/>
-                        </a:rPr>
-                        <a:t>Cursor AI</a:t>
-                      </a:r>
-                    </a:p>
-                  </a:txBody>
-                  <a:tcPr/>
-                </a:tc>
-                <a:tc>
-                  <a:txBody>
-                    <a:bodyPr/>
-                    <a:lstStyle/>
-                    <a:p>
-                      <a:r>
-                        <a:rPr sz="1100" b="0">
-                          <a:latin typeface="맑은 고딕"/>
-                        </a:rPr>
-                        <a:t>주 작업 환경. 저장소 규칙 자동 적용, 인터뷰·설계·코드 생성</a:t>
-                      </a:r>
-                    </a:p>
-                  </a:txBody>
-                  <a:tcPr/>
-                </a:tc>
-              </a:tr>
-              <a:tr h="301752">
-                <a:tc>
-                  <a:txBody>
-                    <a:bodyPr/>
-                    <a:lstStyle/>
-                    <a:p>
-                      <a:r>
-                        <a:rPr sz="1100" b="0">
-                          <a:latin typeface="맑은 고딕"/>
-                        </a:rPr>
-                        <a:t>Cursor Cloud Agent</a:t>
-                      </a:r>
-                    </a:p>
-                  </a:txBody>
-                  <a:tcPr/>
-                </a:tc>
-                <a:tc>
-                  <a:txBody>
-                    <a:bodyPr/>
-                    <a:lstStyle/>
-                    <a:p>
-                      <a:r>
-                        <a:rPr sz="1100" b="0">
-                          <a:latin typeface="맑은 고딕"/>
-                        </a:rPr>
-                        <a:t>저장소 구조 최적화·자동화 도구 개발</a:t>
-                      </a:r>
-                    </a:p>
-                  </a:txBody>
-                  <a:tcPr/>
-                </a:tc>
-              </a:tr>
-              <a:tr h="301752">
-                <a:tc>
-                  <a:txBody>
-                    <a:bodyPr/>
-                    <a:lstStyle/>
-                    <a:p>
-                      <a:r>
-                        <a:rPr sz="1100" b="0">
-                          <a:latin typeface="맑은 고딕"/>
-                        </a:rPr>
-                        <a:t>범용 LLM (ChatGPT·Claude)</a:t>
-                      </a:r>
-                    </a:p>
-                  </a:txBody>
-                  <a:tcPr/>
-                </a:tc>
-                <a:tc>
-                  <a:txBody>
-                    <a:bodyPr/>
-                    <a:lstStyle/>
-                    <a:p>
-                      <a:r>
-                        <a:rPr sz="1100" b="0">
-                          <a:latin typeface="맑은 고딕"/>
-                        </a:rPr>
-                        <a:t>대체 수단. 프롬프트 조각 등록으로 동일 규칙 적용</a:t>
-                      </a:r>
-                    </a:p>
-                  </a:txBody>
-                  <a:tcPr/>
-                </a:tc>
-              </a:tr>
-              <a:tr h="301752">
-                <a:tc>
-                  <a:txBody>
-                    <a:bodyPr/>
-                    <a:lstStyle/>
-                    <a:p>
-                      <a:r>
-                        <a:rPr sz="1100" b="0">
-                          <a:latin typeface="맑은 고딕"/>
-                        </a:rPr>
-                        <a:t>Python 3 (표준 라이브러리)</a:t>
-                      </a:r>
-                    </a:p>
-                  </a:txBody>
-                  <a:tcPr/>
-                </a:tc>
-                <a:tc>
-                  <a:txBody>
-                    <a:bodyPr/>
-                    <a:lstStyle/>
-                    <a:p>
-                      <a:r>
-                        <a:rPr sz="1100" b="0">
-                          <a:latin typeface="맑은 고딕"/>
-                        </a:rPr>
-                        <a:t>자동 점검기 구동. 외부 패키지 불필요</a:t>
-                      </a:r>
-                    </a:p>
-                  </a:txBody>
-                  <a:tcPr/>
-                </a:tc>
-              </a:tr>
-            </a:tbl>
-          </a:graphicData>
-        </a:graphic>
-      </p:graphicFrame>
+        </p:nvSpPr>
+        <p:spPr>
+          <a:xfrm>
+            <a:off x="640080" y="1234440"/>
+            <a:ext cx="10881360" cy="2487168"/>
+          </a:xfrm>
+          <a:prstGeom prst="rect">
+            <a:avLst/>
+          </a:prstGeom>
+          <a:noFill/>
+        </p:spPr>
+        <p:txBody>
+          <a:bodyPr wrap="square">
+            <a:spAutoFit/>
+          </a:bodyPr>
+          <a:lstStyle/>
+          <a:p>
+            <a:r>
+              <a:rPr sz="1000">
+                <a:latin typeface="Consolas"/>
+              </a:rPr>
+              <a:t>[1단계] AI 도입</a:t>
+            </a:r>
+          </a:p>
+          <a:p>
+            <a:r>
+              <a:rPr sz="1000">
+                <a:latin typeface="Consolas"/>
+              </a:rPr>
+              <a:t>   수작업 전량 → AI가 설계 초안·코드·테스트·이관 문서 생성</a:t>
+            </a:r>
+          </a:p>
+          <a:p>
+            <a:r>
+              <a:rPr sz="1000">
+                <a:latin typeface="Consolas"/>
+              </a:rPr>
+              <a:t>   → 담당자는 확인·승인·SAP 조작만 수행</a:t>
+            </a:r>
+          </a:p>
+          <a:p>
+            <a:r>
+              <a:rPr sz="1000">
+                <a:latin typeface="Consolas"/>
+              </a:rPr>
+              <a:t>   → 효율은 올랐으나 활성화 실패·환각 위험이 남음</a:t>
+            </a:r>
+          </a:p>
+          <a:p>
+            <a:r>
+              <a:rPr sz="1000">
+                <a:latin typeface="Consolas"/>
+              </a:rPr>
+              <a:t/>
+            </a:r>
+          </a:p>
+          <a:p>
+            <a:r>
+              <a:rPr sz="1000">
+                <a:latin typeface="Consolas"/>
+              </a:rPr>
+              <a:t>[2단계] 저장소로 방향·가이드 제공          ← 본 저장소의 역할</a:t>
+            </a:r>
+          </a:p>
+          <a:p>
+            <a:r>
+              <a:rPr sz="1000">
+                <a:latin typeface="Consolas"/>
+              </a:rPr>
+              <a:t>   요구사항: 37문항 인터뷰로 강제 확정 (Gate U/D/D-2/F)</a:t>
+            </a:r>
+          </a:p>
+          <a:p>
+            <a:r>
+              <a:rPr sz="1000">
+                <a:latin typeface="Consolas"/>
+              </a:rPr>
+              <a:t>   사실관계: DDIC 확정값만 사용, 모르면 [확인필요] (Gate 1)</a:t>
+            </a:r>
+          </a:p>
+          <a:p>
+            <a:r>
+              <a:rPr sz="1000">
+                <a:latin typeface="Consolas"/>
+              </a:rPr>
+              <a:t>   출력형식: 복붙 계약으로 생략 없는 완전 소스 고정</a:t>
+            </a:r>
+          </a:p>
+          <a:p>
+            <a:r>
+              <a:rPr sz="1000">
+                <a:latin typeface="Consolas"/>
+              </a:rPr>
+              <a:t>   품질검증: 17규칙 기계 점검으로 코드 제시 전 차단 (Gate 3)</a:t>
+            </a:r>
+          </a:p>
+          <a:p>
+            <a:r>
+              <a:rPr sz="1000">
+                <a:latin typeface="Consolas"/>
+              </a:rPr>
+              <a:t>   경험축적: 발생 오류를 패턴→규칙→골격으로 승격 (Gate 4)</a:t>
+            </a:r>
+          </a:p>
+          <a:p>
+            <a:r>
+              <a:rPr sz="1000">
+                <a:latin typeface="Consolas"/>
+              </a:rPr>
+              <a:t>   → AI 산출물이 "한 번에 활성화되는 코드"에 수렴</a:t>
+            </a:r>
+          </a:p>
+        </p:txBody>
+      </p:sp>
       <p:sp>
         <p:nvSpPr>
           <p:cNvPr id="4" name="TextBox 3"/>
@@ -8265,7 +11077,7 @@
         </p:nvSpPr>
         <p:spPr>
           <a:xfrm>
-            <a:off x="640080" y="2880360"/>
+            <a:off x="640080" y="3831336"/>
             <a:ext cx="10881360" cy="658368"/>
           </a:xfrm>
           <a:prstGeom prst="rect">
@@ -8283,406 +11095,33 @@
               <a:rPr sz="1300" b="0">
                 <a:latin typeface="맑은 고딕"/>
               </a:rPr>
-              <a:t>• </a:t>
+              <a:t>• 저장소는 목적이 아니라 </a:t>
             </a:r>
             <a:r>
               <a:rPr sz="1300" b="1">
                 <a:latin typeface="맑은 고딕"/>
               </a:rPr>
-              <a:t>SAP 시스템에는 어떤 도구도 설치하지 않음</a:t>
-            </a:r>
-            <a:r>
-              <a:rPr sz="1300" b="0">
-                <a:latin typeface="맑은 고딕"/>
-              </a:rPr>
-              <a:t> — 기존 SE38/SE37 방식을 그대로 두고 앞단만 보강</a:t>
-            </a:r>
-          </a:p>
-          <a:p>
-            <a:r>
-              <a:rPr sz="1300" b="0">
-                <a:latin typeface="맑은 고딕"/>
-              </a:rPr>
-              <a:t>• 시스템 영향도·보안 검토 부담 없음</a:t>
-            </a:r>
-          </a:p>
-        </p:txBody>
-      </p:sp>
-    </p:spTree>
-  </p:cSld>
-  <p:clrMapOvr>
-    <a:masterClrMapping/>
-  </p:clrMapOvr>
-</p:sld>
-</file>
-
-<file path=ppt/slides/slide8.xml><?xml version="1.0" encoding="utf-8"?>
-<p:sld xmlns:a="http://schemas.openxmlformats.org/drawingml/2006/main" xmlns:p="http://schemas.openxmlformats.org/presentationml/2006/main" xmlns:r="http://schemas.openxmlformats.org/officeDocument/2006/relationships">
-  <p:cSld>
-    <p:spTree>
-      <p:nvGrpSpPr>
-        <p:cNvPr id="1" name=""/>
-        <p:cNvGrpSpPr/>
-        <p:nvPr/>
-      </p:nvGrpSpPr>
-      <p:grpSpPr/>
-      <p:sp>
-        <p:nvSpPr>
-          <p:cNvPr id="2" name="TextBox 1"/>
-          <p:cNvSpPr txBox="1"/>
-          <p:nvPr/>
-        </p:nvSpPr>
-        <p:spPr>
-          <a:xfrm>
-            <a:off x="548640" y="320040"/>
-            <a:ext cx="11064240" cy="822960"/>
-          </a:xfrm>
-          <a:prstGeom prst="rect">
-            <a:avLst/>
-          </a:prstGeom>
-          <a:noFill/>
-        </p:spPr>
-        <p:txBody>
-          <a:bodyPr wrap="square">
-            <a:spAutoFit/>
-          </a:bodyPr>
-          <a:lstStyle/>
-          <a:p>
-            <a:r>
-              <a:rPr sz="2400" b="1">
-                <a:solidFill>
-                  <a:srgbClr val="1F4E79"/>
-                </a:solidFill>
-                <a:latin typeface="맑은 고딕"/>
-              </a:rPr>
-              <a:t>6. 개선 방법 — 설계 원칙 3가지</a:t>
-            </a:r>
-          </a:p>
-        </p:txBody>
-      </p:sp>
-      <p:sp>
-        <p:nvSpPr>
-          <p:cNvPr id="3" name="TextBox 2"/>
-          <p:cNvSpPr txBox="1"/>
-          <p:nvPr/>
-        </p:nvSpPr>
-        <p:spPr>
-          <a:xfrm>
-            <a:off x="640080" y="1234440"/>
-            <a:ext cx="10881360" cy="1645920"/>
-          </a:xfrm>
-          <a:prstGeom prst="rect">
-            <a:avLst/>
-          </a:prstGeom>
-          <a:noFill/>
-        </p:spPr>
-        <p:txBody>
-          <a:bodyPr wrap="square">
-            <a:spAutoFit/>
-          </a:bodyPr>
-          <a:lstStyle/>
-          <a:p>
-            <a:r>
-              <a:rPr sz="1300" b="0">
-                <a:latin typeface="맑은 고딕"/>
-              </a:rPr>
-              <a:t>• </a:t>
+              <a:t>AI 출력 품질·요구사항 반영도를 끌어올리는 수단</a:t>
+            </a:r>
+          </a:p>
+          <a:p>
+            <a:r>
+              <a:rPr sz="1300" b="0">
+                <a:latin typeface="맑은 고딕"/>
+              </a:rPr>
+              <a:t>• 담당자는 Cursor로 저장소를 열고 </a:t>
             </a:r>
             <a:r>
               <a:rPr sz="1300" b="1">
                 <a:latin typeface="맑은 고딕"/>
               </a:rPr>
-              <a:t>DDIC 그라운딩</a:t>
-            </a:r>
-            <a:r>
-              <a:rPr sz="1300" b="0">
-                <a:latin typeface="맑은 고딕"/>
-              </a:rPr>
-              <a:t> — 담당자가 확인해 준 값, 또는 과거 활성화로 실재가 증명된 값만 사용. 모르면 추측 코드 대신 질문으로 되돌림. 가정 3건 초과 시 코드 생성 중단</a:t>
-            </a:r>
-          </a:p>
-          <a:p>
-            <a:r>
-              <a:rPr sz="1300" b="0">
-                <a:latin typeface="맑은 고딕"/>
-              </a:rPr>
-              <a:t>• </a:t>
-            </a:r>
-            <a:r>
-              <a:rPr sz="1300" b="1">
-                <a:latin typeface="맑은 고딕"/>
-              </a:rPr>
-              <a:t>릴리스 게이트</a:t>
-            </a:r>
-            <a:r>
-              <a:rPr sz="1300" b="0">
-                <a:latin typeface="맑은 고딕"/>
-              </a:rPr>
-              <a:t> — 기준 </a:t>
-            </a:r>
-            <a:r>
-              <a:rPr sz="1300" b="0">
-                <a:solidFill>
-                  <a:srgbClr val="8B2452"/>
-                </a:solidFill>
-                <a:latin typeface="Consolas"/>
-              </a:rPr>
-              <a:t>SAP_BASIS 750 / S/4HANA</a:t>
-            </a:r>
-            <a:r>
-              <a:rPr sz="1300" b="0">
-                <a:latin typeface="맑은 고딕"/>
-              </a:rPr>
-              <a:t> 고정, 코드 상단 명시. 보수 문법 필요 건만 ECC 호환으로 폴백</a:t>
-            </a:r>
-          </a:p>
-          <a:p>
-            <a:r>
-              <a:rPr sz="1300" b="0">
-                <a:latin typeface="맑은 고딕"/>
-              </a:rPr>
-              <a:t>• </a:t>
-            </a:r>
-            <a:r>
-              <a:rPr sz="1300" b="1">
-                <a:latin typeface="맑은 고딕"/>
-              </a:rPr>
-              <a:t>복붙 계약</a:t>
-            </a:r>
-            <a:r>
-              <a:rPr sz="1300" b="0">
-                <a:latin typeface="맑은 고딕"/>
-              </a:rPr>
-              <a:t> — 완전 소스 1개 + 번호 매긴 복사 순서 + DDIC·메시지·T-code 정의서 + T1~T3 테스트 표 + 오류 회수 양식. 담당자가 추가 판단 없이 그대로 옮길 수 있는 상태로만 전달</a:t>
-            </a:r>
-          </a:p>
-        </p:txBody>
-      </p:sp>
-    </p:spTree>
-  </p:cSld>
-  <p:clrMapOvr>
-    <a:masterClrMapping/>
-  </p:clrMapOvr>
-</p:sld>
-</file>
-
-<file path=ppt/slides/slide9.xml><?xml version="1.0" encoding="utf-8"?>
-<p:sld xmlns:a="http://schemas.openxmlformats.org/drawingml/2006/main" xmlns:p="http://schemas.openxmlformats.org/presentationml/2006/main" xmlns:r="http://schemas.openxmlformats.org/officeDocument/2006/relationships">
-  <p:cSld>
-    <p:spTree>
-      <p:nvGrpSpPr>
-        <p:cNvPr id="1" name=""/>
-        <p:cNvGrpSpPr/>
-        <p:nvPr/>
-      </p:nvGrpSpPr>
-      <p:grpSpPr/>
-      <p:sp>
-        <p:nvSpPr>
-          <p:cNvPr id="2" name="TextBox 1"/>
-          <p:cNvSpPr txBox="1"/>
-          <p:nvPr/>
-        </p:nvSpPr>
-        <p:spPr>
-          <a:xfrm>
-            <a:off x="548640" y="320040"/>
-            <a:ext cx="11064240" cy="822960"/>
-          </a:xfrm>
-          <a:prstGeom prst="rect">
-            <a:avLst/>
-          </a:prstGeom>
-          <a:noFill/>
-        </p:spPr>
-        <p:txBody>
-          <a:bodyPr wrap="square">
-            <a:spAutoFit/>
-          </a:bodyPr>
-          <a:lstStyle/>
-          <a:p>
-            <a:r>
-              <a:rPr sz="2400" b="1">
-                <a:solidFill>
-                  <a:srgbClr val="1F4E79"/>
-                </a:solidFill>
-                <a:latin typeface="맑은 고딕"/>
-              </a:rPr>
-              <a:t>7. 개선 방법 — 진행 절차 9개 게이트</a:t>
-            </a:r>
-          </a:p>
-        </p:txBody>
-      </p:sp>
-      <p:sp>
-        <p:nvSpPr>
-          <p:cNvPr id="3" name="TextBox 2"/>
-          <p:cNvSpPr txBox="1"/>
-          <p:nvPr/>
-        </p:nvSpPr>
-        <p:spPr>
-          <a:xfrm>
-            <a:off x="640080" y="1234440"/>
-            <a:ext cx="10881360" cy="2295144"/>
-          </a:xfrm>
-          <a:prstGeom prst="rect">
-            <a:avLst/>
-          </a:prstGeom>
-          <a:noFill/>
-        </p:spPr>
-        <p:txBody>
-          <a:bodyPr wrap="square">
-            <a:spAutoFit/>
-          </a:bodyPr>
-          <a:lstStyle/>
-          <a:p>
-            <a:r>
-              <a:rPr sz="1000">
-                <a:latin typeface="Consolas"/>
-              </a:rPr>
-              <a:t>[0]   사전준비 1회 ─ 릴리스·패키지·네이밍            │ Gate 0</a:t>
-            </a:r>
-          </a:p>
-          <a:p>
-            <a:r>
-              <a:rPr sz="1000">
-                <a:latin typeface="Consolas"/>
-              </a:rPr>
-              <a:t>[0.5] 인터뷰 설계 25문항 (한 턴 3문항, [모름] 허용)</a:t>
-            </a:r>
-          </a:p>
-          <a:p>
-            <a:r>
-              <a:rPr sz="1000">
-                <a:latin typeface="Consolas"/>
-              </a:rPr>
-              <a:t>        │ Gate U   AI 이해 내용 확인서 승인</a:t>
-            </a:r>
-          </a:p>
-          <a:p>
-            <a:r>
-              <a:rPr sz="1000">
-                <a:latin typeface="Consolas"/>
-              </a:rPr>
-              <a:t>        │ Gate D   화면 텍스트 목업 컨펌</a:t>
-            </a:r>
-          </a:p>
-          <a:p>
-            <a:r>
-              <a:rPr sz="1000">
-                <a:latin typeface="Consolas"/>
-              </a:rPr>
-              <a:t>        │ Gate D-2 화면 이미지 재검증 (S1 선택화면 / S2 결과 분리)</a:t>
-            </a:r>
-          </a:p>
-          <a:p>
-            <a:r>
-              <a:rPr sz="1000">
-                <a:latin typeface="Consolas"/>
-              </a:rPr>
-              <a:t>        │ Gate F   필드 연결표·조인·구현 방식 승인</a:t>
-            </a:r>
-          </a:p>
-          <a:p>
-            <a:r>
-              <a:rPr sz="1000">
-                <a:latin typeface="Consolas"/>
-              </a:rPr>
-              <a:t>[1]   DDIC 캐시 확인 → 부족분만 SE11 수집            │ Gate 1 ★빈칸 시 코드 금지</a:t>
-            </a:r>
-          </a:p>
-          <a:p>
-            <a:r>
-              <a:rPr sz="1000">
-                <a:latin typeface="Consolas"/>
-              </a:rPr>
-              <a:t>[2]   스펙 확정                                     │ Gate 2 "OK" 전 코드 금지</a:t>
-            </a:r>
-          </a:p>
-          <a:p>
-            <a:r>
-              <a:rPr sz="1000">
-                <a:latin typeface="Consolas"/>
-              </a:rPr>
-              <a:t>[3]   코드 생성 (골격 복제 → 세션 값 교체)            │ Gate 3 자동 점검 오류 0건</a:t>
-            </a:r>
-          </a:p>
-          <a:p>
-            <a:r>
-              <a:rPr sz="1000">
-                <a:latin typeface="Consolas"/>
-              </a:rPr>
-              <a:t>[4]   활성화 → 실행 테스트 → 오류 회수·수정           │ Gate 4 결과 회수 전 이관 금지</a:t>
-            </a:r>
-          </a:p>
-          <a:p>
-            <a:r>
-              <a:rPr sz="1000">
-                <a:latin typeface="Consolas"/>
-              </a:rPr>
-              <a:t>[5]   운영 이관 → 패턴·DDIC 캐시 승격</a:t>
-            </a:r>
-          </a:p>
-        </p:txBody>
-      </p:sp>
-      <p:sp>
-        <p:nvSpPr>
-          <p:cNvPr id="4" name="TextBox 3"/>
-          <p:cNvSpPr txBox="1"/>
-          <p:nvPr/>
-        </p:nvSpPr>
-        <p:spPr>
-          <a:xfrm>
-            <a:off x="640080" y="3639312"/>
-            <a:ext cx="10881360" cy="658368"/>
-          </a:xfrm>
-          <a:prstGeom prst="rect">
-            <a:avLst/>
-          </a:prstGeom>
-          <a:noFill/>
-        </p:spPr>
-        <p:txBody>
-          <a:bodyPr wrap="square">
-            <a:spAutoFit/>
-          </a:bodyPr>
-          <a:lstStyle/>
-          <a:p>
-            <a:r>
-              <a:rPr sz="1300" b="0">
-                <a:latin typeface="맑은 고딕"/>
-              </a:rPr>
-              <a:t>• 전 구간이 </a:t>
-            </a:r>
-            <a:r>
-              <a:rPr sz="1300" b="1">
-                <a:latin typeface="맑은 고딕"/>
-              </a:rPr>
-              <a:t>AI가 묻고 담당자가 답하는 형식</a:t>
-            </a:r>
-            <a:r>
-              <a:rPr sz="1300" b="0">
-                <a:latin typeface="맑은 고딕"/>
-              </a:rPr>
-              <a:t> (설계 25문항 + 검증·이관 12문항 = 37문항)</a:t>
-            </a:r>
-          </a:p>
-          <a:p>
-            <a:r>
-              <a:rPr sz="1300" b="0">
-                <a:latin typeface="맑은 고딕"/>
-              </a:rPr>
-              <a:t>• 담당자는 양식을 작성하지 않음. 모르는 항목은 </a:t>
-            </a:r>
-            <a:r>
-              <a:rPr sz="1300" b="0">
-                <a:solidFill>
-                  <a:srgbClr val="8B2452"/>
-                </a:solidFill>
-                <a:latin typeface="Consolas"/>
-              </a:rPr>
-              <a:t>[모름]</a:t>
-            </a:r>
-            <a:r>
-              <a:rPr sz="1300" b="0">
-                <a:latin typeface="맑은 고딕"/>
-              </a:rPr>
-              <a:t>으로 넘김</a:t>
+              <a:t>요청만</a:t>
+            </a:r>
+            <a:r>
+              <a:rPr sz="1300" b="0">
+                <a:latin typeface="맑은 고딕"/>
+              </a:rPr>
+              <a:t> 하면 규칙이 자동 적용</a:t>
             </a:r>
           </a:p>
         </p:txBody>
